--- a/TE - Lecture-7-3Aug2026.pptx
+++ b/TE - Lecture-7-3Aug2026.pptx
@@ -5,10 +5,10 @@
     <p:sldMasterId id="2147483692" r:id="rId1"/>
   </p:sldMasterIdLst>
   <p:notesMasterIdLst>
-    <p:notesMasterId r:id="rId31"/>
+    <p:notesMasterId r:id="rId38"/>
   </p:notesMasterIdLst>
   <p:handoutMasterIdLst>
-    <p:handoutMasterId r:id="rId32"/>
+    <p:handoutMasterId r:id="rId39"/>
   </p:handoutMasterIdLst>
   <p:sldIdLst>
     <p:sldId id="257" r:id="rId2"/>
@@ -27,19 +27,26 @@
     <p:sldId id="279" r:id="rId15"/>
     <p:sldId id="280" r:id="rId16"/>
     <p:sldId id="281" r:id="rId17"/>
-    <p:sldId id="282" r:id="rId18"/>
-    <p:sldId id="283" r:id="rId19"/>
-    <p:sldId id="284" r:id="rId20"/>
-    <p:sldId id="285" r:id="rId21"/>
-    <p:sldId id="286" r:id="rId22"/>
-    <p:sldId id="287" r:id="rId23"/>
-    <p:sldId id="288" r:id="rId24"/>
-    <p:sldId id="289" r:id="rId25"/>
-    <p:sldId id="290" r:id="rId26"/>
-    <p:sldId id="291" r:id="rId27"/>
-    <p:sldId id="292" r:id="rId28"/>
-    <p:sldId id="293" r:id="rId29"/>
-    <p:sldId id="294" r:id="rId30"/>
+    <p:sldId id="295" r:id="rId18"/>
+    <p:sldId id="296" r:id="rId19"/>
+    <p:sldId id="297" r:id="rId20"/>
+    <p:sldId id="298" r:id="rId21"/>
+    <p:sldId id="299" r:id="rId22"/>
+    <p:sldId id="300" r:id="rId23"/>
+    <p:sldId id="301" r:id="rId24"/>
+    <p:sldId id="282" r:id="rId25"/>
+    <p:sldId id="283" r:id="rId26"/>
+    <p:sldId id="284" r:id="rId27"/>
+    <p:sldId id="285" r:id="rId28"/>
+    <p:sldId id="286" r:id="rId29"/>
+    <p:sldId id="287" r:id="rId30"/>
+    <p:sldId id="288" r:id="rId31"/>
+    <p:sldId id="289" r:id="rId32"/>
+    <p:sldId id="290" r:id="rId33"/>
+    <p:sldId id="291" r:id="rId34"/>
+    <p:sldId id="292" r:id="rId35"/>
+    <p:sldId id="293" r:id="rId36"/>
+    <p:sldId id="294" r:id="rId37"/>
   </p:sldIdLst>
   <p:sldSz cx="12188825" cy="6858000"/>
   <p:notesSz cx="6858000" cy="9144000"/>
@@ -291,7 +298,7 @@
                   <a:schemeClr val="tx2"/>
                 </a:solidFill>
               </a:rPr>
-              <a:t>7/31/2026</a:t>
+              <a:t>8/6/2026</a:t>
             </a:fld>
             <a:endParaRPr>
               <a:solidFill>
@@ -481,7 +488,7 @@
             <a:fld id="{F95CF31C-F757-429C-A789-86504F04C3BE}" type="datetimeFigureOut">
               <a:rPr lang="en-US"/>
               <a:pPr/>
-              <a:t>7/31/2026</a:t>
+              <a:t>8/6/2026</a:t>
             </a:fld>
             <a:endParaRPr/>
           </a:p>
@@ -1225,7 +1232,7 @@
           <a:p>
             <a:fld id="{5706A09E-12D5-4B1D-B8BB-C300B1DDD423}" type="datetime1">
               <a:rPr lang="en-US" smtClean="0"/>
-              <a:t>7/31/2026</a:t>
+              <a:t>8/6/2026</a:t>
             </a:fld>
             <a:endParaRPr lang="en-US"/>
           </a:p>
@@ -1429,7 +1436,7 @@
           <a:p>
             <a:fld id="{D91CA53D-4C84-40AA-983E-A1E818A7FEFC}" type="datetime1">
               <a:rPr lang="en-US" smtClean="0"/>
-              <a:t>7/31/2026</a:t>
+              <a:t>8/6/2026</a:t>
             </a:fld>
             <a:endParaRPr lang="en-US"/>
           </a:p>
@@ -1642,7 +1649,7 @@
           <a:p>
             <a:fld id="{C8E2FCEE-AE66-4EAB-9C04-97F8A56A6354}" type="datetime1">
               <a:rPr lang="en-US" smtClean="0"/>
-              <a:t>7/31/2026</a:t>
+              <a:t>8/6/2026</a:t>
             </a:fld>
             <a:endParaRPr lang="en-US"/>
           </a:p>
@@ -1843,7 +1850,7 @@
           <a:p>
             <a:fld id="{15A9377B-053C-438C-8A98-92C419A6701C}" type="datetime1">
               <a:rPr lang="en-US" smtClean="0"/>
-              <a:t>7/31/2026</a:t>
+              <a:t>8/6/2026</a:t>
             </a:fld>
             <a:endParaRPr lang="en-US"/>
           </a:p>
@@ -2326,7 +2333,7 @@
           <a:p>
             <a:fld id="{B07CEF46-0123-4A75-9835-49DC49D53DE2}" type="datetime1">
               <a:rPr lang="en-US" smtClean="0"/>
-              <a:t>7/31/2026</a:t>
+              <a:t>8/6/2026</a:t>
             </a:fld>
             <a:endParaRPr lang="en-US"/>
           </a:p>
@@ -2643,7 +2650,7 @@
           <a:p>
             <a:fld id="{62A6378D-18AE-47D1-B10A-42F623B40082}" type="datetime1">
               <a:rPr lang="en-US" smtClean="0"/>
-              <a:t>7/31/2026</a:t>
+              <a:t>8/6/2026</a:t>
             </a:fld>
             <a:endParaRPr lang="en-US"/>
           </a:p>
@@ -3098,7 +3105,7 @@
           <a:p>
             <a:fld id="{321F6AE8-D704-41F6-B16A-5547B5672AC1}" type="datetime1">
               <a:rPr lang="en-US" smtClean="0"/>
-              <a:t>7/31/2026</a:t>
+              <a:t>8/6/2026</a:t>
             </a:fld>
             <a:endParaRPr lang="en-US"/>
           </a:p>
@@ -3231,7 +3238,7 @@
           <a:p>
             <a:fld id="{58AB9538-6F63-4C0B-916D-ED3F4E0A1B28}" type="datetime1">
               <a:rPr lang="en-US" smtClean="0"/>
-              <a:t>7/31/2026</a:t>
+              <a:t>8/6/2026</a:t>
             </a:fld>
             <a:endParaRPr lang="en-US"/>
           </a:p>
@@ -3341,7 +3348,7 @@
           <a:p>
             <a:fld id="{068F15BF-7116-4A9E-8022-5A2DC937F971}" type="datetime1">
               <a:rPr lang="en-US" smtClean="0"/>
-              <a:t>7/31/2026</a:t>
+              <a:t>8/6/2026</a:t>
             </a:fld>
             <a:endParaRPr lang="en-US"/>
           </a:p>
@@ -3705,7 +3712,7 @@
           <a:p>
             <a:fld id="{41B8DC91-5A3B-40CE-8C1D-279A8EF6E008}" type="datetime1">
               <a:rPr lang="en-US" smtClean="0"/>
-              <a:t>7/31/2026</a:t>
+              <a:t>8/6/2026</a:t>
             </a:fld>
             <a:endParaRPr lang="en-US"/>
           </a:p>
@@ -4047,7 +4054,7 @@
           <a:p>
             <a:fld id="{36B7C20A-B94A-4E20-B4B2-88A7825AE904}" type="datetime1">
               <a:rPr lang="en-US" smtClean="0"/>
-              <a:t>7/31/2026</a:t>
+              <a:t>8/6/2026</a:t>
             </a:fld>
             <a:endParaRPr lang="en-US"/>
           </a:p>
@@ -4415,7 +4422,7 @@
             <a:fld id="{859468AF-EFCF-4AAD-ACF4-3BA83EC4AF4E}" type="datetime1">
               <a:rPr lang="en-US" smtClean="0"/>
               <a:pPr/>
-              <a:t>7/31/2026</a:t>
+              <a:t>8/6/2026</a:t>
             </a:fld>
             <a:endParaRPr lang="en-US" dirty="0"/>
           </a:p>
@@ -7070,7 +7077,7 @@
           <p:cNvPr id="4" name="TextBox 3">
             <a:extLst>
               <a:ext uri="{FF2B5EF4-FFF2-40B4-BE49-F238E27FC236}">
-                <a16:creationId xmlns:a16="http://schemas.microsoft.com/office/drawing/2014/main" id="{204DCDC5-AA77-9F51-39A8-2B1568277D07}"/>
+                <a16:creationId xmlns:a16="http://schemas.microsoft.com/office/drawing/2014/main" id="{36C16191-D3FC-2723-D06B-445C8A525C4A}"/>
               </a:ext>
             </a:extLst>
           </p:cNvPr>
@@ -7078,9 +7085,9 @@
           <p:nvPr/>
         </p:nvSpPr>
         <p:spPr>
-          <a:xfrm flipH="1">
-            <a:off x="955554" y="332656"/>
-            <a:ext cx="8307209" cy="413959"/>
+          <a:xfrm>
+            <a:off x="837828" y="980728"/>
+            <a:ext cx="2226892" cy="413959"/>
           </a:xfrm>
           <a:prstGeom prst="rect">
             <a:avLst/>
@@ -7088,7 +7095,7 @@
           <a:noFill/>
         </p:spPr>
         <p:txBody>
-          <a:bodyPr wrap="square" rtlCol="0">
+          <a:bodyPr wrap="none" rtlCol="0">
             <a:spAutoFit/>
           </a:bodyPr>
           <a:lstStyle>
@@ -7109,17 +7116,614 @@
           <a:p>
             <a:r>
               <a:rPr lang="en-IN" dirty="0"/>
-              <a:t>Quality Assurance (QA) in Agile</a:t>
-            </a:r>
-          </a:p>
-        </p:txBody>
-      </p:sp>
-      <p:sp>
-        <p:nvSpPr>
-          <p:cNvPr id="5" name="TextBox 4">
+              <a:t>Agile Practices</a:t>
+            </a:r>
+          </a:p>
+        </p:txBody>
+      </p:sp>
+      <p:graphicFrame>
+        <p:nvGraphicFramePr>
+          <p:cNvPr id="6" name="Table 5">
             <a:extLst>
               <a:ext uri="{FF2B5EF4-FFF2-40B4-BE49-F238E27FC236}">
-                <a16:creationId xmlns:a16="http://schemas.microsoft.com/office/drawing/2014/main" id="{88778EDB-E420-AB17-277A-58F907BA1179}"/>
+                <a16:creationId xmlns:a16="http://schemas.microsoft.com/office/drawing/2014/main" id="{34BBE989-4D19-30FD-1E97-079583E279F0}"/>
+              </a:ext>
+            </a:extLst>
+          </p:cNvPr>
+          <p:cNvGraphicFramePr>
+            <a:graphicFrameLocks noGrp="1"/>
+          </p:cNvGraphicFramePr>
+          <p:nvPr>
+            <p:extLst>
+              <p:ext uri="{D42A27DB-BD31-4B8C-83A1-F6EECF244321}">
+                <p14:modId xmlns:p14="http://schemas.microsoft.com/office/powerpoint/2010/main" val="794425749"/>
+              </p:ext>
+            </p:extLst>
+          </p:nvPr>
+        </p:nvGraphicFramePr>
+        <p:xfrm>
+          <a:off x="837828" y="1778676"/>
+          <a:ext cx="9368980" cy="4470400"/>
+        </p:xfrm>
+        <a:graphic>
+          <a:graphicData uri="http://schemas.openxmlformats.org/drawingml/2006/table">
+            <a:tbl>
+              <a:tblPr/>
+              <a:tblGrid>
+                <a:gridCol w="4684490">
+                  <a:extLst>
+                    <a:ext uri="{9D8B030D-6E8A-4147-A177-3AD203B41FA5}">
+                      <a16:colId xmlns:a16="http://schemas.microsoft.com/office/drawing/2014/main" val="1734970684"/>
+                    </a:ext>
+                  </a:extLst>
+                </a:gridCol>
+                <a:gridCol w="4684490">
+                  <a:extLst>
+                    <a:ext uri="{9D8B030D-6E8A-4147-A177-3AD203B41FA5}">
+                      <a16:colId xmlns:a16="http://schemas.microsoft.com/office/drawing/2014/main" val="3072591615"/>
+                    </a:ext>
+                  </a:extLst>
+                </a:gridCol>
+              </a:tblGrid>
+              <a:tr h="421736">
+                <a:tc>
+                  <a:txBody>
+                    <a:bodyPr/>
+                    <a:lstStyle/>
+                    <a:p>
+                      <a:r>
+                        <a:rPr lang="en-IN" sz="2200" b="1"/>
+                        <a:t>Agile Practice</a:t>
+                      </a:r>
+                    </a:p>
+                  </a:txBody>
+                  <a:tcPr marL="84347" marR="84347" marT="42174" marB="42174" anchor="ctr">
+                    <a:lnL>
+                      <a:noFill/>
+                    </a:lnL>
+                    <a:lnR>
+                      <a:noFill/>
+                    </a:lnR>
+                    <a:lnT>
+                      <a:noFill/>
+                    </a:lnT>
+                    <a:lnB>
+                      <a:noFill/>
+                    </a:lnB>
+                    <a:noFill/>
+                  </a:tcPr>
+                </a:tc>
+                <a:tc>
+                  <a:txBody>
+                    <a:bodyPr/>
+                    <a:lstStyle/>
+                    <a:p>
+                      <a:r>
+                        <a:rPr lang="en-IN" sz="2200" b="1" dirty="0"/>
+                        <a:t>Meaning</a:t>
+                      </a:r>
+                    </a:p>
+                  </a:txBody>
+                  <a:tcPr marL="84347" marR="84347" marT="42174" marB="42174" anchor="ctr">
+                    <a:lnL>
+                      <a:noFill/>
+                    </a:lnL>
+                    <a:lnR>
+                      <a:noFill/>
+                    </a:lnR>
+                    <a:lnT>
+                      <a:noFill/>
+                    </a:lnT>
+                    <a:lnB>
+                      <a:noFill/>
+                    </a:lnB>
+                    <a:noFill/>
+                  </a:tcPr>
+                </a:tc>
+                <a:extLst>
+                  <a:ext uri="{0D108BD9-81ED-4DB2-BD59-A6C34878D82A}">
+                    <a16:rowId xmlns:a16="http://schemas.microsoft.com/office/drawing/2014/main" val="256930880"/>
+                  </a:ext>
+                </a:extLst>
+              </a:tr>
+              <a:tr h="759124">
+                <a:tc>
+                  <a:txBody>
+                    <a:bodyPr/>
+                    <a:lstStyle/>
+                    <a:p>
+                      <a:r>
+                        <a:rPr lang="en-IN" sz="2200" dirty="0"/>
+                        <a:t>Small Iterations</a:t>
+                      </a:r>
+                    </a:p>
+                  </a:txBody>
+                  <a:tcPr marL="84347" marR="84347" marT="42174" marB="42174" anchor="ctr">
+                    <a:lnL>
+                      <a:noFill/>
+                    </a:lnL>
+                    <a:lnR>
+                      <a:noFill/>
+                    </a:lnR>
+                    <a:lnT>
+                      <a:noFill/>
+                    </a:lnT>
+                    <a:lnB>
+                      <a:noFill/>
+                    </a:lnB>
+                    <a:noFill/>
+                  </a:tcPr>
+                </a:tc>
+                <a:tc>
+                  <a:txBody>
+                    <a:bodyPr/>
+                    <a:lstStyle/>
+                    <a:p>
+                      <a:r>
+                        <a:rPr lang="en-US" sz="2200"/>
+                        <a:t>Build small pieces every 2–4 weeks</a:t>
+                      </a:r>
+                    </a:p>
+                  </a:txBody>
+                  <a:tcPr marL="84347" marR="84347" marT="42174" marB="42174" anchor="ctr">
+                    <a:lnL>
+                      <a:noFill/>
+                    </a:lnL>
+                    <a:lnR>
+                      <a:noFill/>
+                    </a:lnR>
+                    <a:lnT>
+                      <a:noFill/>
+                    </a:lnT>
+                    <a:lnB>
+                      <a:noFill/>
+                    </a:lnB>
+                    <a:noFill/>
+                  </a:tcPr>
+                </a:tc>
+                <a:extLst>
+                  <a:ext uri="{0D108BD9-81ED-4DB2-BD59-A6C34878D82A}">
+                    <a16:rowId xmlns:a16="http://schemas.microsoft.com/office/drawing/2014/main" val="3355936010"/>
+                  </a:ext>
+                </a:extLst>
+              </a:tr>
+              <a:tr h="421736">
+                <a:tc>
+                  <a:txBody>
+                    <a:bodyPr/>
+                    <a:lstStyle/>
+                    <a:p>
+                      <a:r>
+                        <a:rPr lang="en-IN" sz="2200"/>
+                        <a:t>Daily Scrum</a:t>
+                      </a:r>
+                    </a:p>
+                  </a:txBody>
+                  <a:tcPr marL="84347" marR="84347" marT="42174" marB="42174" anchor="ctr">
+                    <a:lnL>
+                      <a:noFill/>
+                    </a:lnL>
+                    <a:lnR>
+                      <a:noFill/>
+                    </a:lnR>
+                    <a:lnT>
+                      <a:noFill/>
+                    </a:lnT>
+                    <a:lnB>
+                      <a:noFill/>
+                    </a:lnB>
+                    <a:noFill/>
+                  </a:tcPr>
+                </a:tc>
+                <a:tc>
+                  <a:txBody>
+                    <a:bodyPr/>
+                    <a:lstStyle/>
+                    <a:p>
+                      <a:r>
+                        <a:rPr lang="en-IN" sz="2200"/>
+                        <a:t>15-minute daily meeting</a:t>
+                      </a:r>
+                    </a:p>
+                  </a:txBody>
+                  <a:tcPr marL="84347" marR="84347" marT="42174" marB="42174" anchor="ctr">
+                    <a:lnL>
+                      <a:noFill/>
+                    </a:lnL>
+                    <a:lnR>
+                      <a:noFill/>
+                    </a:lnR>
+                    <a:lnT>
+                      <a:noFill/>
+                    </a:lnT>
+                    <a:lnB>
+                      <a:noFill/>
+                    </a:lnB>
+                    <a:noFill/>
+                  </a:tcPr>
+                </a:tc>
+                <a:extLst>
+                  <a:ext uri="{0D108BD9-81ED-4DB2-BD59-A6C34878D82A}">
+                    <a16:rowId xmlns:a16="http://schemas.microsoft.com/office/drawing/2014/main" val="1726769434"/>
+                  </a:ext>
+                </a:extLst>
+              </a:tr>
+              <a:tr h="421736">
+                <a:tc>
+                  <a:txBody>
+                    <a:bodyPr/>
+                    <a:lstStyle/>
+                    <a:p>
+                      <a:r>
+                        <a:rPr lang="en-IN" sz="2200"/>
+                        <a:t>Pair Programming</a:t>
+                      </a:r>
+                    </a:p>
+                  </a:txBody>
+                  <a:tcPr marL="84347" marR="84347" marT="42174" marB="42174" anchor="ctr">
+                    <a:lnL>
+                      <a:noFill/>
+                    </a:lnL>
+                    <a:lnR>
+                      <a:noFill/>
+                    </a:lnR>
+                    <a:lnT>
+                      <a:noFill/>
+                    </a:lnT>
+                    <a:lnB>
+                      <a:noFill/>
+                    </a:lnB>
+                    <a:noFill/>
+                  </a:tcPr>
+                </a:tc>
+                <a:tc>
+                  <a:txBody>
+                    <a:bodyPr/>
+                    <a:lstStyle/>
+                    <a:p>
+                      <a:r>
+                        <a:rPr lang="en-IN" sz="2200"/>
+                        <a:t>Two developers work together</a:t>
+                      </a:r>
+                    </a:p>
+                  </a:txBody>
+                  <a:tcPr marL="84347" marR="84347" marT="42174" marB="42174" anchor="ctr">
+                    <a:lnL>
+                      <a:noFill/>
+                    </a:lnL>
+                    <a:lnR>
+                      <a:noFill/>
+                    </a:lnR>
+                    <a:lnT>
+                      <a:noFill/>
+                    </a:lnT>
+                    <a:lnB>
+                      <a:noFill/>
+                    </a:lnB>
+                    <a:noFill/>
+                  </a:tcPr>
+                </a:tc>
+                <a:extLst>
+                  <a:ext uri="{0D108BD9-81ED-4DB2-BD59-A6C34878D82A}">
+                    <a16:rowId xmlns:a16="http://schemas.microsoft.com/office/drawing/2014/main" val="1542189119"/>
+                  </a:ext>
+                </a:extLst>
+              </a:tr>
+              <a:tr h="421736">
+                <a:tc>
+                  <a:txBody>
+                    <a:bodyPr/>
+                    <a:lstStyle/>
+                    <a:p>
+                      <a:r>
+                        <a:rPr lang="en-IN" sz="2200"/>
+                        <a:t>Continuous Testing</a:t>
+                      </a:r>
+                    </a:p>
+                  </a:txBody>
+                  <a:tcPr marL="84347" marR="84347" marT="42174" marB="42174" anchor="ctr">
+                    <a:lnL>
+                      <a:noFill/>
+                    </a:lnL>
+                    <a:lnR>
+                      <a:noFill/>
+                    </a:lnR>
+                    <a:lnT>
+                      <a:noFill/>
+                    </a:lnT>
+                    <a:lnB>
+                      <a:noFill/>
+                    </a:lnB>
+                    <a:noFill/>
+                  </a:tcPr>
+                </a:tc>
+                <a:tc>
+                  <a:txBody>
+                    <a:bodyPr/>
+                    <a:lstStyle/>
+                    <a:p>
+                      <a:r>
+                        <a:rPr lang="en-IN" sz="2200"/>
+                        <a:t>Testing throughout development</a:t>
+                      </a:r>
+                    </a:p>
+                  </a:txBody>
+                  <a:tcPr marL="84347" marR="84347" marT="42174" marB="42174" anchor="ctr">
+                    <a:lnL>
+                      <a:noFill/>
+                    </a:lnL>
+                    <a:lnR>
+                      <a:noFill/>
+                    </a:lnR>
+                    <a:lnT>
+                      <a:noFill/>
+                    </a:lnT>
+                    <a:lnB>
+                      <a:noFill/>
+                    </a:lnB>
+                    <a:noFill/>
+                  </a:tcPr>
+                </a:tc>
+                <a:extLst>
+                  <a:ext uri="{0D108BD9-81ED-4DB2-BD59-A6C34878D82A}">
+                    <a16:rowId xmlns:a16="http://schemas.microsoft.com/office/drawing/2014/main" val="2664777204"/>
+                  </a:ext>
+                </a:extLst>
+              </a:tr>
+              <a:tr h="421736">
+                <a:tc>
+                  <a:txBody>
+                    <a:bodyPr/>
+                    <a:lstStyle/>
+                    <a:p>
+                      <a:r>
+                        <a:rPr lang="en-IN" sz="2200"/>
+                        <a:t>Continuous Integration</a:t>
+                      </a:r>
+                    </a:p>
+                  </a:txBody>
+                  <a:tcPr marL="84347" marR="84347" marT="42174" marB="42174" anchor="ctr">
+                    <a:lnL>
+                      <a:noFill/>
+                    </a:lnL>
+                    <a:lnR>
+                      <a:noFill/>
+                    </a:lnR>
+                    <a:lnT>
+                      <a:noFill/>
+                    </a:lnT>
+                    <a:lnB>
+                      <a:noFill/>
+                    </a:lnB>
+                    <a:noFill/>
+                  </a:tcPr>
+                </a:tc>
+                <a:tc>
+                  <a:txBody>
+                    <a:bodyPr/>
+                    <a:lstStyle/>
+                    <a:p>
+                      <a:r>
+                        <a:rPr lang="en-IN" sz="2200"/>
+                        <a:t>Merge code frequently</a:t>
+                      </a:r>
+                    </a:p>
+                  </a:txBody>
+                  <a:tcPr marL="84347" marR="84347" marT="42174" marB="42174" anchor="ctr">
+                    <a:lnL>
+                      <a:noFill/>
+                    </a:lnL>
+                    <a:lnR>
+                      <a:noFill/>
+                    </a:lnR>
+                    <a:lnT>
+                      <a:noFill/>
+                    </a:lnT>
+                    <a:lnB>
+                      <a:noFill/>
+                    </a:lnB>
+                    <a:noFill/>
+                  </a:tcPr>
+                </a:tc>
+                <a:extLst>
+                  <a:ext uri="{0D108BD9-81ED-4DB2-BD59-A6C34878D82A}">
+                    <a16:rowId xmlns:a16="http://schemas.microsoft.com/office/drawing/2014/main" val="3790435006"/>
+                  </a:ext>
+                </a:extLst>
+              </a:tr>
+              <a:tr h="421736">
+                <a:tc>
+                  <a:txBody>
+                    <a:bodyPr/>
+                    <a:lstStyle/>
+                    <a:p>
+                      <a:r>
+                        <a:rPr lang="en-IN" sz="2200"/>
+                        <a:t>Customer Feedback</a:t>
+                      </a:r>
+                    </a:p>
+                  </a:txBody>
+                  <a:tcPr marL="84347" marR="84347" marT="42174" marB="42174" anchor="ctr">
+                    <a:lnL>
+                      <a:noFill/>
+                    </a:lnL>
+                    <a:lnR>
+                      <a:noFill/>
+                    </a:lnR>
+                    <a:lnT>
+                      <a:noFill/>
+                    </a:lnT>
+                    <a:lnB>
+                      <a:noFill/>
+                    </a:lnB>
+                    <a:noFill/>
+                  </a:tcPr>
+                </a:tc>
+                <a:tc>
+                  <a:txBody>
+                    <a:bodyPr/>
+                    <a:lstStyle/>
+                    <a:p>
+                      <a:r>
+                        <a:rPr lang="en-IN" sz="2200"/>
+                        <a:t>Show working software regularly</a:t>
+                      </a:r>
+                    </a:p>
+                  </a:txBody>
+                  <a:tcPr marL="84347" marR="84347" marT="42174" marB="42174" anchor="ctr">
+                    <a:lnL>
+                      <a:noFill/>
+                    </a:lnL>
+                    <a:lnR>
+                      <a:noFill/>
+                    </a:lnR>
+                    <a:lnT>
+                      <a:noFill/>
+                    </a:lnT>
+                    <a:lnB>
+                      <a:noFill/>
+                    </a:lnB>
+                    <a:noFill/>
+                  </a:tcPr>
+                </a:tc>
+                <a:extLst>
+                  <a:ext uri="{0D108BD9-81ED-4DB2-BD59-A6C34878D82A}">
+                    <a16:rowId xmlns:a16="http://schemas.microsoft.com/office/drawing/2014/main" val="573414971"/>
+                  </a:ext>
+                </a:extLst>
+              </a:tr>
+              <a:tr h="759124">
+                <a:tc>
+                  <a:txBody>
+                    <a:bodyPr/>
+                    <a:lstStyle/>
+                    <a:p>
+                      <a:r>
+                        <a:rPr lang="en-IN" sz="2200"/>
+                        <a:t>Refactoring</a:t>
+                      </a:r>
+                    </a:p>
+                  </a:txBody>
+                  <a:tcPr marL="84347" marR="84347" marT="42174" marB="42174" anchor="ctr">
+                    <a:lnL>
+                      <a:noFill/>
+                    </a:lnL>
+                    <a:lnR>
+                      <a:noFill/>
+                    </a:lnR>
+                    <a:lnT>
+                      <a:noFill/>
+                    </a:lnT>
+                    <a:lnB>
+                      <a:noFill/>
+                    </a:lnB>
+                    <a:noFill/>
+                  </a:tcPr>
+                </a:tc>
+                <a:tc>
+                  <a:txBody>
+                    <a:bodyPr/>
+                    <a:lstStyle/>
+                    <a:p>
+                      <a:r>
+                        <a:rPr lang="en-US" sz="2200"/>
+                        <a:t>Improve code without changing functionality</a:t>
+                      </a:r>
+                    </a:p>
+                  </a:txBody>
+                  <a:tcPr marL="84347" marR="84347" marT="42174" marB="42174" anchor="ctr">
+                    <a:lnL>
+                      <a:noFill/>
+                    </a:lnL>
+                    <a:lnR>
+                      <a:noFill/>
+                    </a:lnR>
+                    <a:lnT>
+                      <a:noFill/>
+                    </a:lnT>
+                    <a:lnB>
+                      <a:noFill/>
+                    </a:lnB>
+                    <a:noFill/>
+                  </a:tcPr>
+                </a:tc>
+                <a:extLst>
+                  <a:ext uri="{0D108BD9-81ED-4DB2-BD59-A6C34878D82A}">
+                    <a16:rowId xmlns:a16="http://schemas.microsoft.com/office/drawing/2014/main" val="396432768"/>
+                  </a:ext>
+                </a:extLst>
+              </a:tr>
+              <a:tr h="421736">
+                <a:tc>
+                  <a:txBody>
+                    <a:bodyPr/>
+                    <a:lstStyle/>
+                    <a:p>
+                      <a:r>
+                        <a:rPr lang="en-IN" sz="2200"/>
+                        <a:t>Retrospective</a:t>
+                      </a:r>
+                    </a:p>
+                  </a:txBody>
+                  <a:tcPr marL="84347" marR="84347" marT="42174" marB="42174" anchor="ctr">
+                    <a:lnL>
+                      <a:noFill/>
+                    </a:lnL>
+                    <a:lnR>
+                      <a:noFill/>
+                    </a:lnR>
+                    <a:lnT>
+                      <a:noFill/>
+                    </a:lnT>
+                    <a:lnB>
+                      <a:noFill/>
+                    </a:lnB>
+                    <a:noFill/>
+                  </a:tcPr>
+                </a:tc>
+                <a:tc>
+                  <a:txBody>
+                    <a:bodyPr/>
+                    <a:lstStyle/>
+                    <a:p>
+                      <a:r>
+                        <a:rPr lang="en-IN" sz="2200" dirty="0"/>
+                        <a:t>Learn from every sprint</a:t>
+                      </a:r>
+                    </a:p>
+                  </a:txBody>
+                  <a:tcPr marL="84347" marR="84347" marT="42174" marB="42174" anchor="ctr">
+                    <a:lnL>
+                      <a:noFill/>
+                    </a:lnL>
+                    <a:lnR>
+                      <a:noFill/>
+                    </a:lnR>
+                    <a:lnT>
+                      <a:noFill/>
+                    </a:lnT>
+                    <a:lnB>
+                      <a:noFill/>
+                    </a:lnB>
+                    <a:noFill/>
+                  </a:tcPr>
+                </a:tc>
+                <a:extLst>
+                  <a:ext uri="{0D108BD9-81ED-4DB2-BD59-A6C34878D82A}">
+                    <a16:rowId xmlns:a16="http://schemas.microsoft.com/office/drawing/2014/main" val="1979191950"/>
+                  </a:ext>
+                </a:extLst>
+              </a:tr>
+            </a:tbl>
+          </a:graphicData>
+        </a:graphic>
+      </p:graphicFrame>
+      <p:sp>
+        <p:nvSpPr>
+          <p:cNvPr id="7" name="TextBox 6">
+            <a:extLst>
+              <a:ext uri="{FF2B5EF4-FFF2-40B4-BE49-F238E27FC236}">
+                <a16:creationId xmlns:a16="http://schemas.microsoft.com/office/drawing/2014/main" id="{4845471C-FF28-68A0-799F-BFF193931AF6}"/>
               </a:ext>
             </a:extLst>
           </p:cNvPr>
@@ -7128,8 +7732,8 @@
         </p:nvSpPr>
         <p:spPr>
           <a:xfrm>
-            <a:off x="955554" y="908720"/>
-            <a:ext cx="10369152" cy="2059282"/>
+            <a:off x="837828" y="404664"/>
+            <a:ext cx="2218877" cy="355482"/>
           </a:xfrm>
           <a:prstGeom prst="rect">
             <a:avLst/>
@@ -7137,7 +7741,7 @@
           <a:noFill/>
         </p:spPr>
         <p:txBody>
-          <a:bodyPr wrap="square" rtlCol="0">
+          <a:bodyPr wrap="none" rtlCol="0">
             <a:spAutoFit/>
           </a:bodyPr>
           <a:lstStyle>
@@ -7146,213 +7750,20 @@
             </a:defPPr>
             <a:lvl1pPr>
               <a:lnSpc>
-                <a:spcPct val="150000"/>
-              </a:lnSpc>
-              <a:defRPr sz="2200"/>
+                <a:spcPct val="95000"/>
+              </a:lnSpc>
+              <a:defRPr sz="2200" b="1">
+                <a:solidFill>
+                  <a:srgbClr val="FF0000"/>
+                </a:solidFill>
+              </a:defRPr>
             </a:lvl1pPr>
           </a:lstStyle>
           <a:p>
             <a:r>
               <a:rPr lang="en-US" dirty="0"/>
-              <a:t>In Traditional Models, Development happens first, Testing happens later. Problem: If bugs are found late, Fixing becomes expensive</a:t>
-            </a:r>
-          </a:p>
-          <a:p>
-            <a:endParaRPr lang="en-US" dirty="0"/>
-          </a:p>
-          <a:p>
-            <a:endParaRPr lang="en-IN" dirty="0"/>
-          </a:p>
-        </p:txBody>
-      </p:sp>
-      <p:sp>
-        <p:nvSpPr>
-          <p:cNvPr id="6" name="TextBox 5">
-            <a:extLst>
-              <a:ext uri="{FF2B5EF4-FFF2-40B4-BE49-F238E27FC236}">
-                <a16:creationId xmlns:a16="http://schemas.microsoft.com/office/drawing/2014/main" id="{1391785B-21E0-CFC8-EA7C-B3AB1EBF21F8}"/>
-              </a:ext>
-            </a:extLst>
-          </p:cNvPr>
-          <p:cNvSpPr txBox="1"/>
-          <p:nvPr/>
-        </p:nvSpPr>
-        <p:spPr>
-          <a:xfrm>
-            <a:off x="955554" y="2086488"/>
-            <a:ext cx="11449272" cy="1551450"/>
-          </a:xfrm>
-          <a:prstGeom prst="rect">
-            <a:avLst/>
-          </a:prstGeom>
-          <a:noFill/>
-        </p:spPr>
-        <p:txBody>
-          <a:bodyPr wrap="square" rtlCol="0">
-            <a:spAutoFit/>
-          </a:bodyPr>
-          <a:lstStyle>
-            <a:defPPr>
-              <a:defRPr lang="en-US"/>
-            </a:defPPr>
-            <a:lvl1pPr>
-              <a:lnSpc>
-                <a:spcPct val="150000"/>
-              </a:lnSpc>
-              <a:defRPr sz="2200"/>
-            </a:lvl1pPr>
-          </a:lstStyle>
-          <a:p>
-            <a:r>
-              <a:rPr lang="en-IN" dirty="0"/>
-              <a:t>In Agile Model, Testing happens throughout development. </a:t>
-            </a:r>
-            <a:r>
-              <a:rPr lang="en-US" dirty="0"/>
-              <a:t>Quality is built into every Sprint</a:t>
-            </a:r>
-            <a:endParaRPr lang="en-IN" dirty="0"/>
-          </a:p>
-          <a:p>
-            <a:endParaRPr lang="en-IN" dirty="0"/>
-          </a:p>
-        </p:txBody>
-      </p:sp>
-      <p:sp>
-        <p:nvSpPr>
-          <p:cNvPr id="7" name="TextBox 6">
-            <a:extLst>
-              <a:ext uri="{FF2B5EF4-FFF2-40B4-BE49-F238E27FC236}">
-                <a16:creationId xmlns:a16="http://schemas.microsoft.com/office/drawing/2014/main" id="{AE3C203C-1315-61CB-6380-959F18EE5E7A}"/>
-              </a:ext>
-            </a:extLst>
-          </p:cNvPr>
-          <p:cNvSpPr txBox="1"/>
-          <p:nvPr/>
-        </p:nvSpPr>
-        <p:spPr>
-          <a:xfrm>
-            <a:off x="955554" y="3211250"/>
-            <a:ext cx="4713150" cy="535788"/>
-          </a:xfrm>
-          <a:prstGeom prst="rect">
-            <a:avLst/>
-          </a:prstGeom>
-          <a:noFill/>
-        </p:spPr>
-        <p:txBody>
-          <a:bodyPr wrap="square" rtlCol="0">
-            <a:spAutoFit/>
-          </a:bodyPr>
-          <a:lstStyle>
-            <a:defPPr>
-              <a:defRPr lang="en-US"/>
-            </a:defPPr>
-            <a:lvl1pPr>
-              <a:lnSpc>
-                <a:spcPct val="150000"/>
-              </a:lnSpc>
-              <a:defRPr sz="2200"/>
-            </a:lvl1pPr>
-          </a:lstStyle>
-          <a:p>
-            <a:r>
-              <a:rPr lang="en-IN" dirty="0"/>
-              <a:t>Quality is everyone's responsibility</a:t>
-            </a:r>
-          </a:p>
-        </p:txBody>
-      </p:sp>
-      <p:sp>
-        <p:nvSpPr>
-          <p:cNvPr id="8" name="TextBox 7">
-            <a:extLst>
-              <a:ext uri="{FF2B5EF4-FFF2-40B4-BE49-F238E27FC236}">
-                <a16:creationId xmlns:a16="http://schemas.microsoft.com/office/drawing/2014/main" id="{7EFE7151-BE60-93F1-829C-75F939A399CB}"/>
-              </a:ext>
-            </a:extLst>
-          </p:cNvPr>
-          <p:cNvSpPr txBox="1"/>
-          <p:nvPr/>
-        </p:nvSpPr>
-        <p:spPr>
-          <a:xfrm>
-            <a:off x="6886500" y="2767393"/>
-            <a:ext cx="3055645" cy="3582776"/>
-          </a:xfrm>
-          <a:prstGeom prst="rect">
-            <a:avLst/>
-          </a:prstGeom>
-          <a:noFill/>
-        </p:spPr>
-        <p:txBody>
-          <a:bodyPr wrap="square" rtlCol="0">
-            <a:spAutoFit/>
-          </a:bodyPr>
-          <a:lstStyle>
-            <a:defPPr>
-              <a:defRPr lang="en-US"/>
-            </a:defPPr>
-            <a:lvl1pPr>
-              <a:lnSpc>
-                <a:spcPct val="150000"/>
-              </a:lnSpc>
-              <a:defRPr sz="2200"/>
-            </a:lvl1pPr>
-          </a:lstStyle>
-          <a:p>
-            <a:r>
-              <a:rPr lang="en-US" dirty="0"/>
-              <a:t>Not only testers, but</a:t>
-            </a:r>
-          </a:p>
-          <a:p>
-            <a:pPr marL="342900" indent="-342900">
-              <a:buFont typeface="Arial" panose="020B0604020202020204" pitchFamily="34" charset="0"/>
-              <a:buChar char="•"/>
-            </a:pPr>
-            <a:r>
-              <a:rPr lang="en-US" dirty="0"/>
-              <a:t>Developers </a:t>
-            </a:r>
-          </a:p>
-          <a:p>
-            <a:pPr marL="342900" indent="-342900">
-              <a:buFont typeface="Arial" panose="020B0604020202020204" pitchFamily="34" charset="0"/>
-              <a:buChar char="•"/>
-            </a:pPr>
-            <a:r>
-              <a:rPr lang="en-US" dirty="0"/>
-              <a:t>Testers </a:t>
-            </a:r>
-          </a:p>
-          <a:p>
-            <a:pPr marL="342900" indent="-342900">
-              <a:buFont typeface="Arial" panose="020B0604020202020204" pitchFamily="34" charset="0"/>
-              <a:buChar char="•"/>
-            </a:pPr>
-            <a:r>
-              <a:rPr lang="en-US" dirty="0"/>
-              <a:t>Scrum Master </a:t>
-            </a:r>
-          </a:p>
-          <a:p>
-            <a:pPr marL="342900" indent="-342900">
-              <a:buFont typeface="Arial" panose="020B0604020202020204" pitchFamily="34" charset="0"/>
-              <a:buChar char="•"/>
-            </a:pPr>
-            <a:r>
-              <a:rPr lang="en-US" dirty="0"/>
-              <a:t>Product Owner </a:t>
-            </a:r>
-          </a:p>
-          <a:p>
-            <a:r>
-              <a:rPr lang="en-US" dirty="0"/>
-              <a:t>Everyone contributes</a:t>
-            </a:r>
-          </a:p>
-          <a:p>
+              <a:t>Engineering &amp; Design</a:t>
+            </a:r>
             <a:endParaRPr lang="en-IN" dirty="0"/>
           </a:p>
         </p:txBody>
@@ -7360,7 +7771,7 @@
     </p:spTree>
     <p:extLst>
       <p:ext uri="{BB962C8B-B14F-4D97-AF65-F5344CB8AC3E}">
-        <p14:creationId xmlns:p14="http://schemas.microsoft.com/office/powerpoint/2010/main" val="3255476496"/>
+        <p14:creationId xmlns:p14="http://schemas.microsoft.com/office/powerpoint/2010/main" val="785130969"/>
       </p:ext>
     </p:extLst>
   </p:cSld>
@@ -7404,7 +7815,7 @@
           <p:cNvPr id="4" name="TextBox 3">
             <a:extLst>
               <a:ext uri="{FF2B5EF4-FFF2-40B4-BE49-F238E27FC236}">
-                <a16:creationId xmlns:a16="http://schemas.microsoft.com/office/drawing/2014/main" id="{6A282C12-6D18-A57C-69FA-56E9474EA072}"/>
+                <a16:creationId xmlns:a16="http://schemas.microsoft.com/office/drawing/2014/main" id="{03571B53-BDF3-F376-C719-DA75051DEB04}"/>
               </a:ext>
             </a:extLst>
           </p:cNvPr>
@@ -7413,8 +7824,8 @@
         </p:nvSpPr>
         <p:spPr>
           <a:xfrm>
-            <a:off x="909836" y="188640"/>
-            <a:ext cx="3536546" cy="443198"/>
+            <a:off x="909836" y="260648"/>
+            <a:ext cx="2736647" cy="443198"/>
           </a:xfrm>
           <a:prstGeom prst="rect">
             <a:avLst/>
@@ -7422,7 +7833,7 @@
           <a:noFill/>
         </p:spPr>
         <p:txBody>
-          <a:bodyPr wrap="square" rtlCol="0">
+          <a:bodyPr wrap="none" rtlCol="0">
             <a:spAutoFit/>
           </a:bodyPr>
           <a:lstStyle>
@@ -7443,17 +7854,17 @@
           <a:p>
             <a:r>
               <a:rPr lang="en-IN" dirty="0"/>
-              <a:t>Agile Quality Practices</a:t>
-            </a:r>
-          </a:p>
-        </p:txBody>
-      </p:sp>
-      <p:sp>
-        <p:nvSpPr>
-          <p:cNvPr id="5" name="TextBox 4">
+              <a:t>Variance in Agile</a:t>
+            </a:r>
+          </a:p>
+        </p:txBody>
+      </p:sp>
+      <p:sp>
+        <p:nvSpPr>
+          <p:cNvPr id="7" name="TextBox 6">
             <a:extLst>
               <a:ext uri="{FF2B5EF4-FFF2-40B4-BE49-F238E27FC236}">
-                <a16:creationId xmlns:a16="http://schemas.microsoft.com/office/drawing/2014/main" id="{4A629AB1-CAA8-F19D-3F1B-D335985FC078}"/>
+                <a16:creationId xmlns:a16="http://schemas.microsoft.com/office/drawing/2014/main" id="{E3D477D2-ECC3-80BC-1A88-EC35FC8D6526}"/>
               </a:ext>
             </a:extLst>
           </p:cNvPr>
@@ -7462,8 +7873,8 @@
         </p:nvSpPr>
         <p:spPr>
           <a:xfrm>
-            <a:off x="909836" y="836712"/>
-            <a:ext cx="3047629" cy="413959"/>
+            <a:off x="936103" y="716650"/>
+            <a:ext cx="10369152" cy="735586"/>
           </a:xfrm>
           <a:prstGeom prst="rect">
             <a:avLst/>
@@ -7474,35 +7885,27 @@
           <a:bodyPr wrap="square" rtlCol="0">
             <a:spAutoFit/>
           </a:bodyPr>
-          <a:lstStyle>
-            <a:defPPr>
-              <a:defRPr lang="en-US"/>
-            </a:defPPr>
-            <a:lvl1pPr>
+          <a:lstStyle/>
+          <a:p>
+            <a:pPr>
               <a:lnSpc>
                 <a:spcPct val="95000"/>
               </a:lnSpc>
-              <a:defRPr sz="2200" b="1">
-                <a:solidFill>
-                  <a:srgbClr val="FF0000"/>
-                </a:solidFill>
-              </a:defRPr>
-            </a:lvl1pPr>
-          </a:lstStyle>
-          <a:p>
-            <a:r>
-              <a:rPr lang="en-IN" dirty="0"/>
-              <a:t>1. Continuous Testing</a:t>
-            </a:r>
-          </a:p>
-        </p:txBody>
-      </p:sp>
-      <p:sp>
-        <p:nvSpPr>
-          <p:cNvPr id="6" name="TextBox 5">
+            </a:pPr>
+            <a:r>
+              <a:rPr lang="en-US" sz="2200" dirty="0"/>
+              <a:t>Variance means - Difference between what was planned and what actually happened</a:t>
+            </a:r>
+            <a:endParaRPr lang="en-IN" sz="2200" dirty="0"/>
+          </a:p>
+        </p:txBody>
+      </p:sp>
+      <p:sp>
+        <p:nvSpPr>
+          <p:cNvPr id="8" name="TextBox 7">
             <a:extLst>
               <a:ext uri="{FF2B5EF4-FFF2-40B4-BE49-F238E27FC236}">
-                <a16:creationId xmlns:a16="http://schemas.microsoft.com/office/drawing/2014/main" id="{B8474CF4-FBFC-6AF1-BC74-10EC2D95EE95}"/>
+                <a16:creationId xmlns:a16="http://schemas.microsoft.com/office/drawing/2014/main" id="{93200C02-3615-0491-00D7-CCCD2A53E86D}"/>
               </a:ext>
             </a:extLst>
           </p:cNvPr>
@@ -7511,8 +7914,8 @@
         </p:nvSpPr>
         <p:spPr>
           <a:xfrm>
-            <a:off x="837828" y="1250671"/>
-            <a:ext cx="6552728" cy="2059282"/>
+            <a:off x="926976" y="1525928"/>
+            <a:ext cx="3028393" cy="1429622"/>
           </a:xfrm>
           <a:prstGeom prst="rect">
             <a:avLst/>
@@ -7520,37 +7923,48 @@
           <a:noFill/>
         </p:spPr>
         <p:txBody>
-          <a:bodyPr wrap="square" rtlCol="0">
+          <a:bodyPr wrap="none" rtlCol="0">
             <a:spAutoFit/>
           </a:bodyPr>
-          <a:lstStyle>
-            <a:defPPr>
-              <a:defRPr lang="en-US"/>
-            </a:defPPr>
-            <a:lvl1pPr>
-              <a:lnSpc>
-                <a:spcPct val="150000"/>
-              </a:lnSpc>
-              <a:defRPr sz="2200"/>
-            </a:lvl1pPr>
-          </a:lstStyle>
-          <a:p>
-            <a:r>
-              <a:rPr lang="en-US" dirty="0"/>
-              <a:t>Testing begins immediately. Instead of waiting till the end, Every feature is tested during development.</a:t>
-            </a:r>
-          </a:p>
-          <a:p>
-            <a:endParaRPr lang="en-IN" dirty="0"/>
-          </a:p>
-        </p:txBody>
-      </p:sp>
-      <p:sp>
-        <p:nvSpPr>
-          <p:cNvPr id="7" name="TextBox 6">
+          <a:lstStyle/>
+          <a:p>
+            <a:r>
+              <a:rPr lang="en-US" sz="2200" dirty="0"/>
+              <a:t>Example</a:t>
+            </a:r>
+          </a:p>
+          <a:p>
+            <a:r>
+              <a:rPr lang="en-US" sz="2200" dirty="0"/>
+              <a:t>Planned:</a:t>
+            </a:r>
+          </a:p>
+          <a:p>
+            <a:pPr>
+              <a:buFont typeface="Arial" panose="020B0604020202020204" pitchFamily="34" charset="0"/>
+              <a:buChar char="•"/>
+            </a:pPr>
+            <a:r>
+              <a:rPr lang="en-US" sz="2200" dirty="0"/>
+              <a:t>Finish 10 User Stories </a:t>
+            </a:r>
+          </a:p>
+          <a:p>
+            <a:pPr>
+              <a:lnSpc>
+                <a:spcPct val="95000"/>
+              </a:lnSpc>
+            </a:pPr>
+            <a:endParaRPr lang="en-IN" sz="2200" dirty="0"/>
+          </a:p>
+        </p:txBody>
+      </p:sp>
+      <p:sp>
+        <p:nvSpPr>
+          <p:cNvPr id="9" name="TextBox 8">
             <a:extLst>
               <a:ext uri="{FF2B5EF4-FFF2-40B4-BE49-F238E27FC236}">
-                <a16:creationId xmlns:a16="http://schemas.microsoft.com/office/drawing/2014/main" id="{809393DB-18D7-F7DC-88D9-220BF9F5B5EB}"/>
+                <a16:creationId xmlns:a16="http://schemas.microsoft.com/office/drawing/2014/main" id="{381B691D-15D2-7F78-35E7-E84A37957088}"/>
               </a:ext>
             </a:extLst>
           </p:cNvPr>
@@ -7559,8 +7973,8 @@
         </p:nvSpPr>
         <p:spPr>
           <a:xfrm>
-            <a:off x="7843009" y="1043691"/>
-            <a:ext cx="3260829" cy="2800767"/>
+            <a:off x="3948915" y="1854322"/>
+            <a:ext cx="3248005" cy="1091068"/>
           </a:xfrm>
           <a:prstGeom prst="rect">
             <a:avLst/>
@@ -7568,113 +7982,42 @@
           <a:noFill/>
         </p:spPr>
         <p:txBody>
-          <a:bodyPr wrap="square" rtlCol="0">
+          <a:bodyPr wrap="none" rtlCol="0">
             <a:spAutoFit/>
           </a:bodyPr>
-          <a:lstStyle>
-            <a:defPPr>
-              <a:defRPr lang="en-US"/>
-            </a:defPPr>
-            <a:lvl1pPr>
-              <a:lnSpc>
-                <a:spcPct val="150000"/>
-              </a:lnSpc>
-              <a:defRPr sz="2200"/>
-            </a:lvl1pPr>
-          </a:lstStyle>
+          <a:lstStyle/>
+          <a:p>
+            <a:r>
+              <a:rPr lang="en-US" sz="2200" dirty="0"/>
+              <a:t>Actual:</a:t>
+            </a:r>
+          </a:p>
           <a:p>
             <a:pPr>
-              <a:lnSpc>
-                <a:spcPct val="100000"/>
-              </a:lnSpc>
+              <a:buFont typeface="Arial" panose="020B0604020202020204" pitchFamily="34" charset="0"/>
+              <a:buChar char="•"/>
             </a:pPr>
             <a:r>
-              <a:rPr lang="en-US" dirty="0"/>
-              <a:t>Write Login Page</a:t>
+              <a:rPr lang="en-US" sz="2200" dirty="0"/>
+              <a:t>Finished 8 User Stories </a:t>
             </a:r>
           </a:p>
           <a:p>
             <a:pPr>
               <a:lnSpc>
-                <a:spcPct val="100000"/>
+                <a:spcPct val="95000"/>
               </a:lnSpc>
             </a:pPr>
-            <a:r>
-              <a:rPr lang="en-US" dirty="0"/>
-              <a:t>↓</a:t>
-            </a:r>
-          </a:p>
-          <a:p>
-            <a:pPr>
-              <a:lnSpc>
-                <a:spcPct val="100000"/>
-              </a:lnSpc>
-            </a:pPr>
-            <a:r>
-              <a:rPr lang="en-US" dirty="0"/>
-              <a:t>Immediately test Login</a:t>
-            </a:r>
-          </a:p>
-          <a:p>
-            <a:pPr>
-              <a:lnSpc>
-                <a:spcPct val="100000"/>
-              </a:lnSpc>
-            </a:pPr>
-            <a:r>
-              <a:rPr lang="en-US" dirty="0"/>
-              <a:t>↓</a:t>
-            </a:r>
-          </a:p>
-          <a:p>
-            <a:pPr>
-              <a:lnSpc>
-                <a:spcPct val="100000"/>
-              </a:lnSpc>
-            </a:pPr>
-            <a:r>
-              <a:rPr lang="en-US" dirty="0"/>
-              <a:t>Fix bugs</a:t>
-            </a:r>
-          </a:p>
-          <a:p>
-            <a:pPr>
-              <a:lnSpc>
-                <a:spcPct val="100000"/>
-              </a:lnSpc>
-            </a:pPr>
-            <a:r>
-              <a:rPr lang="en-US" dirty="0"/>
-              <a:t>↓</a:t>
-            </a:r>
-          </a:p>
-          <a:p>
-            <a:pPr>
-              <a:lnSpc>
-                <a:spcPct val="100000"/>
-              </a:lnSpc>
-            </a:pPr>
-            <a:r>
-              <a:rPr lang="en-US" dirty="0"/>
-              <a:t>Move to next feature</a:t>
-            </a:r>
-          </a:p>
-          <a:p>
-            <a:pPr>
-              <a:lnSpc>
-                <a:spcPct val="100000"/>
-              </a:lnSpc>
-            </a:pPr>
-            <a:endParaRPr lang="en-IN" dirty="0"/>
-          </a:p>
-        </p:txBody>
-      </p:sp>
-      <p:sp>
-        <p:nvSpPr>
-          <p:cNvPr id="8" name="TextBox 7">
+            <a:endParaRPr lang="en-IN" sz="2200" dirty="0"/>
+          </a:p>
+        </p:txBody>
+      </p:sp>
+      <p:sp>
+        <p:nvSpPr>
+          <p:cNvPr id="10" name="TextBox 9">
             <a:extLst>
               <a:ext uri="{FF2B5EF4-FFF2-40B4-BE49-F238E27FC236}">
-                <a16:creationId xmlns:a16="http://schemas.microsoft.com/office/drawing/2014/main" id="{D66CD4BE-8026-FDD9-BD18-923FC568E4F8}"/>
+                <a16:creationId xmlns:a16="http://schemas.microsoft.com/office/drawing/2014/main" id="{41942BD4-C89B-19C0-C1F5-32D34E89285C}"/>
               </a:ext>
             </a:extLst>
           </p:cNvPr>
@@ -7683,8 +8026,8 @@
         </p:nvSpPr>
         <p:spPr>
           <a:xfrm>
-            <a:off x="1053852" y="3749263"/>
-            <a:ext cx="2940228" cy="443198"/>
+            <a:off x="8212238" y="2151156"/>
+            <a:ext cx="2832827" cy="735586"/>
           </a:xfrm>
           <a:prstGeom prst="rect">
             <a:avLst/>
@@ -7692,38 +8035,37 @@
           <a:noFill/>
         </p:spPr>
         <p:txBody>
-          <a:bodyPr wrap="square" rtlCol="0">
+          <a:bodyPr wrap="none" rtlCol="0">
             <a:spAutoFit/>
           </a:bodyPr>
-          <a:lstStyle>
-            <a:defPPr>
-              <a:defRPr lang="en-US"/>
-            </a:defPPr>
-            <a:lvl1pPr>
+          <a:lstStyle/>
+          <a:p>
+            <a:pPr>
               <a:lnSpc>
                 <a:spcPct val="95000"/>
               </a:lnSpc>
-              <a:defRPr sz="2200" b="1">
-                <a:solidFill>
-                  <a:srgbClr val="FF0000"/>
-                </a:solidFill>
-              </a:defRPr>
-            </a:lvl1pPr>
-          </a:lstStyle>
-          <a:p>
-            <a:r>
-              <a:rPr lang="en-IN" dirty="0"/>
-              <a:t>2. Test Automation</a:t>
-            </a:r>
-          </a:p>
-        </p:txBody>
-      </p:sp>
-      <p:sp>
-        <p:nvSpPr>
-          <p:cNvPr id="9" name="TextBox 8">
+            </a:pPr>
+            <a:r>
+              <a:rPr lang="en-US" sz="2200" dirty="0"/>
+              <a:t>Variance = 2 stories</a:t>
+            </a:r>
+          </a:p>
+          <a:p>
+            <a:pPr>
+              <a:lnSpc>
+                <a:spcPct val="95000"/>
+              </a:lnSpc>
+            </a:pPr>
+            <a:endParaRPr lang="en-IN" sz="2200" dirty="0"/>
+          </a:p>
+        </p:txBody>
+      </p:sp>
+      <p:sp>
+        <p:nvSpPr>
+          <p:cNvPr id="11" name="TextBox 10">
             <a:extLst>
               <a:ext uri="{FF2B5EF4-FFF2-40B4-BE49-F238E27FC236}">
-                <a16:creationId xmlns:a16="http://schemas.microsoft.com/office/drawing/2014/main" id="{1E91EA0C-95DA-6856-2E4A-A1A6824F39D9}"/>
+                <a16:creationId xmlns:a16="http://schemas.microsoft.com/office/drawing/2014/main" id="{522F4B55-3370-7FAB-4A1D-7658ED32412A}"/>
               </a:ext>
             </a:extLst>
           </p:cNvPr>
@@ -7732,8 +8074,8 @@
         </p:nvSpPr>
         <p:spPr>
           <a:xfrm>
-            <a:off x="1053852" y="4258417"/>
-            <a:ext cx="10441160" cy="1551450"/>
+            <a:off x="916795" y="2760690"/>
+            <a:ext cx="3671198" cy="413959"/>
           </a:xfrm>
           <a:prstGeom prst="rect">
             <a:avLst/>
@@ -7741,37 +8083,29 @@
           <a:noFill/>
         </p:spPr>
         <p:txBody>
-          <a:bodyPr wrap="square" rtlCol="0">
+          <a:bodyPr wrap="none" rtlCol="0">
             <a:spAutoFit/>
           </a:bodyPr>
-          <a:lstStyle>
-            <a:defPPr>
-              <a:defRPr lang="en-US"/>
-            </a:defPPr>
-            <a:lvl1pPr>
-              <a:lnSpc>
-                <a:spcPct val="150000"/>
-              </a:lnSpc>
-              <a:defRPr sz="2200"/>
-            </a:lvl1pPr>
-          </a:lstStyle>
-          <a:p>
-            <a:r>
-              <a:rPr lang="en-US" dirty="0"/>
-              <a:t>Instead of manually testing 100 times, A testing tool performs repetitive tests automatically</a:t>
-            </a:r>
-          </a:p>
-          <a:p>
-            <a:endParaRPr lang="en-IN" dirty="0"/>
-          </a:p>
-        </p:txBody>
-      </p:sp>
-      <p:sp>
-        <p:nvSpPr>
-          <p:cNvPr id="10" name="TextBox 9">
+          <a:lstStyle/>
+          <a:p>
+            <a:pPr>
+              <a:lnSpc>
+                <a:spcPct val="95000"/>
+              </a:lnSpc>
+            </a:pPr>
+            <a:r>
+              <a:rPr lang="en-IN" sz="2200" dirty="0"/>
+              <a:t>Estimated Time = 40 hours</a:t>
+            </a:r>
+          </a:p>
+        </p:txBody>
+      </p:sp>
+      <p:sp>
+        <p:nvSpPr>
+          <p:cNvPr id="12" name="TextBox 11">
             <a:extLst>
               <a:ext uri="{FF2B5EF4-FFF2-40B4-BE49-F238E27FC236}">
-                <a16:creationId xmlns:a16="http://schemas.microsoft.com/office/drawing/2014/main" id="{7F68DED7-60B1-CD77-4450-B56E1E874972}"/>
+                <a16:creationId xmlns:a16="http://schemas.microsoft.com/office/drawing/2014/main" id="{EE53C8EF-633A-247D-D04D-CBB6054DB4E4}"/>
               </a:ext>
             </a:extLst>
           </p:cNvPr>
@@ -7780,8 +8114,183 @@
         </p:nvSpPr>
         <p:spPr>
           <a:xfrm>
-            <a:off x="1064318" y="5448101"/>
-            <a:ext cx="10286678" cy="1551450"/>
+            <a:off x="4644665" y="2714764"/>
+            <a:ext cx="3236784" cy="413959"/>
+          </a:xfrm>
+          <a:prstGeom prst="rect">
+            <a:avLst/>
+          </a:prstGeom>
+          <a:noFill/>
+        </p:spPr>
+        <p:txBody>
+          <a:bodyPr wrap="none" rtlCol="0">
+            <a:spAutoFit/>
+          </a:bodyPr>
+          <a:lstStyle/>
+          <a:p>
+            <a:pPr>
+              <a:lnSpc>
+                <a:spcPct val="95000"/>
+              </a:lnSpc>
+            </a:pPr>
+            <a:r>
+              <a:rPr lang="en-IN" sz="2200" dirty="0"/>
+              <a:t>Actual Time = 55 hours</a:t>
+            </a:r>
+          </a:p>
+        </p:txBody>
+      </p:sp>
+      <p:sp>
+        <p:nvSpPr>
+          <p:cNvPr id="13" name="Arrow: Right 12">
+            <a:extLst>
+              <a:ext uri="{FF2B5EF4-FFF2-40B4-BE49-F238E27FC236}">
+                <a16:creationId xmlns:a16="http://schemas.microsoft.com/office/drawing/2014/main" id="{D55FB2C7-3957-1026-7E6D-CC6ADDC3BA6D}"/>
+              </a:ext>
+            </a:extLst>
+          </p:cNvPr>
+          <p:cNvSpPr/>
+          <p:nvPr/>
+        </p:nvSpPr>
+        <p:spPr>
+          <a:xfrm>
+            <a:off x="7271291" y="2264820"/>
+            <a:ext cx="837129" cy="223970"/>
+          </a:xfrm>
+          <a:prstGeom prst="rightArrow">
+            <a:avLst/>
+          </a:prstGeom>
+          <a:ln/>
+        </p:spPr>
+        <p:style>
+          <a:lnRef idx="2">
+            <a:schemeClr val="accent4">
+              <a:shade val="15000"/>
+            </a:schemeClr>
+          </a:lnRef>
+          <a:fillRef idx="1">
+            <a:schemeClr val="accent4"/>
+          </a:fillRef>
+          <a:effectRef idx="0">
+            <a:schemeClr val="accent4"/>
+          </a:effectRef>
+          <a:fontRef idx="minor">
+            <a:schemeClr val="lt1"/>
+          </a:fontRef>
+        </p:style>
+        <p:txBody>
+          <a:bodyPr rtlCol="0" anchor="ctr"/>
+          <a:lstStyle/>
+          <a:p>
+            <a:pPr algn="ctr"/>
+            <a:endParaRPr lang="en-IN" dirty="0"/>
+          </a:p>
+        </p:txBody>
+      </p:sp>
+      <p:sp>
+        <p:nvSpPr>
+          <p:cNvPr id="14" name="Arrow: Right 13">
+            <a:extLst>
+              <a:ext uri="{FF2B5EF4-FFF2-40B4-BE49-F238E27FC236}">
+                <a16:creationId xmlns:a16="http://schemas.microsoft.com/office/drawing/2014/main" id="{4ACB7B6D-833E-F907-A745-9B4FCBB3B6C9}"/>
+              </a:ext>
+            </a:extLst>
+          </p:cNvPr>
+          <p:cNvSpPr/>
+          <p:nvPr/>
+        </p:nvSpPr>
+        <p:spPr>
+          <a:xfrm>
+            <a:off x="7985267" y="2774757"/>
+            <a:ext cx="837129" cy="223970"/>
+          </a:xfrm>
+          <a:prstGeom prst="rightArrow">
+            <a:avLst/>
+          </a:prstGeom>
+          <a:ln/>
+        </p:spPr>
+        <p:style>
+          <a:lnRef idx="2">
+            <a:schemeClr val="accent4">
+              <a:shade val="15000"/>
+            </a:schemeClr>
+          </a:lnRef>
+          <a:fillRef idx="1">
+            <a:schemeClr val="accent4"/>
+          </a:fillRef>
+          <a:effectRef idx="0">
+            <a:schemeClr val="accent4"/>
+          </a:effectRef>
+          <a:fontRef idx="minor">
+            <a:schemeClr val="lt1"/>
+          </a:fontRef>
+        </p:style>
+        <p:txBody>
+          <a:bodyPr rtlCol="0" anchor="ctr"/>
+          <a:lstStyle/>
+          <a:p>
+            <a:pPr algn="ctr"/>
+            <a:endParaRPr lang="en-IN" dirty="0"/>
+          </a:p>
+        </p:txBody>
+      </p:sp>
+      <p:sp>
+        <p:nvSpPr>
+          <p:cNvPr id="15" name="TextBox 14">
+            <a:extLst>
+              <a:ext uri="{FF2B5EF4-FFF2-40B4-BE49-F238E27FC236}">
+                <a16:creationId xmlns:a16="http://schemas.microsoft.com/office/drawing/2014/main" id="{6611A2ED-30D6-518D-13D9-48A2DC849F18}"/>
+              </a:ext>
+            </a:extLst>
+          </p:cNvPr>
+          <p:cNvSpPr txBox="1"/>
+          <p:nvPr/>
+        </p:nvSpPr>
+        <p:spPr>
+          <a:xfrm>
+            <a:off x="8986208" y="2696533"/>
+            <a:ext cx="1946367" cy="413959"/>
+          </a:xfrm>
+          <a:prstGeom prst="rect">
+            <a:avLst/>
+          </a:prstGeom>
+          <a:noFill/>
+        </p:spPr>
+        <p:txBody>
+          <a:bodyPr wrap="none" rtlCol="0">
+            <a:spAutoFit/>
+          </a:bodyPr>
+          <a:lstStyle/>
+          <a:p>
+            <a:pPr>
+              <a:lnSpc>
+                <a:spcPct val="95000"/>
+              </a:lnSpc>
+            </a:pPr>
+            <a:r>
+              <a:rPr lang="en-US" sz="2200" dirty="0"/>
+              <a:t>Variance???</a:t>
+            </a:r>
+            <a:endParaRPr lang="en-IN" sz="2200" dirty="0"/>
+          </a:p>
+        </p:txBody>
+      </p:sp>
+      <p:sp>
+        <p:nvSpPr>
+          <p:cNvPr id="16" name="TextBox 15">
+            <a:extLst>
+              <a:ext uri="{FF2B5EF4-FFF2-40B4-BE49-F238E27FC236}">
+                <a16:creationId xmlns:a16="http://schemas.microsoft.com/office/drawing/2014/main" id="{DA443EDC-3DF3-B202-AD0E-E4034F45A924}"/>
+              </a:ext>
+            </a:extLst>
+          </p:cNvPr>
+          <p:cNvSpPr txBox="1"/>
+          <p:nvPr/>
+        </p:nvSpPr>
+        <p:spPr>
+          <a:xfrm>
+            <a:off x="926976" y="3367592"/>
+            <a:ext cx="10585176" cy="735586"/>
           </a:xfrm>
           <a:prstGeom prst="rect">
             <a:avLst/>
@@ -7792,32 +8301,118 @@
           <a:bodyPr wrap="square" rtlCol="0">
             <a:spAutoFit/>
           </a:bodyPr>
-          <a:lstStyle>
-            <a:defPPr>
-              <a:defRPr lang="en-US"/>
-            </a:defPPr>
-            <a:lvl1pPr>
-              <a:lnSpc>
-                <a:spcPct val="150000"/>
-              </a:lnSpc>
-              <a:defRPr sz="2200"/>
-            </a:lvl1pPr>
-          </a:lstStyle>
-          <a:p>
-            <a:r>
-              <a:rPr lang="en-US" dirty="0"/>
-              <a:t>Instead of checking attendance manually, A biometric machine does it automatically.</a:t>
-            </a:r>
-          </a:p>
-          <a:p>
-            <a:endParaRPr lang="en-IN" dirty="0"/>
+          <a:lstStyle/>
+          <a:p>
+            <a:pPr>
+              <a:lnSpc>
+                <a:spcPct val="95000"/>
+              </a:lnSpc>
+            </a:pPr>
+            <a:r>
+              <a:rPr lang="en-US" sz="2200" dirty="0"/>
+              <a:t>Agile teams continuously measure variance so future planning becomes more accurate</a:t>
+            </a:r>
+            <a:endParaRPr lang="en-IN" sz="2200" dirty="0"/>
+          </a:p>
+        </p:txBody>
+      </p:sp>
+      <p:sp>
+        <p:nvSpPr>
+          <p:cNvPr id="17" name="TextBox 16">
+            <a:extLst>
+              <a:ext uri="{FF2B5EF4-FFF2-40B4-BE49-F238E27FC236}">
+                <a16:creationId xmlns:a16="http://schemas.microsoft.com/office/drawing/2014/main" id="{4AF417A7-8EA6-2F49-B3C0-D607A5F4ECBD}"/>
+              </a:ext>
+            </a:extLst>
+          </p:cNvPr>
+          <p:cNvSpPr txBox="1"/>
+          <p:nvPr/>
+        </p:nvSpPr>
+        <p:spPr>
+          <a:xfrm>
+            <a:off x="946752" y="4293096"/>
+            <a:ext cx="3397084" cy="2445285"/>
+          </a:xfrm>
+          <a:prstGeom prst="rect">
+            <a:avLst/>
+          </a:prstGeom>
+          <a:noFill/>
+        </p:spPr>
+        <p:txBody>
+          <a:bodyPr wrap="none" rtlCol="0">
+            <a:spAutoFit/>
+          </a:bodyPr>
+          <a:lstStyle/>
+          <a:p>
+            <a:r>
+              <a:rPr lang="en-US" sz="2200" b="1" dirty="0"/>
+              <a:t>Causes of Variance</a:t>
+            </a:r>
+          </a:p>
+          <a:p>
+            <a:pPr>
+              <a:buFont typeface="Arial" panose="020B0604020202020204" pitchFamily="34" charset="0"/>
+              <a:buChar char="•"/>
+            </a:pPr>
+            <a:r>
+              <a:rPr lang="en-US" sz="2200" dirty="0"/>
+              <a:t>Requirement changes </a:t>
+            </a:r>
+          </a:p>
+          <a:p>
+            <a:pPr>
+              <a:buFont typeface="Arial" panose="020B0604020202020204" pitchFamily="34" charset="0"/>
+              <a:buChar char="•"/>
+            </a:pPr>
+            <a:r>
+              <a:rPr lang="en-US" sz="2200" dirty="0"/>
+              <a:t>Technical issues </a:t>
+            </a:r>
+          </a:p>
+          <a:p>
+            <a:pPr>
+              <a:buFont typeface="Arial" panose="020B0604020202020204" pitchFamily="34" charset="0"/>
+              <a:buChar char="•"/>
+            </a:pPr>
+            <a:r>
+              <a:rPr lang="en-US" sz="2200" dirty="0"/>
+              <a:t>Team member leave </a:t>
+            </a:r>
+          </a:p>
+          <a:p>
+            <a:pPr>
+              <a:buFont typeface="Arial" panose="020B0604020202020204" pitchFamily="34" charset="0"/>
+              <a:buChar char="•"/>
+            </a:pPr>
+            <a:r>
+              <a:rPr lang="en-US" sz="2200" dirty="0"/>
+              <a:t>Wrong estimation </a:t>
+            </a:r>
+          </a:p>
+          <a:p>
+            <a:pPr>
+              <a:buFont typeface="Arial" panose="020B0604020202020204" pitchFamily="34" charset="0"/>
+              <a:buChar char="•"/>
+            </a:pPr>
+            <a:r>
+              <a:rPr lang="en-US" sz="2200" dirty="0"/>
+              <a:t>Unexpected bugs</a:t>
+            </a:r>
+          </a:p>
+          <a:p>
+            <a:pPr>
+              <a:lnSpc>
+                <a:spcPct val="95000"/>
+              </a:lnSpc>
+            </a:pPr>
+            <a:endParaRPr lang="en-IN" sz="2200" dirty="0"/>
           </a:p>
         </p:txBody>
       </p:sp>
     </p:spTree>
     <p:extLst>
       <p:ext uri="{BB962C8B-B14F-4D97-AF65-F5344CB8AC3E}">
-        <p14:creationId xmlns:p14="http://schemas.microsoft.com/office/powerpoint/2010/main" val="3133974278"/>
+        <p14:creationId xmlns:p14="http://schemas.microsoft.com/office/powerpoint/2010/main" val="1260640004"/>
       </p:ext>
     </p:extLst>
   </p:cSld>
@@ -7861,7 +8456,7 @@
           <p:cNvPr id="4" name="TextBox 3">
             <a:extLst>
               <a:ext uri="{FF2B5EF4-FFF2-40B4-BE49-F238E27FC236}">
-                <a16:creationId xmlns:a16="http://schemas.microsoft.com/office/drawing/2014/main" id="{C2E791AB-661A-4A4A-B05E-379EF6D66DFE}"/>
+                <a16:creationId xmlns:a16="http://schemas.microsoft.com/office/drawing/2014/main" id="{83AD181B-D8FC-8179-D5EC-D81CC43DE87F}"/>
               </a:ext>
             </a:extLst>
           </p:cNvPr>
@@ -7870,8 +8465,57 @@
         </p:nvSpPr>
         <p:spPr>
           <a:xfrm>
-            <a:off x="837828" y="332656"/>
-            <a:ext cx="5165197" cy="443198"/>
+            <a:off x="765820" y="332656"/>
+            <a:ext cx="5242141" cy="443198"/>
+          </a:xfrm>
+          <a:prstGeom prst="rect">
+            <a:avLst/>
+          </a:prstGeom>
+          <a:noFill/>
+        </p:spPr>
+        <p:txBody>
+          <a:bodyPr wrap="none" rtlCol="0">
+            <a:spAutoFit/>
+          </a:bodyPr>
+          <a:lstStyle>
+            <a:defPPr>
+              <a:defRPr lang="en-US"/>
+            </a:defPPr>
+            <a:lvl1pPr>
+              <a:lnSpc>
+                <a:spcPct val="95000"/>
+              </a:lnSpc>
+              <a:defRPr sz="2200" b="1">
+                <a:solidFill>
+                  <a:srgbClr val="FF0000"/>
+                </a:solidFill>
+              </a:defRPr>
+            </a:lvl1pPr>
+          </a:lstStyle>
+          <a:p>
+            <a:r>
+              <a:rPr lang="en-IN" dirty="0"/>
+              <a:t>Managing Unstable Requirements</a:t>
+            </a:r>
+          </a:p>
+        </p:txBody>
+      </p:sp>
+      <p:sp>
+        <p:nvSpPr>
+          <p:cNvPr id="5" name="TextBox 4">
+            <a:extLst>
+              <a:ext uri="{FF2B5EF4-FFF2-40B4-BE49-F238E27FC236}">
+                <a16:creationId xmlns:a16="http://schemas.microsoft.com/office/drawing/2014/main" id="{882D7990-C015-A7F2-F066-644C2E40A318}"/>
+              </a:ext>
+            </a:extLst>
+          </p:cNvPr>
+          <p:cNvSpPr txBox="1"/>
+          <p:nvPr/>
+        </p:nvSpPr>
+        <p:spPr>
+          <a:xfrm>
+            <a:off x="693812" y="814888"/>
+            <a:ext cx="9238426" cy="535788"/>
           </a:xfrm>
           <a:prstGeom prst="rect">
             <a:avLst/>
@@ -7888,29 +8532,26 @@
             </a:defPPr>
             <a:lvl1pPr>
               <a:lnSpc>
-                <a:spcPct val="95000"/>
-              </a:lnSpc>
-              <a:defRPr sz="2200" b="1">
-                <a:solidFill>
-                  <a:srgbClr val="FF0000"/>
-                </a:solidFill>
-              </a:defRPr>
+                <a:spcPct val="150000"/>
+              </a:lnSpc>
+              <a:defRPr sz="2200"/>
             </a:lvl1pPr>
           </a:lstStyle>
           <a:p>
             <a:r>
-              <a:rPr lang="en-IN" dirty="0"/>
-              <a:t>3. Test-Driven Development (TDD)</a:t>
-            </a:r>
-          </a:p>
-        </p:txBody>
-      </p:sp>
-      <p:sp>
-        <p:nvSpPr>
-          <p:cNvPr id="5" name="TextBox 4">
+              <a:rPr lang="en-US" dirty="0"/>
+              <a:t>One of Agile's biggest strengths is handling changing requirements</a:t>
+            </a:r>
+            <a:endParaRPr lang="en-IN" dirty="0"/>
+          </a:p>
+        </p:txBody>
+      </p:sp>
+      <p:sp>
+        <p:nvSpPr>
+          <p:cNvPr id="6" name="TextBox 5">
             <a:extLst>
               <a:ext uri="{FF2B5EF4-FFF2-40B4-BE49-F238E27FC236}">
-                <a16:creationId xmlns:a16="http://schemas.microsoft.com/office/drawing/2014/main" id="{FA59605E-E9A5-29AB-8933-D187807584E5}"/>
+                <a16:creationId xmlns:a16="http://schemas.microsoft.com/office/drawing/2014/main" id="{AA5EBBBA-EC07-E59D-7FCC-138034CD9181}"/>
               </a:ext>
             </a:extLst>
           </p:cNvPr>
@@ -7919,8 +8560,8 @@
         </p:nvSpPr>
         <p:spPr>
           <a:xfrm>
-            <a:off x="889350" y="810322"/>
-            <a:ext cx="10585176" cy="1043619"/>
+            <a:off x="810885" y="1526855"/>
+            <a:ext cx="2871299" cy="535788"/>
           </a:xfrm>
           <a:prstGeom prst="rect">
             <a:avLst/>
@@ -7944,21 +8585,18 @@
           </a:lstStyle>
           <a:p>
             <a:r>
-              <a:rPr lang="en-US" dirty="0"/>
-              <a:t>Write Test -&gt;  Write Code -&gt; Run Test -&gt; Improve Code</a:t>
-            </a:r>
-          </a:p>
-          <a:p>
-            <a:endParaRPr lang="en-IN" dirty="0"/>
-          </a:p>
-        </p:txBody>
-      </p:sp>
-      <p:sp>
-        <p:nvSpPr>
-          <p:cNvPr id="6" name="TextBox 5">
+              <a:rPr lang="en-IN" dirty="0"/>
+              <a:t>Traditional Software</a:t>
+            </a:r>
+          </a:p>
+        </p:txBody>
+      </p:sp>
+      <p:sp>
+        <p:nvSpPr>
+          <p:cNvPr id="9" name="TextBox 8">
             <a:extLst>
               <a:ext uri="{FF2B5EF4-FFF2-40B4-BE49-F238E27FC236}">
-                <a16:creationId xmlns:a16="http://schemas.microsoft.com/office/drawing/2014/main" id="{41F5F514-5C59-C28A-0AAD-550BA00CB719}"/>
+                <a16:creationId xmlns:a16="http://schemas.microsoft.com/office/drawing/2014/main" id="{6F942B6C-F4A4-6271-7343-282860DCA289}"/>
               </a:ext>
             </a:extLst>
           </p:cNvPr>
@@ -7967,8 +8605,8 @@
         </p:nvSpPr>
         <p:spPr>
           <a:xfrm>
-            <a:off x="860242" y="1788979"/>
-            <a:ext cx="2924198" cy="413959"/>
+            <a:off x="4798268" y="1556792"/>
+            <a:ext cx="6912768" cy="735586"/>
           </a:xfrm>
           <a:prstGeom prst="rect">
             <a:avLst/>
@@ -7987,27 +8625,69 @@
               <a:lnSpc>
                 <a:spcPct val="95000"/>
               </a:lnSpc>
-              <a:defRPr sz="2200" b="1">
-                <a:solidFill>
-                  <a:srgbClr val="FF0000"/>
-                </a:solidFill>
-              </a:defRPr>
+              <a:defRPr sz="2200"/>
             </a:lvl1pPr>
           </a:lstStyle>
           <a:p>
             <a:r>
-              <a:rPr lang="en-IN" dirty="0"/>
-              <a:t>4. Pair Programming</a:t>
-            </a:r>
-          </a:p>
-        </p:txBody>
-      </p:sp>
-      <p:sp>
-        <p:nvSpPr>
-          <p:cNvPr id="7" name="TextBox 6">
+              <a:rPr lang="en-US" dirty="0"/>
+              <a:t>Customer changes requirement, Developer says "Too late."</a:t>
+            </a:r>
+            <a:endParaRPr lang="en-IN" dirty="0"/>
+          </a:p>
+        </p:txBody>
+      </p:sp>
+      <p:sp>
+        <p:nvSpPr>
+          <p:cNvPr id="10" name="Arrow: Right 9">
             <a:extLst>
               <a:ext uri="{FF2B5EF4-FFF2-40B4-BE49-F238E27FC236}">
-                <a16:creationId xmlns:a16="http://schemas.microsoft.com/office/drawing/2014/main" id="{21459456-1E39-89F2-BD72-A3A7EA443A99}"/>
+                <a16:creationId xmlns:a16="http://schemas.microsoft.com/office/drawing/2014/main" id="{17A06FF2-9272-052D-4FEC-F5502D0D41E7}"/>
+              </a:ext>
+            </a:extLst>
+          </p:cNvPr>
+          <p:cNvSpPr/>
+          <p:nvPr/>
+        </p:nvSpPr>
+        <p:spPr>
+          <a:xfrm>
+            <a:off x="3862164" y="1763771"/>
+            <a:ext cx="864096" cy="206980"/>
+          </a:xfrm>
+          <a:prstGeom prst="rightArrow">
+            <a:avLst/>
+          </a:prstGeom>
+          <a:ln/>
+        </p:spPr>
+        <p:style>
+          <a:lnRef idx="3">
+            <a:schemeClr val="lt1"/>
+          </a:lnRef>
+          <a:fillRef idx="1">
+            <a:schemeClr val="accent4"/>
+          </a:fillRef>
+          <a:effectRef idx="1">
+            <a:schemeClr val="accent4"/>
+          </a:effectRef>
+          <a:fontRef idx="minor">
+            <a:schemeClr val="lt1"/>
+          </a:fontRef>
+        </p:style>
+        <p:txBody>
+          <a:bodyPr rtlCol="0" anchor="ctr"/>
+          <a:lstStyle/>
+          <a:p>
+            <a:pPr algn="ctr"/>
+            <a:endParaRPr lang="en-IN"/>
+          </a:p>
+        </p:txBody>
+      </p:sp>
+      <p:sp>
+        <p:nvSpPr>
+          <p:cNvPr id="11" name="TextBox 10">
+            <a:extLst>
+              <a:ext uri="{FF2B5EF4-FFF2-40B4-BE49-F238E27FC236}">
+                <a16:creationId xmlns:a16="http://schemas.microsoft.com/office/drawing/2014/main" id="{95167EA8-82AD-B18B-1CE5-C915576D1BE4}"/>
               </a:ext>
             </a:extLst>
           </p:cNvPr>
@@ -8016,8 +8696,93 @@
         </p:nvSpPr>
         <p:spPr>
           <a:xfrm>
-            <a:off x="889350" y="2202938"/>
-            <a:ext cx="11328583" cy="1551450"/>
+            <a:off x="2805021" y="2512997"/>
+            <a:ext cx="877163" cy="413959"/>
+          </a:xfrm>
+          <a:prstGeom prst="rect">
+            <a:avLst/>
+          </a:prstGeom>
+          <a:noFill/>
+        </p:spPr>
+        <p:txBody>
+          <a:bodyPr wrap="none" rtlCol="0">
+            <a:spAutoFit/>
+          </a:bodyPr>
+          <a:lstStyle/>
+          <a:p>
+            <a:pPr>
+              <a:lnSpc>
+                <a:spcPct val="95000"/>
+              </a:lnSpc>
+            </a:pPr>
+            <a:r>
+              <a:rPr lang="en-IN" sz="2200" dirty="0"/>
+              <a:t>Agile</a:t>
+            </a:r>
+          </a:p>
+        </p:txBody>
+      </p:sp>
+      <p:sp>
+        <p:nvSpPr>
+          <p:cNvPr id="12" name="Arrow: Right 11">
+            <a:extLst>
+              <a:ext uri="{FF2B5EF4-FFF2-40B4-BE49-F238E27FC236}">
+                <a16:creationId xmlns:a16="http://schemas.microsoft.com/office/drawing/2014/main" id="{D6A2F9BA-6795-53D2-4EC8-E8A58561520D}"/>
+              </a:ext>
+            </a:extLst>
+          </p:cNvPr>
+          <p:cNvSpPr/>
+          <p:nvPr/>
+        </p:nvSpPr>
+        <p:spPr>
+          <a:xfrm>
+            <a:off x="3862164" y="2616487"/>
+            <a:ext cx="864096" cy="206980"/>
+          </a:xfrm>
+          <a:prstGeom prst="rightArrow">
+            <a:avLst/>
+          </a:prstGeom>
+          <a:ln/>
+        </p:spPr>
+        <p:style>
+          <a:lnRef idx="3">
+            <a:schemeClr val="lt1"/>
+          </a:lnRef>
+          <a:fillRef idx="1">
+            <a:schemeClr val="accent4"/>
+          </a:fillRef>
+          <a:effectRef idx="1">
+            <a:schemeClr val="accent4"/>
+          </a:effectRef>
+          <a:fontRef idx="minor">
+            <a:schemeClr val="lt1"/>
+          </a:fontRef>
+        </p:style>
+        <p:txBody>
+          <a:bodyPr rtlCol="0" anchor="ctr"/>
+          <a:lstStyle/>
+          <a:p>
+            <a:pPr algn="ctr"/>
+            <a:endParaRPr lang="en-IN"/>
+          </a:p>
+        </p:txBody>
+      </p:sp>
+      <p:sp>
+        <p:nvSpPr>
+          <p:cNvPr id="13" name="TextBox 12">
+            <a:extLst>
+              <a:ext uri="{FF2B5EF4-FFF2-40B4-BE49-F238E27FC236}">
+                <a16:creationId xmlns:a16="http://schemas.microsoft.com/office/drawing/2014/main" id="{68A28201-240A-E822-AC81-F803E109CB96}"/>
+              </a:ext>
+            </a:extLst>
+          </p:cNvPr>
+          <p:cNvSpPr txBox="1"/>
+          <p:nvPr/>
+        </p:nvSpPr>
+        <p:spPr>
+          <a:xfrm>
+            <a:off x="4821088" y="2455674"/>
+            <a:ext cx="6912769" cy="735586"/>
           </a:xfrm>
           <a:prstGeom prst="rect">
             <a:avLst/>
@@ -8034,7 +8799,7 @@
             </a:defPPr>
             <a:lvl1pPr>
               <a:lnSpc>
-                <a:spcPct val="150000"/>
+                <a:spcPct val="95000"/>
               </a:lnSpc>
               <a:defRPr sz="2200"/>
             </a:lvl1pPr>
@@ -8042,26 +8807,18 @@
           <a:p>
             <a:r>
               <a:rPr lang="en-US" dirty="0"/>
-              <a:t>Two developers work together. One writes code. One reviews simultaneously.</a:t>
-            </a:r>
-          </a:p>
-          <a:p>
-            <a:r>
-              <a:rPr lang="en-US" dirty="0"/>
-              <a:t>This reduces mistakes.</a:t>
-            </a:r>
-          </a:p>
-          <a:p>
+              <a:t>Customer changes requirement, Team says "We'll include it in the next sprint."</a:t>
+            </a:r>
             <a:endParaRPr lang="en-IN" dirty="0"/>
           </a:p>
         </p:txBody>
       </p:sp>
       <p:sp>
         <p:nvSpPr>
-          <p:cNvPr id="8" name="TextBox 7">
+          <p:cNvPr id="14" name="TextBox 13">
             <a:extLst>
               <a:ext uri="{FF2B5EF4-FFF2-40B4-BE49-F238E27FC236}">
-                <a16:creationId xmlns:a16="http://schemas.microsoft.com/office/drawing/2014/main" id="{EE186809-85EC-44F1-1A27-DFF1F4050AFE}"/>
+                <a16:creationId xmlns:a16="http://schemas.microsoft.com/office/drawing/2014/main" id="{473A5C9C-4124-76C1-FA12-BD821E276FC5}"/>
               </a:ext>
             </a:extLst>
           </p:cNvPr>
@@ -8070,8 +8827,8 @@
         </p:nvSpPr>
         <p:spPr>
           <a:xfrm>
-            <a:off x="889350" y="3689426"/>
-            <a:ext cx="4187365" cy="413959"/>
+            <a:off x="837828" y="3464739"/>
+            <a:ext cx="6264696" cy="2567113"/>
           </a:xfrm>
           <a:prstGeom prst="rect">
             <a:avLst/>
@@ -8088,29 +8845,46 @@
             </a:defPPr>
             <a:lvl1pPr>
               <a:lnSpc>
-                <a:spcPct val="95000"/>
-              </a:lnSpc>
-              <a:defRPr sz="2200" b="1">
-                <a:solidFill>
-                  <a:srgbClr val="FF0000"/>
-                </a:solidFill>
-              </a:defRPr>
+                <a:spcPct val="150000"/>
+              </a:lnSpc>
+              <a:defRPr sz="2200"/>
             </a:lvl1pPr>
           </a:lstStyle>
           <a:p>
             <a:r>
-              <a:rPr lang="en-IN" dirty="0"/>
-              <a:t>5. Continuous Integration (CI)</a:t>
-            </a:r>
-          </a:p>
-        </p:txBody>
-      </p:sp>
-      <p:sp>
-        <p:nvSpPr>
-          <p:cNvPr id="9" name="TextBox 8">
+              <a:rPr lang="en-US" b="1" dirty="0"/>
+              <a:t>Agile Techniques for Managing Changes</a:t>
+            </a:r>
+          </a:p>
+          <a:p>
+            <a:r>
+              <a:rPr lang="en-US" dirty="0"/>
+              <a:t>Product Backlog </a:t>
+            </a:r>
+          </a:p>
+          <a:p>
+            <a:r>
+              <a:rPr lang="en-US" dirty="0"/>
+              <a:t>Sprint Planning </a:t>
+            </a:r>
+          </a:p>
+          <a:p>
+            <a:r>
+              <a:rPr lang="en-US" dirty="0"/>
+              <a:t>Customer feedback </a:t>
+            </a:r>
+          </a:p>
+          <a:p>
+            <a:endParaRPr lang="en-IN" dirty="0"/>
+          </a:p>
+        </p:txBody>
+      </p:sp>
+      <p:sp>
+        <p:nvSpPr>
+          <p:cNvPr id="15" name="TextBox 14">
             <a:extLst>
               <a:ext uri="{FF2B5EF4-FFF2-40B4-BE49-F238E27FC236}">
-                <a16:creationId xmlns:a16="http://schemas.microsoft.com/office/drawing/2014/main" id="{4329D583-DFED-C8DD-70EE-1AC25CC0AB39}"/>
+                <a16:creationId xmlns:a16="http://schemas.microsoft.com/office/drawing/2014/main" id="{0B28C5B3-EBC4-3980-954C-88C052BB8508}"/>
               </a:ext>
             </a:extLst>
           </p:cNvPr>
@@ -8119,8 +8893,8 @@
         </p:nvSpPr>
         <p:spPr>
           <a:xfrm>
-            <a:off x="935597" y="4052401"/>
-            <a:ext cx="10492682" cy="3074944"/>
+            <a:off x="5316069" y="3973660"/>
+            <a:ext cx="2961403" cy="2058192"/>
           </a:xfrm>
           <a:prstGeom prst="rect">
             <a:avLst/>
@@ -8139,60 +8913,36 @@
               <a:lnSpc>
                 <a:spcPct val="150000"/>
               </a:lnSpc>
-              <a:defRPr sz="2200"/>
+              <a:defRPr sz="2200" b="1"/>
             </a:lvl1pPr>
           </a:lstStyle>
           <a:p>
             <a:r>
-              <a:rPr lang="en-US" dirty="0"/>
-              <a:t>Developers merge code several times a day. Every merge automatically</a:t>
-            </a:r>
-          </a:p>
-          <a:p>
-            <a:pPr marL="342900" indent="-342900">
-              <a:buFont typeface="Arial" panose="020B0604020202020204" pitchFamily="34" charset="0"/>
-              <a:buChar char="•"/>
-            </a:pPr>
-            <a:r>
-              <a:rPr lang="en-US" dirty="0"/>
-              <a:t>Builds application </a:t>
-            </a:r>
-          </a:p>
-          <a:p>
-            <a:pPr marL="342900" indent="-342900">
-              <a:buFont typeface="Arial" panose="020B0604020202020204" pitchFamily="34" charset="0"/>
-              <a:buChar char="•"/>
-            </a:pPr>
-            <a:r>
-              <a:rPr lang="en-US" dirty="0"/>
-              <a:t>Runs tests </a:t>
-            </a:r>
-          </a:p>
-          <a:p>
-            <a:pPr marL="342900" indent="-342900">
-              <a:buFont typeface="Arial" panose="020B0604020202020204" pitchFamily="34" charset="0"/>
-              <a:buChar char="•"/>
-            </a:pPr>
-            <a:r>
-              <a:rPr lang="en-US" dirty="0"/>
-              <a:t>Detects bugs </a:t>
-            </a:r>
-          </a:p>
-          <a:p>
-            <a:r>
-              <a:rPr lang="en-US" dirty="0"/>
-              <a:t>before release</a:t>
-            </a:r>
-          </a:p>
-          <a:p>
-            <a:endParaRPr lang="en-IN" dirty="0"/>
+              <a:rPr lang="en-US" b="0" dirty="0"/>
+              <a:t>Frequent releases </a:t>
+            </a:r>
+          </a:p>
+          <a:p>
+            <a:r>
+              <a:rPr lang="en-US" b="0" dirty="0"/>
+              <a:t>Prioritization </a:t>
+            </a:r>
+          </a:p>
+          <a:p>
+            <a:r>
+              <a:rPr lang="en-US" b="0" dirty="0"/>
+              <a:t>Small iterations</a:t>
+            </a:r>
+          </a:p>
+          <a:p>
+            <a:endParaRPr lang="en-IN" b="0" dirty="0"/>
           </a:p>
         </p:txBody>
       </p:sp>
     </p:spTree>
     <p:extLst>
       <p:ext uri="{BB962C8B-B14F-4D97-AF65-F5344CB8AC3E}">
-        <p14:creationId xmlns:p14="http://schemas.microsoft.com/office/powerpoint/2010/main" val="442549559"/>
+        <p14:creationId xmlns:p14="http://schemas.microsoft.com/office/powerpoint/2010/main" val="1332491687"/>
       </p:ext>
     </p:extLst>
   </p:cSld>
@@ -8376,7 +9126,7 @@
           <p:cNvPr id="4" name="TextBox 3">
             <a:extLst>
               <a:ext uri="{FF2B5EF4-FFF2-40B4-BE49-F238E27FC236}">
-                <a16:creationId xmlns:a16="http://schemas.microsoft.com/office/drawing/2014/main" id="{FC2046E1-C567-2F18-9706-DD8E7E8DFE70}"/>
+                <a16:creationId xmlns:a16="http://schemas.microsoft.com/office/drawing/2014/main" id="{BB52DF52-66FB-7BBD-93B8-E3D1130B7DFC}"/>
               </a:ext>
             </a:extLst>
           </p:cNvPr>
@@ -8385,8 +9135,57 @@
         </p:nvSpPr>
         <p:spPr>
           <a:xfrm>
-            <a:off x="693812" y="260648"/>
-            <a:ext cx="3557384" cy="443198"/>
+            <a:off x="837828" y="188839"/>
+            <a:ext cx="3725700" cy="443198"/>
+          </a:xfrm>
+          <a:prstGeom prst="rect">
+            <a:avLst/>
+          </a:prstGeom>
+          <a:noFill/>
+        </p:spPr>
+        <p:txBody>
+          <a:bodyPr wrap="none" rtlCol="0">
+            <a:spAutoFit/>
+          </a:bodyPr>
+          <a:lstStyle>
+            <a:defPPr>
+              <a:defRPr lang="en-US"/>
+            </a:defPPr>
+            <a:lvl1pPr>
+              <a:lnSpc>
+                <a:spcPct val="95000"/>
+              </a:lnSpc>
+              <a:defRPr sz="2200" b="1">
+                <a:solidFill>
+                  <a:srgbClr val="FF0000"/>
+                </a:solidFill>
+              </a:defRPr>
+            </a:lvl1pPr>
+          </a:lstStyle>
+          <a:p>
+            <a:r>
+              <a:rPr lang="en-IN" dirty="0"/>
+              <a:t>Requirements Elicitation</a:t>
+            </a:r>
+          </a:p>
+        </p:txBody>
+      </p:sp>
+      <p:sp>
+        <p:nvSpPr>
+          <p:cNvPr id="2" name="TextBox 1">
+            <a:extLst>
+              <a:ext uri="{FF2B5EF4-FFF2-40B4-BE49-F238E27FC236}">
+                <a16:creationId xmlns:a16="http://schemas.microsoft.com/office/drawing/2014/main" id="{02055AD8-2861-6789-BFEC-0089FBD6D3EF}"/>
+              </a:ext>
+            </a:extLst>
+          </p:cNvPr>
+          <p:cNvSpPr txBox="1"/>
+          <p:nvPr/>
+        </p:nvSpPr>
+        <p:spPr>
+          <a:xfrm>
+            <a:off x="837828" y="586567"/>
+            <a:ext cx="10249922" cy="535788"/>
           </a:xfrm>
           <a:prstGeom prst="rect">
             <a:avLst/>
@@ -8403,20 +9202,17 @@
             </a:defPPr>
             <a:lvl1pPr>
               <a:lnSpc>
-                <a:spcPct val="95000"/>
-              </a:lnSpc>
-              <a:defRPr sz="2200" b="1">
-                <a:solidFill>
-                  <a:srgbClr val="FF0000"/>
-                </a:solidFill>
-              </a:defRPr>
+                <a:spcPct val="150000"/>
+              </a:lnSpc>
+              <a:defRPr sz="2200"/>
             </a:lvl1pPr>
           </a:lstStyle>
           <a:p>
             <a:r>
-              <a:rPr lang="en-IN" dirty="0"/>
-              <a:t>6. Acceptance Testing</a:t>
-            </a:r>
+              <a:rPr lang="en-US" dirty="0"/>
+              <a:t>Requirements Elicitation means Collecting requirements from stakeholders</a:t>
+            </a:r>
+            <a:endParaRPr lang="en-IN" dirty="0"/>
           </a:p>
         </p:txBody>
       </p:sp>
@@ -8425,7 +9221,7 @@
           <p:cNvPr id="5" name="TextBox 4">
             <a:extLst>
               <a:ext uri="{FF2B5EF4-FFF2-40B4-BE49-F238E27FC236}">
-                <a16:creationId xmlns:a16="http://schemas.microsoft.com/office/drawing/2014/main" id="{B1E85BDB-14A4-CF39-68AE-B03A0D1A849D}"/>
+                <a16:creationId xmlns:a16="http://schemas.microsoft.com/office/drawing/2014/main" id="{581D8BFA-7A98-5143-DEA6-18544F85FCEB}"/>
               </a:ext>
             </a:extLst>
           </p:cNvPr>
@@ -8434,8 +9230,8 @@
         </p:nvSpPr>
         <p:spPr>
           <a:xfrm>
-            <a:off x="721703" y="764704"/>
-            <a:ext cx="10153128" cy="1043619"/>
+            <a:off x="873426" y="1114343"/>
+            <a:ext cx="7790915" cy="535788"/>
           </a:xfrm>
           <a:prstGeom prst="rect">
             <a:avLst/>
@@ -8460,10 +9256,8 @@
           <a:p>
             <a:r>
               <a:rPr lang="en-US" dirty="0"/>
-              <a:t>Customer verifies whether the feature meets expectations.</a:t>
-            </a:r>
-          </a:p>
-          <a:p>
+              <a:t>Simply, "Understanding what the customer really wants."</a:t>
+            </a:r>
             <a:endParaRPr lang="en-IN" dirty="0"/>
           </a:p>
         </p:txBody>
@@ -8473,7 +9267,7 @@
           <p:cNvPr id="6" name="TextBox 5">
             <a:extLst>
               <a:ext uri="{FF2B5EF4-FFF2-40B4-BE49-F238E27FC236}">
-                <a16:creationId xmlns:a16="http://schemas.microsoft.com/office/drawing/2014/main" id="{100AEC0D-F17F-7CE5-68F1-653C6F49ECA5}"/>
+                <a16:creationId xmlns:a16="http://schemas.microsoft.com/office/drawing/2014/main" id="{B2432899-6CC7-00CE-31CB-17CB0F03F6FD}"/>
               </a:ext>
             </a:extLst>
           </p:cNvPr>
@@ -8482,8 +9276,8 @@
         </p:nvSpPr>
         <p:spPr>
           <a:xfrm>
-            <a:off x="714300" y="1440127"/>
-            <a:ext cx="10873208" cy="2059282"/>
+            <a:off x="873426" y="1679741"/>
+            <a:ext cx="4104456" cy="535788"/>
           </a:xfrm>
           <a:prstGeom prst="rect">
             <a:avLst/>
@@ -8507,31 +9301,261 @@
           </a:lstStyle>
           <a:p>
             <a:r>
-              <a:rPr lang="en-US" dirty="0"/>
-              <a:t>Customer requested Online Payment.</a:t>
-            </a:r>
-          </a:p>
-          <a:p>
-            <a:r>
-              <a:rPr lang="en-US" dirty="0"/>
-              <a:t>QA confirms Payment works.</a:t>
-            </a:r>
-          </a:p>
-          <a:p>
-            <a:r>
-              <a:rPr lang="en-US" dirty="0"/>
-              <a:t>Customer also confirms Payment matches business needs</a:t>
-            </a:r>
-          </a:p>
-          <a:p>
-            <a:endParaRPr lang="en-IN" dirty="0"/>
+              <a:rPr lang="en-IN" dirty="0"/>
+              <a:t>Common Techniques:</a:t>
+            </a:r>
+          </a:p>
+        </p:txBody>
+      </p:sp>
+      <p:sp>
+        <p:nvSpPr>
+          <p:cNvPr id="7" name="TextBox 6">
+            <a:extLst>
+              <a:ext uri="{FF2B5EF4-FFF2-40B4-BE49-F238E27FC236}">
+                <a16:creationId xmlns:a16="http://schemas.microsoft.com/office/drawing/2014/main" id="{C9CA6AAB-39C0-F6E9-F7B7-4A43F9422FCE}"/>
+              </a:ext>
+            </a:extLst>
+          </p:cNvPr>
+          <p:cNvSpPr txBox="1"/>
+          <p:nvPr/>
+        </p:nvSpPr>
+        <p:spPr>
+          <a:xfrm>
+            <a:off x="983086" y="2339848"/>
+            <a:ext cx="1866217" cy="443198"/>
+          </a:xfrm>
+          <a:prstGeom prst="rect">
+            <a:avLst/>
+          </a:prstGeom>
+          <a:noFill/>
+        </p:spPr>
+        <p:txBody>
+          <a:bodyPr wrap="none" rtlCol="0">
+            <a:spAutoFit/>
+          </a:bodyPr>
+          <a:lstStyle/>
+          <a:p>
+            <a:pPr>
+              <a:lnSpc>
+                <a:spcPct val="95000"/>
+              </a:lnSpc>
+            </a:pPr>
+            <a:r>
+              <a:rPr lang="en-IN" dirty="0"/>
+              <a:t>1. Interview</a:t>
+            </a:r>
+          </a:p>
+        </p:txBody>
+      </p:sp>
+      <p:sp>
+        <p:nvSpPr>
+          <p:cNvPr id="8" name="TextBox 7">
+            <a:extLst>
+              <a:ext uri="{FF2B5EF4-FFF2-40B4-BE49-F238E27FC236}">
+                <a16:creationId xmlns:a16="http://schemas.microsoft.com/office/drawing/2014/main" id="{6613C022-5C72-28B8-9F26-F18108DA80E4}"/>
+              </a:ext>
+            </a:extLst>
+          </p:cNvPr>
+          <p:cNvSpPr txBox="1"/>
+          <p:nvPr/>
+        </p:nvSpPr>
+        <p:spPr>
+          <a:xfrm>
+            <a:off x="952762" y="2945173"/>
+            <a:ext cx="2515432" cy="443198"/>
+          </a:xfrm>
+          <a:prstGeom prst="rect">
+            <a:avLst/>
+          </a:prstGeom>
+          <a:noFill/>
+        </p:spPr>
+        <p:txBody>
+          <a:bodyPr wrap="none" rtlCol="0">
+            <a:spAutoFit/>
+          </a:bodyPr>
+          <a:lstStyle/>
+          <a:p>
+            <a:pPr>
+              <a:lnSpc>
+                <a:spcPct val="95000"/>
+              </a:lnSpc>
+            </a:pPr>
+            <a:r>
+              <a:rPr lang="en-IN" dirty="0"/>
+              <a:t>2. Brainstorming</a:t>
+            </a:r>
+          </a:p>
+        </p:txBody>
+      </p:sp>
+      <p:sp>
+        <p:nvSpPr>
+          <p:cNvPr id="9" name="TextBox 8">
+            <a:extLst>
+              <a:ext uri="{FF2B5EF4-FFF2-40B4-BE49-F238E27FC236}">
+                <a16:creationId xmlns:a16="http://schemas.microsoft.com/office/drawing/2014/main" id="{FA831ECE-E10F-B379-E5DE-2F7AE74AFA42}"/>
+              </a:ext>
+            </a:extLst>
+          </p:cNvPr>
+          <p:cNvSpPr txBox="1"/>
+          <p:nvPr/>
+        </p:nvSpPr>
+        <p:spPr>
+          <a:xfrm>
+            <a:off x="983086" y="3555178"/>
+            <a:ext cx="2350323" cy="443198"/>
+          </a:xfrm>
+          <a:prstGeom prst="rect">
+            <a:avLst/>
+          </a:prstGeom>
+          <a:noFill/>
+        </p:spPr>
+        <p:txBody>
+          <a:bodyPr wrap="none" rtlCol="0">
+            <a:spAutoFit/>
+          </a:bodyPr>
+          <a:lstStyle/>
+          <a:p>
+            <a:pPr>
+              <a:lnSpc>
+                <a:spcPct val="95000"/>
+              </a:lnSpc>
+            </a:pPr>
+            <a:r>
+              <a:rPr lang="en-IN" dirty="0"/>
+              <a:t>3. Observation</a:t>
+            </a:r>
+          </a:p>
+        </p:txBody>
+      </p:sp>
+      <p:sp>
+        <p:nvSpPr>
+          <p:cNvPr id="10" name="TextBox 9">
+            <a:extLst>
+              <a:ext uri="{FF2B5EF4-FFF2-40B4-BE49-F238E27FC236}">
+                <a16:creationId xmlns:a16="http://schemas.microsoft.com/office/drawing/2014/main" id="{5431A432-E650-319A-A87D-CB1813DCE43A}"/>
+              </a:ext>
+            </a:extLst>
+          </p:cNvPr>
+          <p:cNvSpPr txBox="1"/>
+          <p:nvPr/>
+        </p:nvSpPr>
+        <p:spPr>
+          <a:xfrm>
+            <a:off x="952762" y="4144939"/>
+            <a:ext cx="2606804" cy="443198"/>
+          </a:xfrm>
+          <a:prstGeom prst="rect">
+            <a:avLst/>
+          </a:prstGeom>
+          <a:noFill/>
+        </p:spPr>
+        <p:txBody>
+          <a:bodyPr wrap="none" rtlCol="0">
+            <a:spAutoFit/>
+          </a:bodyPr>
+          <a:lstStyle/>
+          <a:p>
+            <a:pPr>
+              <a:lnSpc>
+                <a:spcPct val="95000"/>
+              </a:lnSpc>
+            </a:pPr>
+            <a:r>
+              <a:rPr lang="en-IN" dirty="0"/>
+              <a:t>4. Questionnaire</a:t>
+            </a:r>
+          </a:p>
+        </p:txBody>
+      </p:sp>
+      <p:sp>
+        <p:nvSpPr>
+          <p:cNvPr id="11" name="TextBox 10">
+            <a:extLst>
+              <a:ext uri="{FF2B5EF4-FFF2-40B4-BE49-F238E27FC236}">
+                <a16:creationId xmlns:a16="http://schemas.microsoft.com/office/drawing/2014/main" id="{F846F144-2D90-C607-6E91-DD88C0CB25FE}"/>
+              </a:ext>
+            </a:extLst>
+          </p:cNvPr>
+          <p:cNvSpPr txBox="1"/>
+          <p:nvPr/>
+        </p:nvSpPr>
+        <p:spPr>
+          <a:xfrm>
+            <a:off x="983086" y="4687907"/>
+            <a:ext cx="2108269" cy="443198"/>
+          </a:xfrm>
+          <a:prstGeom prst="rect">
+            <a:avLst/>
+          </a:prstGeom>
+          <a:noFill/>
+        </p:spPr>
+        <p:txBody>
+          <a:bodyPr wrap="none" rtlCol="0">
+            <a:spAutoFit/>
+          </a:bodyPr>
+          <a:lstStyle/>
+          <a:p>
+            <a:pPr>
+              <a:lnSpc>
+                <a:spcPct val="95000"/>
+              </a:lnSpc>
+            </a:pPr>
+            <a:r>
+              <a:rPr lang="en-IN" dirty="0"/>
+              <a:t>5. Workshops</a:t>
+            </a:r>
+          </a:p>
+        </p:txBody>
+      </p:sp>
+      <p:sp>
+        <p:nvSpPr>
+          <p:cNvPr id="12" name="TextBox 11">
+            <a:extLst>
+              <a:ext uri="{FF2B5EF4-FFF2-40B4-BE49-F238E27FC236}">
+                <a16:creationId xmlns:a16="http://schemas.microsoft.com/office/drawing/2014/main" id="{19A89CEF-2CFA-4F90-8186-F50CC3F1661F}"/>
+              </a:ext>
+            </a:extLst>
+          </p:cNvPr>
+          <p:cNvSpPr txBox="1"/>
+          <p:nvPr/>
+        </p:nvSpPr>
+        <p:spPr>
+          <a:xfrm>
+            <a:off x="983086" y="5300459"/>
+            <a:ext cx="1988045" cy="443198"/>
+          </a:xfrm>
+          <a:prstGeom prst="rect">
+            <a:avLst/>
+          </a:prstGeom>
+          <a:noFill/>
+        </p:spPr>
+        <p:txBody>
+          <a:bodyPr wrap="none" rtlCol="0">
+            <a:spAutoFit/>
+          </a:bodyPr>
+          <a:lstStyle>
+            <a:defPPr>
+              <a:defRPr lang="en-US"/>
+            </a:defPPr>
+            <a:lvl1pPr>
+              <a:lnSpc>
+                <a:spcPct val="95000"/>
+              </a:lnSpc>
+              <a:defRPr/>
+            </a:lvl1pPr>
+          </a:lstStyle>
+          <a:p>
+            <a:r>
+              <a:rPr lang="en-IN" dirty="0"/>
+              <a:t>6. Prototype</a:t>
+            </a:r>
           </a:p>
         </p:txBody>
       </p:sp>
     </p:spTree>
     <p:extLst>
       <p:ext uri="{BB962C8B-B14F-4D97-AF65-F5344CB8AC3E}">
-        <p14:creationId xmlns:p14="http://schemas.microsoft.com/office/powerpoint/2010/main" val="896639986"/>
+        <p14:creationId xmlns:p14="http://schemas.microsoft.com/office/powerpoint/2010/main" val="502604164"/>
       </p:ext>
     </p:extLst>
   </p:cSld>
@@ -8575,7 +9599,7 @@
           <p:cNvPr id="4" name="TextBox 3">
             <a:extLst>
               <a:ext uri="{FF2B5EF4-FFF2-40B4-BE49-F238E27FC236}">
-                <a16:creationId xmlns:a16="http://schemas.microsoft.com/office/drawing/2014/main" id="{577BDD60-3446-7A7E-2F21-B0A4F2D6E517}"/>
+                <a16:creationId xmlns:a16="http://schemas.microsoft.com/office/drawing/2014/main" id="{2740E664-14FA-E7DA-0A47-DA3D94456E97}"/>
               </a:ext>
             </a:extLst>
           </p:cNvPr>
@@ -8584,8 +9608,57 @@
         </p:nvSpPr>
         <p:spPr>
           <a:xfrm>
-            <a:off x="693812" y="260648"/>
-            <a:ext cx="3251211" cy="413959"/>
+            <a:off x="837828" y="332656"/>
+            <a:ext cx="4905510" cy="443198"/>
+          </a:xfrm>
+          <a:prstGeom prst="rect">
+            <a:avLst/>
+          </a:prstGeom>
+          <a:noFill/>
+        </p:spPr>
+        <p:txBody>
+          <a:bodyPr wrap="none" rtlCol="0">
+            <a:spAutoFit/>
+          </a:bodyPr>
+          <a:lstStyle>
+            <a:defPPr>
+              <a:defRPr lang="en-US"/>
+            </a:defPPr>
+            <a:lvl1pPr>
+              <a:lnSpc>
+                <a:spcPct val="95000"/>
+              </a:lnSpc>
+              <a:defRPr sz="2200" b="1">
+                <a:solidFill>
+                  <a:srgbClr val="FF0000"/>
+                </a:solidFill>
+              </a:defRPr>
+            </a:lvl1pPr>
+          </a:lstStyle>
+          <a:p>
+            <a:r>
+              <a:rPr lang="en-IN" dirty="0"/>
+              <a:t>Agile Requirements Prioritization</a:t>
+            </a:r>
+          </a:p>
+        </p:txBody>
+      </p:sp>
+      <p:sp>
+        <p:nvSpPr>
+          <p:cNvPr id="5" name="TextBox 4">
+            <a:extLst>
+              <a:ext uri="{FF2B5EF4-FFF2-40B4-BE49-F238E27FC236}">
+                <a16:creationId xmlns:a16="http://schemas.microsoft.com/office/drawing/2014/main" id="{97B2C151-7AB0-DA64-2128-1AF100FD54EF}"/>
+              </a:ext>
+            </a:extLst>
+          </p:cNvPr>
+          <p:cNvSpPr txBox="1"/>
+          <p:nvPr/>
+        </p:nvSpPr>
+        <p:spPr>
+          <a:xfrm>
+            <a:off x="873426" y="908720"/>
+            <a:ext cx="6029215" cy="535788"/>
           </a:xfrm>
           <a:prstGeom prst="rect">
             <a:avLst/>
@@ -8602,57 +9675,461 @@
             </a:defPPr>
             <a:lvl1pPr>
               <a:lnSpc>
-                <a:spcPct val="95000"/>
-              </a:lnSpc>
-              <a:defRPr sz="2200" b="1">
-                <a:solidFill>
-                  <a:srgbClr val="FF0000"/>
-                </a:solidFill>
-              </a:defRPr>
+                <a:spcPct val="150000"/>
+              </a:lnSpc>
+              <a:defRPr sz="2200"/>
             </a:lvl1pPr>
           </a:lstStyle>
           <a:p>
             <a:r>
-              <a:rPr lang="en-IN" dirty="0"/>
-              <a:t>Agile QA Principles</a:t>
-            </a:r>
-          </a:p>
-        </p:txBody>
-      </p:sp>
-      <p:pic>
-        <p:nvPicPr>
-          <p:cNvPr id="6" name="Picture 5">
+              <a:rPr lang="en-US" dirty="0"/>
+              <a:t>Not all requirements are equally important.</a:t>
+            </a:r>
+            <a:endParaRPr lang="en-IN" dirty="0"/>
+          </a:p>
+        </p:txBody>
+      </p:sp>
+      <p:sp>
+        <p:nvSpPr>
+          <p:cNvPr id="6" name="TextBox 5">
             <a:extLst>
               <a:ext uri="{FF2B5EF4-FFF2-40B4-BE49-F238E27FC236}">
-                <a16:creationId xmlns:a16="http://schemas.microsoft.com/office/drawing/2014/main" id="{A4E3E793-8F33-9E09-1B61-76A1B87C852A}"/>
+                <a16:creationId xmlns:a16="http://schemas.microsoft.com/office/drawing/2014/main" id="{040E2E79-4B49-24E1-4917-689D79DD1A25}"/>
               </a:ext>
             </a:extLst>
           </p:cNvPr>
-          <p:cNvPicPr>
-            <a:picLocks noChangeAspect="1"/>
-          </p:cNvPicPr>
+          <p:cNvSpPr txBox="1"/>
           <p:nvPr/>
-        </p:nvPicPr>
-        <p:blipFill>
-          <a:blip r:embed="rId2"/>
-          <a:stretch>
-            <a:fillRect/>
-          </a:stretch>
-        </p:blipFill>
-        <p:spPr>
-          <a:xfrm>
-            <a:off x="1701924" y="980728"/>
-            <a:ext cx="8784976" cy="5236287"/>
+        </p:nvSpPr>
+        <p:spPr>
+          <a:xfrm>
+            <a:off x="837828" y="1437814"/>
+            <a:ext cx="4540025" cy="3582776"/>
           </a:xfrm>
           <a:prstGeom prst="rect">
             <a:avLst/>
           </a:prstGeom>
-        </p:spPr>
-      </p:pic>
+          <a:noFill/>
+        </p:spPr>
+        <p:txBody>
+          <a:bodyPr wrap="square" rtlCol="0">
+            <a:spAutoFit/>
+          </a:bodyPr>
+          <a:lstStyle>
+            <a:defPPr>
+              <a:defRPr lang="en-US"/>
+            </a:defPPr>
+            <a:lvl1pPr>
+              <a:lnSpc>
+                <a:spcPct val="150000"/>
+              </a:lnSpc>
+              <a:defRPr sz="2200"/>
+            </a:lvl1pPr>
+          </a:lstStyle>
+          <a:p>
+            <a:r>
+              <a:rPr lang="en-US" dirty="0"/>
+              <a:t>Some are</a:t>
+            </a:r>
+          </a:p>
+          <a:p>
+            <a:pPr marL="342900" indent="-342900">
+              <a:buFont typeface="Arial" panose="020B0604020202020204" pitchFamily="34" charset="0"/>
+              <a:buChar char="•"/>
+            </a:pPr>
+            <a:r>
+              <a:rPr lang="en-US" dirty="0"/>
+              <a:t>Must Have</a:t>
+            </a:r>
+          </a:p>
+          <a:p>
+            <a:pPr marL="342900" indent="-342900">
+              <a:buFont typeface="Arial" panose="020B0604020202020204" pitchFamily="34" charset="0"/>
+              <a:buChar char="•"/>
+            </a:pPr>
+            <a:r>
+              <a:rPr lang="en-US" dirty="0"/>
+              <a:t>Some are</a:t>
+            </a:r>
+          </a:p>
+          <a:p>
+            <a:pPr marL="342900" indent="-342900">
+              <a:buFont typeface="Arial" panose="020B0604020202020204" pitchFamily="34" charset="0"/>
+              <a:buChar char="•"/>
+            </a:pPr>
+            <a:r>
+              <a:rPr lang="en-US" dirty="0"/>
+              <a:t>Nice to Have</a:t>
+            </a:r>
+          </a:p>
+          <a:p>
+            <a:r>
+              <a:rPr lang="en-US" dirty="0"/>
+              <a:t>Agile decides what should be built first.</a:t>
+            </a:r>
+          </a:p>
+          <a:p>
+            <a:endParaRPr lang="en-IN" dirty="0"/>
+          </a:p>
+        </p:txBody>
+      </p:sp>
+      <p:graphicFrame>
+        <p:nvGraphicFramePr>
+          <p:cNvPr id="11" name="Table 10">
+            <a:extLst>
+              <a:ext uri="{FF2B5EF4-FFF2-40B4-BE49-F238E27FC236}">
+                <a16:creationId xmlns:a16="http://schemas.microsoft.com/office/drawing/2014/main" id="{F0D25AC8-339F-12B3-2072-D0DAF7984A39}"/>
+              </a:ext>
+            </a:extLst>
+          </p:cNvPr>
+          <p:cNvGraphicFramePr>
+            <a:graphicFrameLocks noGrp="1"/>
+          </p:cNvGraphicFramePr>
+          <p:nvPr>
+            <p:extLst>
+              <p:ext uri="{D42A27DB-BD31-4B8C-83A1-F6EECF244321}">
+                <p14:modId xmlns:p14="http://schemas.microsoft.com/office/powerpoint/2010/main" val="240122782"/>
+              </p:ext>
+            </p:extLst>
+          </p:nvPr>
+        </p:nvGraphicFramePr>
+        <p:xfrm>
+          <a:off x="7060738" y="1772816"/>
+          <a:ext cx="5128087" cy="2286000"/>
+        </p:xfrm>
+        <a:graphic>
+          <a:graphicData uri="http://schemas.openxmlformats.org/drawingml/2006/table">
+            <a:tbl>
+              <a:tblPr/>
+              <a:tblGrid>
+                <a:gridCol w="2071448">
+                  <a:extLst>
+                    <a:ext uri="{9D8B030D-6E8A-4147-A177-3AD203B41FA5}">
+                      <a16:colId xmlns:a16="http://schemas.microsoft.com/office/drawing/2014/main" val="789342424"/>
+                    </a:ext>
+                  </a:extLst>
+                </a:gridCol>
+                <a:gridCol w="3056639">
+                  <a:extLst>
+                    <a:ext uri="{9D8B030D-6E8A-4147-A177-3AD203B41FA5}">
+                      <a16:colId xmlns:a16="http://schemas.microsoft.com/office/drawing/2014/main" val="3803249067"/>
+                    </a:ext>
+                  </a:extLst>
+                </a:gridCol>
+              </a:tblGrid>
+              <a:tr h="457200">
+                <a:tc>
+                  <a:txBody>
+                    <a:bodyPr/>
+                    <a:lstStyle/>
+                    <a:p>
+                      <a:r>
+                        <a:rPr lang="en-IN" sz="2200" b="1" dirty="0"/>
+                        <a:t>Priority</a:t>
+                      </a:r>
+                    </a:p>
+                  </a:txBody>
+                  <a:tcPr anchor="ctr">
+                    <a:lnL>
+                      <a:noFill/>
+                    </a:lnL>
+                    <a:lnR>
+                      <a:noFill/>
+                    </a:lnR>
+                    <a:lnT>
+                      <a:noFill/>
+                    </a:lnT>
+                    <a:lnB>
+                      <a:noFill/>
+                    </a:lnB>
+                    <a:noFill/>
+                  </a:tcPr>
+                </a:tc>
+                <a:tc>
+                  <a:txBody>
+                    <a:bodyPr/>
+                    <a:lstStyle/>
+                    <a:p>
+                      <a:r>
+                        <a:rPr lang="en-IN" sz="2200" b="1" dirty="0"/>
+                        <a:t>Meaning</a:t>
+                      </a:r>
+                    </a:p>
+                  </a:txBody>
+                  <a:tcPr anchor="ctr">
+                    <a:lnL>
+                      <a:noFill/>
+                    </a:lnL>
+                    <a:lnR>
+                      <a:noFill/>
+                    </a:lnR>
+                    <a:lnT>
+                      <a:noFill/>
+                    </a:lnT>
+                    <a:lnB>
+                      <a:noFill/>
+                    </a:lnB>
+                    <a:noFill/>
+                  </a:tcPr>
+                </a:tc>
+                <a:extLst>
+                  <a:ext uri="{0D108BD9-81ED-4DB2-BD59-A6C34878D82A}">
+                    <a16:rowId xmlns:a16="http://schemas.microsoft.com/office/drawing/2014/main" val="1756545909"/>
+                  </a:ext>
+                </a:extLst>
+              </a:tr>
+              <a:tr h="457200">
+                <a:tc>
+                  <a:txBody>
+                    <a:bodyPr/>
+                    <a:lstStyle/>
+                    <a:p>
+                      <a:r>
+                        <a:rPr lang="en-IN" sz="2200"/>
+                        <a:t>Must Have</a:t>
+                      </a:r>
+                    </a:p>
+                  </a:txBody>
+                  <a:tcPr anchor="ctr">
+                    <a:lnL>
+                      <a:noFill/>
+                    </a:lnL>
+                    <a:lnR>
+                      <a:noFill/>
+                    </a:lnR>
+                    <a:lnT>
+                      <a:noFill/>
+                    </a:lnT>
+                    <a:lnB>
+                      <a:noFill/>
+                    </a:lnB>
+                    <a:noFill/>
+                  </a:tcPr>
+                </a:tc>
+                <a:tc>
+                  <a:txBody>
+                    <a:bodyPr/>
+                    <a:lstStyle/>
+                    <a:p>
+                      <a:r>
+                        <a:rPr lang="en-IN" sz="2200" dirty="0"/>
+                        <a:t>Essential</a:t>
+                      </a:r>
+                    </a:p>
+                  </a:txBody>
+                  <a:tcPr anchor="ctr">
+                    <a:lnL>
+                      <a:noFill/>
+                    </a:lnL>
+                    <a:lnR>
+                      <a:noFill/>
+                    </a:lnR>
+                    <a:lnT>
+                      <a:noFill/>
+                    </a:lnT>
+                    <a:lnB>
+                      <a:noFill/>
+                    </a:lnB>
+                    <a:noFill/>
+                  </a:tcPr>
+                </a:tc>
+                <a:extLst>
+                  <a:ext uri="{0D108BD9-81ED-4DB2-BD59-A6C34878D82A}">
+                    <a16:rowId xmlns:a16="http://schemas.microsoft.com/office/drawing/2014/main" val="2656525662"/>
+                  </a:ext>
+                </a:extLst>
+              </a:tr>
+              <a:tr h="457200">
+                <a:tc>
+                  <a:txBody>
+                    <a:bodyPr/>
+                    <a:lstStyle/>
+                    <a:p>
+                      <a:r>
+                        <a:rPr lang="en-IN" sz="2200"/>
+                        <a:t>Should Have</a:t>
+                      </a:r>
+                    </a:p>
+                  </a:txBody>
+                  <a:tcPr anchor="ctr">
+                    <a:lnL>
+                      <a:noFill/>
+                    </a:lnL>
+                    <a:lnR>
+                      <a:noFill/>
+                    </a:lnR>
+                    <a:lnT>
+                      <a:noFill/>
+                    </a:lnT>
+                    <a:lnB>
+                      <a:noFill/>
+                    </a:lnB>
+                    <a:noFill/>
+                  </a:tcPr>
+                </a:tc>
+                <a:tc>
+                  <a:txBody>
+                    <a:bodyPr/>
+                    <a:lstStyle/>
+                    <a:p>
+                      <a:r>
+                        <a:rPr lang="en-IN" sz="2200"/>
+                        <a:t>Important</a:t>
+                      </a:r>
+                    </a:p>
+                  </a:txBody>
+                  <a:tcPr anchor="ctr">
+                    <a:lnL>
+                      <a:noFill/>
+                    </a:lnL>
+                    <a:lnR>
+                      <a:noFill/>
+                    </a:lnR>
+                    <a:lnT>
+                      <a:noFill/>
+                    </a:lnT>
+                    <a:lnB>
+                      <a:noFill/>
+                    </a:lnB>
+                    <a:noFill/>
+                  </a:tcPr>
+                </a:tc>
+                <a:extLst>
+                  <a:ext uri="{0D108BD9-81ED-4DB2-BD59-A6C34878D82A}">
+                    <a16:rowId xmlns:a16="http://schemas.microsoft.com/office/drawing/2014/main" val="3980124545"/>
+                  </a:ext>
+                </a:extLst>
+              </a:tr>
+              <a:tr h="457200">
+                <a:tc>
+                  <a:txBody>
+                    <a:bodyPr/>
+                    <a:lstStyle/>
+                    <a:p>
+                      <a:r>
+                        <a:rPr lang="en-IN" sz="2200" dirty="0"/>
+                        <a:t>Could Have</a:t>
+                      </a:r>
+                    </a:p>
+                  </a:txBody>
+                  <a:tcPr anchor="ctr">
+                    <a:lnL>
+                      <a:noFill/>
+                    </a:lnL>
+                    <a:lnR>
+                      <a:noFill/>
+                    </a:lnR>
+                    <a:lnT>
+                      <a:noFill/>
+                    </a:lnT>
+                    <a:lnB>
+                      <a:noFill/>
+                    </a:lnB>
+                    <a:noFill/>
+                  </a:tcPr>
+                </a:tc>
+                <a:tc>
+                  <a:txBody>
+                    <a:bodyPr/>
+                    <a:lstStyle/>
+                    <a:p>
+                      <a:r>
+                        <a:rPr lang="en-IN" sz="2200" dirty="0"/>
+                        <a:t>Optional</a:t>
+                      </a:r>
+                    </a:p>
+                  </a:txBody>
+                  <a:tcPr anchor="ctr">
+                    <a:lnL>
+                      <a:noFill/>
+                    </a:lnL>
+                    <a:lnR>
+                      <a:noFill/>
+                    </a:lnR>
+                    <a:lnT>
+                      <a:noFill/>
+                    </a:lnT>
+                    <a:lnB>
+                      <a:noFill/>
+                    </a:lnB>
+                    <a:noFill/>
+                  </a:tcPr>
+                </a:tc>
+                <a:extLst>
+                  <a:ext uri="{0D108BD9-81ED-4DB2-BD59-A6C34878D82A}">
+                    <a16:rowId xmlns:a16="http://schemas.microsoft.com/office/drawing/2014/main" val="848277869"/>
+                  </a:ext>
+                </a:extLst>
+              </a:tr>
+              <a:tr h="457200">
+                <a:tc>
+                  <a:txBody>
+                    <a:bodyPr/>
+                    <a:lstStyle/>
+                    <a:p>
+                      <a:r>
+                        <a:rPr lang="en-IN" sz="2200"/>
+                        <a:t>Won't Have</a:t>
+                      </a:r>
+                    </a:p>
+                  </a:txBody>
+                  <a:tcPr anchor="ctr">
+                    <a:lnL>
+                      <a:noFill/>
+                    </a:lnL>
+                    <a:lnR>
+                      <a:noFill/>
+                    </a:lnR>
+                    <a:lnT>
+                      <a:noFill/>
+                    </a:lnT>
+                    <a:lnB>
+                      <a:noFill/>
+                    </a:lnB>
+                    <a:noFill/>
+                  </a:tcPr>
+                </a:tc>
+                <a:tc>
+                  <a:txBody>
+                    <a:bodyPr/>
+                    <a:lstStyle/>
+                    <a:p>
+                      <a:r>
+                        <a:rPr lang="en-IN" sz="2200" dirty="0"/>
+                        <a:t>Not now</a:t>
+                      </a:r>
+                    </a:p>
+                  </a:txBody>
+                  <a:tcPr anchor="ctr">
+                    <a:lnL>
+                      <a:noFill/>
+                    </a:lnL>
+                    <a:lnR>
+                      <a:noFill/>
+                    </a:lnR>
+                    <a:lnT>
+                      <a:noFill/>
+                    </a:lnT>
+                    <a:lnB>
+                      <a:noFill/>
+                    </a:lnB>
+                    <a:noFill/>
+                  </a:tcPr>
+                </a:tc>
+                <a:extLst>
+                  <a:ext uri="{0D108BD9-81ED-4DB2-BD59-A6C34878D82A}">
+                    <a16:rowId xmlns:a16="http://schemas.microsoft.com/office/drawing/2014/main" val="1553430315"/>
+                  </a:ext>
+                </a:extLst>
+              </a:tr>
+            </a:tbl>
+          </a:graphicData>
+        </a:graphic>
+      </p:graphicFrame>
     </p:spTree>
     <p:extLst>
       <p:ext uri="{BB962C8B-B14F-4D97-AF65-F5344CB8AC3E}">
-        <p14:creationId xmlns:p14="http://schemas.microsoft.com/office/powerpoint/2010/main" val="3446938539"/>
+        <p14:creationId xmlns:p14="http://schemas.microsoft.com/office/powerpoint/2010/main" val="2978482183"/>
       </p:ext>
     </p:extLst>
   </p:cSld>
@@ -8696,7 +10173,7 @@
           <p:cNvPr id="4" name="TextBox 3">
             <a:extLst>
               <a:ext uri="{FF2B5EF4-FFF2-40B4-BE49-F238E27FC236}">
-                <a16:creationId xmlns:a16="http://schemas.microsoft.com/office/drawing/2014/main" id="{ADFA1E54-4B4E-21E8-E2C8-9B8A75C4BC04}"/>
+                <a16:creationId xmlns:a16="http://schemas.microsoft.com/office/drawing/2014/main" id="{AB08E214-5D16-6FDD-B0A4-BC66A3465653}"/>
               </a:ext>
             </a:extLst>
           </p:cNvPr>
@@ -8705,8 +10182,62 @@
         </p:nvSpPr>
         <p:spPr>
           <a:xfrm>
-            <a:off x="765820" y="260648"/>
-            <a:ext cx="2597186" cy="443198"/>
+            <a:off x="981844" y="168947"/>
+            <a:ext cx="4206601" cy="413959"/>
+          </a:xfrm>
+          <a:prstGeom prst="rect">
+            <a:avLst/>
+          </a:prstGeom>
+          <a:noFill/>
+        </p:spPr>
+        <p:txBody>
+          <a:bodyPr wrap="none" rtlCol="0">
+            <a:spAutoFit/>
+          </a:bodyPr>
+          <a:lstStyle>
+            <a:defPPr>
+              <a:defRPr lang="en-US"/>
+            </a:defPPr>
+            <a:lvl1pPr>
+              <a:lnSpc>
+                <a:spcPct val="95000"/>
+              </a:lnSpc>
+              <a:defRPr sz="2200" b="1">
+                <a:solidFill>
+                  <a:srgbClr val="FF0000"/>
+                </a:solidFill>
+              </a:defRPr>
+            </a:lvl1pPr>
+          </a:lstStyle>
+          <a:p>
+            <a:r>
+              <a:rPr lang="en-IN" dirty="0"/>
+              <a:t>Agile Requirements </a:t>
+            </a:r>
+            <a:r>
+              <a:rPr lang="en-IN" dirty="0" err="1"/>
+              <a:t>Modeling</a:t>
+            </a:r>
+            <a:endParaRPr lang="en-IN" dirty="0"/>
+          </a:p>
+        </p:txBody>
+      </p:sp>
+      <p:sp>
+        <p:nvSpPr>
+          <p:cNvPr id="5" name="TextBox 4">
+            <a:extLst>
+              <a:ext uri="{FF2B5EF4-FFF2-40B4-BE49-F238E27FC236}">
+                <a16:creationId xmlns:a16="http://schemas.microsoft.com/office/drawing/2014/main" id="{BE41F765-079B-8940-5405-561C5BF9624E}"/>
+              </a:ext>
+            </a:extLst>
+          </p:cNvPr>
+          <p:cNvSpPr txBox="1"/>
+          <p:nvPr/>
+        </p:nvSpPr>
+        <p:spPr>
+          <a:xfrm>
+            <a:off x="991987" y="507673"/>
+            <a:ext cx="10153128" cy="1043619"/>
           </a:xfrm>
           <a:prstGeom prst="rect">
             <a:avLst/>
@@ -8723,29 +10254,28 @@
             </a:defPPr>
             <a:lvl1pPr>
               <a:lnSpc>
-                <a:spcPct val="95000"/>
-              </a:lnSpc>
-              <a:defRPr sz="2200" b="1">
-                <a:solidFill>
-                  <a:srgbClr val="FF0000"/>
-                </a:solidFill>
-              </a:defRPr>
+                <a:spcPct val="150000"/>
+              </a:lnSpc>
+              <a:defRPr sz="2200"/>
             </a:lvl1pPr>
           </a:lstStyle>
           <a:p>
             <a:r>
-              <a:rPr lang="en-IN" dirty="0"/>
-              <a:t>Software Testing</a:t>
-            </a:r>
-          </a:p>
-        </p:txBody>
-      </p:sp>
-      <p:sp>
-        <p:nvSpPr>
-          <p:cNvPr id="5" name="TextBox 4">
+              <a:rPr lang="en-US" dirty="0"/>
+              <a:t>Requirement Modeling means Representing requirements visually</a:t>
+            </a:r>
+          </a:p>
+          <a:p>
+            <a:endParaRPr lang="en-IN" dirty="0"/>
+          </a:p>
+        </p:txBody>
+      </p:sp>
+      <p:sp>
+        <p:nvSpPr>
+          <p:cNvPr id="6" name="TextBox 5">
             <a:extLst>
               <a:ext uri="{FF2B5EF4-FFF2-40B4-BE49-F238E27FC236}">
-                <a16:creationId xmlns:a16="http://schemas.microsoft.com/office/drawing/2014/main" id="{81A264AF-698A-C750-7C14-F6527F54896A}"/>
+                <a16:creationId xmlns:a16="http://schemas.microsoft.com/office/drawing/2014/main" id="{10505C73-9E9F-D898-2F1F-84CE27143143}"/>
               </a:ext>
             </a:extLst>
           </p:cNvPr>
@@ -8754,8 +10284,8 @@
         </p:nvSpPr>
         <p:spPr>
           <a:xfrm>
-            <a:off x="765820" y="674607"/>
-            <a:ext cx="6942926" cy="536622"/>
+            <a:off x="981844" y="1014308"/>
+            <a:ext cx="2808312" cy="2567113"/>
           </a:xfrm>
           <a:prstGeom prst="rect">
             <a:avLst/>
@@ -8778,105 +10308,13 @@
             </a:lvl1pPr>
           </a:lstStyle>
           <a:p>
-            <a:r>
-              <a:rPr lang="en-US" dirty="0"/>
-              <a:t>Imagine you have bought a new smartphone 📱</a:t>
-            </a:r>
-            <a:endParaRPr lang="en-IN" dirty="0"/>
-          </a:p>
-        </p:txBody>
-      </p:sp>
-      <p:sp>
-        <p:nvSpPr>
-          <p:cNvPr id="6" name="TextBox 5">
-            <a:extLst>
-              <a:ext uri="{FF2B5EF4-FFF2-40B4-BE49-F238E27FC236}">
-                <a16:creationId xmlns:a16="http://schemas.microsoft.com/office/drawing/2014/main" id="{1AC7A405-F382-7AD5-E96D-D150AE69DDEF}"/>
-              </a:ext>
-            </a:extLst>
-          </p:cNvPr>
-          <p:cNvSpPr txBox="1"/>
-          <p:nvPr/>
-        </p:nvSpPr>
-        <p:spPr>
-          <a:xfrm>
-            <a:off x="765820" y="1211229"/>
-            <a:ext cx="6923690" cy="535788"/>
-          </a:xfrm>
-          <a:prstGeom prst="rect">
-            <a:avLst/>
-          </a:prstGeom>
-          <a:noFill/>
-        </p:spPr>
-        <p:txBody>
-          <a:bodyPr wrap="square" rtlCol="0">
-            <a:spAutoFit/>
-          </a:bodyPr>
-          <a:lstStyle>
-            <a:defPPr>
-              <a:defRPr lang="en-US"/>
-            </a:defPPr>
-            <a:lvl1pPr>
-              <a:lnSpc>
-                <a:spcPct val="150000"/>
-              </a:lnSpc>
-              <a:defRPr sz="2200"/>
-            </a:lvl1pPr>
-          </a:lstStyle>
-          <a:p>
-            <a:r>
-              <a:rPr lang="en-US" dirty="0"/>
-              <a:t>Before using it, you naturally check several things:</a:t>
-            </a:r>
-            <a:endParaRPr lang="en-IN" dirty="0"/>
-          </a:p>
-        </p:txBody>
-      </p:sp>
-      <p:sp>
-        <p:nvSpPr>
-          <p:cNvPr id="7" name="TextBox 6">
-            <a:extLst>
-              <a:ext uri="{FF2B5EF4-FFF2-40B4-BE49-F238E27FC236}">
-                <a16:creationId xmlns:a16="http://schemas.microsoft.com/office/drawing/2014/main" id="{2E1C27B6-6F9A-C4CD-6948-B53B92A7F9C5}"/>
-              </a:ext>
-            </a:extLst>
-          </p:cNvPr>
-          <p:cNvSpPr txBox="1"/>
-          <p:nvPr/>
-        </p:nvSpPr>
-        <p:spPr>
-          <a:xfrm>
-            <a:off x="837828" y="1747017"/>
-            <a:ext cx="8640960" cy="2060308"/>
-          </a:xfrm>
-          <a:prstGeom prst="rect">
-            <a:avLst/>
-          </a:prstGeom>
-          <a:noFill/>
-        </p:spPr>
-        <p:txBody>
-          <a:bodyPr wrap="square" rtlCol="0">
-            <a:spAutoFit/>
-          </a:bodyPr>
-          <a:lstStyle>
-            <a:defPPr>
-              <a:defRPr lang="en-US"/>
-            </a:defPPr>
-            <a:lvl1pPr>
-              <a:lnSpc>
-                <a:spcPct val="150000"/>
-              </a:lnSpc>
-              <a:defRPr sz="2200"/>
-            </a:lvl1pPr>
-          </a:lstStyle>
-          <a:p>
             <a:pPr marL="342900" indent="-342900">
               <a:buFont typeface="Arial" panose="020B0604020202020204" pitchFamily="34" charset="0"/>
               <a:buChar char="•"/>
             </a:pPr>
             <a:r>
-              <a:rPr lang="en-US" dirty="0"/>
-              <a:t>Does it make calls? ☎️</a:t>
+              <a:rPr lang="en-IN" dirty="0"/>
+              <a:t>User Stories</a:t>
             </a:r>
           </a:p>
           <a:p>
@@ -8885,8 +10323,8 @@
               <a:buChar char="•"/>
             </a:pPr>
             <a:r>
-              <a:rPr lang="en-US" dirty="0"/>
-              <a:t>Is the screen easy to use? 👆</a:t>
+              <a:rPr lang="en-IN" dirty="0"/>
+              <a:t>Flowcharts</a:t>
             </a:r>
           </a:p>
           <a:p>
@@ -8895,8 +10333,8 @@
               <a:buChar char="•"/>
             </a:pPr>
             <a:r>
-              <a:rPr lang="en-US" dirty="0"/>
-              <a:t>Does it become slow when many apps are open? 🐢</a:t>
+              <a:rPr lang="en-IN" dirty="0"/>
+              <a:t>Wireframes</a:t>
             </a:r>
           </a:p>
           <a:p>
@@ -8905,63 +10343,86 @@
               <a:buChar char="•"/>
             </a:pPr>
             <a:r>
-              <a:rPr lang="en-US" dirty="0"/>
-              <a:t>Is your fingerprint data secure? 🔒</a:t>
-            </a:r>
-            <a:endParaRPr lang="en-IN" dirty="0"/>
-          </a:p>
-        </p:txBody>
-      </p:sp>
-      <p:sp>
-        <p:nvSpPr>
-          <p:cNvPr id="9" name="TextBox 8">
+              <a:rPr lang="en-IN" dirty="0"/>
+              <a:t>Mock-ups</a:t>
+            </a:r>
+          </a:p>
+          <a:p>
+            <a:pPr marL="342900" indent="-342900">
+              <a:buFont typeface="Arial" panose="020B0604020202020204" pitchFamily="34" charset="0"/>
+              <a:buChar char="•"/>
+            </a:pPr>
+            <a:r>
+              <a:rPr lang="en-IN" dirty="0"/>
+              <a:t>UML Diagrams</a:t>
+            </a:r>
+          </a:p>
+        </p:txBody>
+      </p:sp>
+      <p:pic>
+        <p:nvPicPr>
+          <p:cNvPr id="10" name="Picture 9">
             <a:extLst>
               <a:ext uri="{FF2B5EF4-FFF2-40B4-BE49-F238E27FC236}">
-                <a16:creationId xmlns:a16="http://schemas.microsoft.com/office/drawing/2014/main" id="{A9124B0B-0E75-2440-4CD1-D76B2FCFDE0F}"/>
+                <a16:creationId xmlns:a16="http://schemas.microsoft.com/office/drawing/2014/main" id="{B20D9E52-B5B5-0C85-E020-F6A76AC8ECE6}"/>
               </a:ext>
             </a:extLst>
           </p:cNvPr>
-          <p:cNvSpPr txBox="1"/>
+          <p:cNvPicPr>
+            <a:picLocks noChangeAspect="1"/>
+          </p:cNvPicPr>
           <p:nvPr/>
-        </p:nvSpPr>
-        <p:spPr>
-          <a:xfrm>
-            <a:off x="621804" y="4149080"/>
-            <a:ext cx="10585176" cy="1043619"/>
+        </p:nvPicPr>
+        <p:blipFill>
+          <a:blip r:embed="rId2"/>
+          <a:stretch>
+            <a:fillRect/>
+          </a:stretch>
+        </p:blipFill>
+        <p:spPr>
+          <a:xfrm>
+            <a:off x="1845940" y="3581421"/>
+            <a:ext cx="5910153" cy="2973604"/>
           </a:xfrm>
           <a:prstGeom prst="rect">
             <a:avLst/>
           </a:prstGeom>
-          <a:noFill/>
-        </p:spPr>
-        <p:txBody>
-          <a:bodyPr wrap="square" rtlCol="0">
-            <a:spAutoFit/>
-          </a:bodyPr>
-          <a:lstStyle>
-            <a:defPPr>
-              <a:defRPr lang="en-US"/>
-            </a:defPPr>
-            <a:lvl1pPr>
-              <a:lnSpc>
-                <a:spcPct val="150000"/>
-              </a:lnSpc>
-              <a:defRPr sz="2200"/>
-            </a:lvl1pPr>
-          </a:lstStyle>
-          <a:p>
-            <a:r>
-              <a:rPr lang="en-US" dirty="0"/>
-              <a:t>Similarly, software applications also undergo different kinds of testing before they are released.</a:t>
-            </a:r>
-            <a:endParaRPr lang="en-IN" dirty="0"/>
-          </a:p>
-        </p:txBody>
-      </p:sp>
+        </p:spPr>
+      </p:pic>
+      <p:pic>
+        <p:nvPicPr>
+          <p:cNvPr id="12" name="Picture 11">
+            <a:extLst>
+              <a:ext uri="{FF2B5EF4-FFF2-40B4-BE49-F238E27FC236}">
+                <a16:creationId xmlns:a16="http://schemas.microsoft.com/office/drawing/2014/main" id="{05BB6AAB-B37E-5D6F-42A3-2B27F67D77BA}"/>
+              </a:ext>
+            </a:extLst>
+          </p:cNvPr>
+          <p:cNvPicPr>
+            <a:picLocks noChangeAspect="1"/>
+          </p:cNvPicPr>
+          <p:nvPr/>
+        </p:nvPicPr>
+        <p:blipFill>
+          <a:blip r:embed="rId3"/>
+          <a:stretch>
+            <a:fillRect/>
+          </a:stretch>
+        </p:blipFill>
+        <p:spPr>
+          <a:xfrm>
+            <a:off x="7894612" y="1246448"/>
+            <a:ext cx="2948418" cy="4365104"/>
+          </a:xfrm>
+          <a:prstGeom prst="rect">
+            <a:avLst/>
+          </a:prstGeom>
+        </p:spPr>
+      </p:pic>
     </p:spTree>
     <p:extLst>
       <p:ext uri="{BB962C8B-B14F-4D97-AF65-F5344CB8AC3E}">
-        <p14:creationId xmlns:p14="http://schemas.microsoft.com/office/powerpoint/2010/main" val="2110656651"/>
+        <p14:creationId xmlns:p14="http://schemas.microsoft.com/office/powerpoint/2010/main" val="2558202106"/>
       </p:ext>
     </p:extLst>
   </p:cSld>
@@ -9005,7 +10466,7 @@
           <p:cNvPr id="4" name="TextBox 3">
             <a:extLst>
               <a:ext uri="{FF2B5EF4-FFF2-40B4-BE49-F238E27FC236}">
-                <a16:creationId xmlns:a16="http://schemas.microsoft.com/office/drawing/2014/main" id="{896B039C-C6EF-6589-CF80-6737C4F70D56}"/>
+                <a16:creationId xmlns:a16="http://schemas.microsoft.com/office/drawing/2014/main" id="{4C346F4C-1B55-7618-90C7-E5A291D1BF75}"/>
               </a:ext>
             </a:extLst>
           </p:cNvPr>
@@ -9014,8 +10475,57 @@
         </p:nvSpPr>
         <p:spPr>
           <a:xfrm>
-            <a:off x="981844" y="332656"/>
-            <a:ext cx="3926075" cy="443198"/>
+            <a:off x="1125860" y="260648"/>
+            <a:ext cx="4463081" cy="413959"/>
+          </a:xfrm>
+          <a:prstGeom prst="rect">
+            <a:avLst/>
+          </a:prstGeom>
+          <a:noFill/>
+        </p:spPr>
+        <p:txBody>
+          <a:bodyPr wrap="none" rtlCol="0">
+            <a:spAutoFit/>
+          </a:bodyPr>
+          <a:lstStyle>
+            <a:defPPr>
+              <a:defRPr lang="en-US"/>
+            </a:defPPr>
+            <a:lvl1pPr>
+              <a:lnSpc>
+                <a:spcPct val="95000"/>
+              </a:lnSpc>
+              <a:defRPr sz="2200" b="1">
+                <a:solidFill>
+                  <a:srgbClr val="FF0000"/>
+                </a:solidFill>
+              </a:defRPr>
+            </a:lvl1pPr>
+          </a:lstStyle>
+          <a:p>
+            <a:r>
+              <a:rPr lang="en-IN" dirty="0"/>
+              <a:t>Agile Requirements Generation</a:t>
+            </a:r>
+          </a:p>
+        </p:txBody>
+      </p:sp>
+      <p:sp>
+        <p:nvSpPr>
+          <p:cNvPr id="5" name="TextBox 4">
+            <a:extLst>
+              <a:ext uri="{FF2B5EF4-FFF2-40B4-BE49-F238E27FC236}">
+                <a16:creationId xmlns:a16="http://schemas.microsoft.com/office/drawing/2014/main" id="{25153137-F5E2-7250-FC26-B607B87BFA4C}"/>
+              </a:ext>
+            </a:extLst>
+          </p:cNvPr>
+          <p:cNvSpPr txBox="1"/>
+          <p:nvPr/>
+        </p:nvSpPr>
+        <p:spPr>
+          <a:xfrm>
+            <a:off x="1125860" y="764704"/>
+            <a:ext cx="9509334" cy="535788"/>
           </a:xfrm>
           <a:prstGeom prst="rect">
             <a:avLst/>
@@ -9032,29 +10542,26 @@
             </a:defPPr>
             <a:lvl1pPr>
               <a:lnSpc>
-                <a:spcPct val="95000"/>
-              </a:lnSpc>
-              <a:defRPr sz="2200" b="1">
-                <a:solidFill>
-                  <a:srgbClr val="FF0000"/>
-                </a:solidFill>
-              </a:defRPr>
+                <a:spcPct val="150000"/>
+              </a:lnSpc>
+              <a:defRPr sz="2200"/>
             </a:lvl1pPr>
           </a:lstStyle>
           <a:p>
             <a:r>
-              <a:rPr lang="en-IN" dirty="0"/>
-              <a:t>What is Software Testing?</a:t>
-            </a:r>
-          </a:p>
-        </p:txBody>
-      </p:sp>
-      <p:sp>
-        <p:nvSpPr>
-          <p:cNvPr id="5" name="TextBox 4">
+              <a:rPr lang="en-US" dirty="0"/>
+              <a:t>Requirement Generation means Creating requirements continuously</a:t>
+            </a:r>
+            <a:endParaRPr lang="en-IN" dirty="0"/>
+          </a:p>
+        </p:txBody>
+      </p:sp>
+      <p:sp>
+        <p:nvSpPr>
+          <p:cNvPr id="6" name="TextBox 5">
             <a:extLst>
               <a:ext uri="{FF2B5EF4-FFF2-40B4-BE49-F238E27FC236}">
-                <a16:creationId xmlns:a16="http://schemas.microsoft.com/office/drawing/2014/main" id="{5C09A29D-C167-769D-8555-B7060E1EC80B}"/>
+                <a16:creationId xmlns:a16="http://schemas.microsoft.com/office/drawing/2014/main" id="{647105DA-9597-03CC-875B-A2D4EB1AD867}"/>
               </a:ext>
             </a:extLst>
           </p:cNvPr>
@@ -9063,8 +10570,8 @@
         </p:nvSpPr>
         <p:spPr>
           <a:xfrm>
-            <a:off x="981844" y="836712"/>
-            <a:ext cx="10513168" cy="1144929"/>
+            <a:off x="1125860" y="1300492"/>
+            <a:ext cx="9649072" cy="3074944"/>
           </a:xfrm>
           <a:prstGeom prst="rect">
             <a:avLst/>
@@ -9089,104 +10596,213 @@
           <a:p>
             <a:r>
               <a:rPr lang="en-US" dirty="0"/>
-              <a:t>Software Testing is the process of checking whether a software application works correctly, meets user requirements, and is free from defects</a:t>
-            </a:r>
+              <a:t>Requirements keep evolving</a:t>
+            </a:r>
+          </a:p>
+          <a:p>
+            <a:r>
+              <a:rPr lang="en-US" dirty="0"/>
+              <a:t>Customer Feedback          New User Stories          Sprint Review      More Feedback          New Stories</a:t>
+            </a:r>
+          </a:p>
+          <a:p>
+            <a:endParaRPr lang="en-US" dirty="0"/>
+          </a:p>
+          <a:p>
+            <a:r>
+              <a:rPr lang="en-US" dirty="0"/>
+              <a:t>Cycle continues.</a:t>
+            </a:r>
+          </a:p>
+          <a:p>
             <a:endParaRPr lang="en-IN" dirty="0"/>
           </a:p>
         </p:txBody>
       </p:sp>
       <p:sp>
         <p:nvSpPr>
-          <p:cNvPr id="6" name="TextBox 5">
+          <p:cNvPr id="7" name="Arrow: Right 6">
             <a:extLst>
               <a:ext uri="{FF2B5EF4-FFF2-40B4-BE49-F238E27FC236}">
-                <a16:creationId xmlns:a16="http://schemas.microsoft.com/office/drawing/2014/main" id="{81002E4C-42D8-420B-928A-492898AA9ED2}"/>
+                <a16:creationId xmlns:a16="http://schemas.microsoft.com/office/drawing/2014/main" id="{72619B48-A44E-0F04-7DDC-1D4606D6A699}"/>
               </a:ext>
             </a:extLst>
           </p:cNvPr>
-          <p:cNvSpPr txBox="1"/>
+          <p:cNvSpPr/>
           <p:nvPr/>
         </p:nvSpPr>
         <p:spPr>
           <a:xfrm>
-            <a:off x="1125860" y="2204864"/>
-            <a:ext cx="5960286" cy="2289858"/>
-          </a:xfrm>
-          <a:prstGeom prst="rect">
-            <a:avLst/>
-          </a:prstGeom>
-          <a:noFill/>
-        </p:spPr>
-        <p:txBody>
-          <a:bodyPr wrap="square" rtlCol="0">
-            <a:spAutoFit/>
-          </a:bodyPr>
-          <a:lstStyle>
-            <a:defPPr>
-              <a:defRPr lang="en-US"/>
-            </a:defPPr>
-            <a:lvl1pPr>
-              <a:lnSpc>
-                <a:spcPct val="150000"/>
-              </a:lnSpc>
-              <a:defRPr sz="2200"/>
-            </a:lvl1pPr>
-          </a:lstStyle>
-          <a:p>
-            <a:r>
-              <a:rPr lang="en-US" dirty="0"/>
-              <a:t>Its goal is to ensure that the software is:</a:t>
-            </a:r>
-          </a:p>
-          <a:p>
-            <a:pPr marL="342900" indent="-342900">
-              <a:buFont typeface="Arial" panose="020B0604020202020204" pitchFamily="34" charset="0"/>
-              <a:buChar char="•"/>
-            </a:pPr>
-            <a:r>
-              <a:rPr lang="en-US" dirty="0"/>
-              <a:t>Correct ✅ </a:t>
-            </a:r>
-          </a:p>
-          <a:p>
-            <a:pPr marL="342900" indent="-342900">
-              <a:buFont typeface="Arial" panose="020B0604020202020204" pitchFamily="34" charset="0"/>
-              <a:buChar char="•"/>
-            </a:pPr>
-            <a:r>
-              <a:rPr lang="en-US" dirty="0"/>
-              <a:t>Fast ⚡ </a:t>
-            </a:r>
-          </a:p>
-          <a:p>
-            <a:pPr marL="342900" indent="-342900">
-              <a:buFont typeface="Arial" panose="020B0604020202020204" pitchFamily="34" charset="0"/>
-              <a:buChar char="•"/>
-            </a:pPr>
-            <a:r>
-              <a:rPr lang="en-US" dirty="0"/>
-              <a:t>Secure 🔒 </a:t>
-            </a:r>
-          </a:p>
-          <a:p>
-            <a:pPr marL="342900" indent="-342900">
-              <a:buFont typeface="Arial" panose="020B0604020202020204" pitchFamily="34" charset="0"/>
-              <a:buChar char="•"/>
-            </a:pPr>
-            <a:r>
-              <a:rPr lang="en-US" dirty="0"/>
-              <a:t>User-friendly 😊</a:t>
-            </a:r>
-          </a:p>
-          <a:p>
-            <a:endParaRPr lang="en-IN" dirty="0"/>
+            <a:off x="4078188" y="1988840"/>
+            <a:ext cx="576064" cy="216024"/>
+          </a:xfrm>
+          <a:prstGeom prst="rightArrow">
+            <a:avLst/>
+          </a:prstGeom>
+          <a:ln/>
+        </p:spPr>
+        <p:style>
+          <a:lnRef idx="3">
+            <a:schemeClr val="lt1"/>
+          </a:lnRef>
+          <a:fillRef idx="1">
+            <a:schemeClr val="accent4"/>
+          </a:fillRef>
+          <a:effectRef idx="1">
+            <a:schemeClr val="accent4"/>
+          </a:effectRef>
+          <a:fontRef idx="minor">
+            <a:schemeClr val="lt1"/>
+          </a:fontRef>
+        </p:style>
+        <p:txBody>
+          <a:bodyPr rtlCol="0" anchor="ctr"/>
+          <a:lstStyle/>
+          <a:p>
+            <a:pPr algn="ctr"/>
+            <a:endParaRPr lang="en-IN"/>
+          </a:p>
+        </p:txBody>
+      </p:sp>
+      <p:sp>
+        <p:nvSpPr>
+          <p:cNvPr id="8" name="Arrow: Right 7">
+            <a:extLst>
+              <a:ext uri="{FF2B5EF4-FFF2-40B4-BE49-F238E27FC236}">
+                <a16:creationId xmlns:a16="http://schemas.microsoft.com/office/drawing/2014/main" id="{5BD500DB-CA29-276F-389C-39B53ECC9E13}"/>
+              </a:ext>
+            </a:extLst>
+          </p:cNvPr>
+          <p:cNvSpPr/>
+          <p:nvPr/>
+        </p:nvSpPr>
+        <p:spPr>
+          <a:xfrm>
+            <a:off x="7030516" y="1989043"/>
+            <a:ext cx="576064" cy="216024"/>
+          </a:xfrm>
+          <a:prstGeom prst="rightArrow">
+            <a:avLst/>
+          </a:prstGeom>
+          <a:ln/>
+        </p:spPr>
+        <p:style>
+          <a:lnRef idx="3">
+            <a:schemeClr val="lt1"/>
+          </a:lnRef>
+          <a:fillRef idx="1">
+            <a:schemeClr val="accent4"/>
+          </a:fillRef>
+          <a:effectRef idx="1">
+            <a:schemeClr val="accent4"/>
+          </a:effectRef>
+          <a:fontRef idx="minor">
+            <a:schemeClr val="lt1"/>
+          </a:fontRef>
+        </p:style>
+        <p:txBody>
+          <a:bodyPr rtlCol="0" anchor="ctr"/>
+          <a:lstStyle/>
+          <a:p>
+            <a:pPr algn="ctr"/>
+            <a:endParaRPr lang="en-IN"/>
+          </a:p>
+        </p:txBody>
+      </p:sp>
+      <p:sp>
+        <p:nvSpPr>
+          <p:cNvPr id="9" name="Arrow: Right 8">
+            <a:extLst>
+              <a:ext uri="{FF2B5EF4-FFF2-40B4-BE49-F238E27FC236}">
+                <a16:creationId xmlns:a16="http://schemas.microsoft.com/office/drawing/2014/main" id="{02442A5A-B27F-F18E-30EB-9B90D3A10C58}"/>
+              </a:ext>
+            </a:extLst>
+          </p:cNvPr>
+          <p:cNvSpPr/>
+          <p:nvPr/>
+        </p:nvSpPr>
+        <p:spPr>
+          <a:xfrm>
+            <a:off x="9622804" y="1991148"/>
+            <a:ext cx="576064" cy="216024"/>
+          </a:xfrm>
+          <a:prstGeom prst="rightArrow">
+            <a:avLst/>
+          </a:prstGeom>
+          <a:ln/>
+        </p:spPr>
+        <p:style>
+          <a:lnRef idx="3">
+            <a:schemeClr val="lt1"/>
+          </a:lnRef>
+          <a:fillRef idx="1">
+            <a:schemeClr val="accent4"/>
+          </a:fillRef>
+          <a:effectRef idx="1">
+            <a:schemeClr val="accent4"/>
+          </a:effectRef>
+          <a:fontRef idx="minor">
+            <a:schemeClr val="lt1"/>
+          </a:fontRef>
+        </p:style>
+        <p:txBody>
+          <a:bodyPr rtlCol="0" anchor="ctr"/>
+          <a:lstStyle/>
+          <a:p>
+            <a:pPr algn="ctr"/>
+            <a:endParaRPr lang="en-IN"/>
+          </a:p>
+        </p:txBody>
+      </p:sp>
+      <p:sp>
+        <p:nvSpPr>
+          <p:cNvPr id="10" name="Arrow: Right 9">
+            <a:extLst>
+              <a:ext uri="{FF2B5EF4-FFF2-40B4-BE49-F238E27FC236}">
+                <a16:creationId xmlns:a16="http://schemas.microsoft.com/office/drawing/2014/main" id="{23F84737-F366-F520-6CC1-4D0E61727B4D}"/>
+              </a:ext>
+            </a:extLst>
+          </p:cNvPr>
+          <p:cNvSpPr/>
+          <p:nvPr/>
+        </p:nvSpPr>
+        <p:spPr>
+          <a:xfrm>
+            <a:off x="3502124" y="2524628"/>
+            <a:ext cx="576064" cy="216024"/>
+          </a:xfrm>
+          <a:prstGeom prst="rightArrow">
+            <a:avLst/>
+          </a:prstGeom>
+          <a:ln/>
+        </p:spPr>
+        <p:style>
+          <a:lnRef idx="3">
+            <a:schemeClr val="lt1"/>
+          </a:lnRef>
+          <a:fillRef idx="1">
+            <a:schemeClr val="accent4"/>
+          </a:fillRef>
+          <a:effectRef idx="1">
+            <a:schemeClr val="accent4"/>
+          </a:effectRef>
+          <a:fontRef idx="minor">
+            <a:schemeClr val="lt1"/>
+          </a:fontRef>
+        </p:style>
+        <p:txBody>
+          <a:bodyPr rtlCol="0" anchor="ctr"/>
+          <a:lstStyle/>
+          <a:p>
+            <a:pPr algn="ctr"/>
+            <a:endParaRPr lang="en-IN"/>
           </a:p>
         </p:txBody>
       </p:sp>
     </p:spTree>
     <p:extLst>
       <p:ext uri="{BB962C8B-B14F-4D97-AF65-F5344CB8AC3E}">
-        <p14:creationId xmlns:p14="http://schemas.microsoft.com/office/powerpoint/2010/main" val="2539598359"/>
+        <p14:creationId xmlns:p14="http://schemas.microsoft.com/office/powerpoint/2010/main" val="999984503"/>
       </p:ext>
     </p:extLst>
   </p:cSld>
@@ -9230,7 +10846,7 @@
           <p:cNvPr id="4" name="TextBox 3">
             <a:extLst>
               <a:ext uri="{FF2B5EF4-FFF2-40B4-BE49-F238E27FC236}">
-                <a16:creationId xmlns:a16="http://schemas.microsoft.com/office/drawing/2014/main" id="{D14BBB98-1725-2A36-BCAC-CAEC1CEB566B}"/>
+                <a16:creationId xmlns:a16="http://schemas.microsoft.com/office/drawing/2014/main" id="{204DCDC5-AA77-9F51-39A8-2B1568277D07}"/>
               </a:ext>
             </a:extLst>
           </p:cNvPr>
@@ -9238,9 +10854,9 @@
           <p:nvPr/>
         </p:nvSpPr>
         <p:spPr>
-          <a:xfrm>
-            <a:off x="1053852" y="332656"/>
-            <a:ext cx="3499676" cy="443198"/>
+          <a:xfrm flipH="1">
+            <a:off x="955554" y="332656"/>
+            <a:ext cx="8307209" cy="413959"/>
           </a:xfrm>
           <a:prstGeom prst="rect">
             <a:avLst/>
@@ -9269,7 +10885,7 @@
           <a:p>
             <a:r>
               <a:rPr lang="en-IN" dirty="0"/>
-              <a:t>1. Functionality Testing</a:t>
+              <a:t>Quality Assurance (QA) in Agile</a:t>
             </a:r>
           </a:p>
         </p:txBody>
@@ -9279,7 +10895,7 @@
           <p:cNvPr id="5" name="TextBox 4">
             <a:extLst>
               <a:ext uri="{FF2B5EF4-FFF2-40B4-BE49-F238E27FC236}">
-                <a16:creationId xmlns:a16="http://schemas.microsoft.com/office/drawing/2014/main" id="{2D5B81A4-D5BD-54E4-3D1B-E4CD8897E35B}"/>
+                <a16:creationId xmlns:a16="http://schemas.microsoft.com/office/drawing/2014/main" id="{88778EDB-E420-AB17-277A-58F907BA1179}"/>
               </a:ext>
             </a:extLst>
           </p:cNvPr>
@@ -9288,8 +10904,8 @@
         </p:nvSpPr>
         <p:spPr>
           <a:xfrm>
-            <a:off x="1053852" y="836712"/>
-            <a:ext cx="8983550" cy="535788"/>
+            <a:off x="955554" y="908720"/>
+            <a:ext cx="10369152" cy="2059282"/>
           </a:xfrm>
           <a:prstGeom prst="rect">
             <a:avLst/>
@@ -9314,8 +10930,13 @@
           <a:p>
             <a:r>
               <a:rPr lang="en-US" dirty="0"/>
-              <a:t>It verifies that every feature works according to the requirements</a:t>
-            </a:r>
+              <a:t>In Traditional Models, Development happens first, Testing happens later. Problem: If bugs are found late, Fixing becomes expensive</a:t>
+            </a:r>
+          </a:p>
+          <a:p>
+            <a:endParaRPr lang="en-US" dirty="0"/>
+          </a:p>
+          <a:p>
             <a:endParaRPr lang="en-IN" dirty="0"/>
           </a:p>
         </p:txBody>
@@ -9325,7 +10946,7 @@
           <p:cNvPr id="6" name="TextBox 5">
             <a:extLst>
               <a:ext uri="{FF2B5EF4-FFF2-40B4-BE49-F238E27FC236}">
-                <a16:creationId xmlns:a16="http://schemas.microsoft.com/office/drawing/2014/main" id="{1CF27282-939B-4BCA-3630-342421E63B16}"/>
+                <a16:creationId xmlns:a16="http://schemas.microsoft.com/office/drawing/2014/main" id="{1391785B-21E0-CFC8-EA7C-B3AB1EBF21F8}"/>
               </a:ext>
             </a:extLst>
           </p:cNvPr>
@@ -9334,8 +10955,8 @@
         </p:nvSpPr>
         <p:spPr>
           <a:xfrm>
-            <a:off x="837828" y="1462597"/>
-            <a:ext cx="5166799" cy="3074944"/>
+            <a:off x="955554" y="2086488"/>
+            <a:ext cx="11449272" cy="1551450"/>
           </a:xfrm>
           <a:prstGeom prst="rect">
             <a:avLst/>
@@ -9359,45 +10980,14 @@
           </a:lstStyle>
           <a:p>
             <a:r>
-              <a:rPr lang="en-US" dirty="0"/>
-              <a:t>Imagine buying a washing machine.</a:t>
-            </a:r>
-          </a:p>
-          <a:p>
-            <a:r>
-              <a:rPr lang="en-US" dirty="0"/>
-              <a:t>You check:</a:t>
-            </a:r>
-          </a:p>
-          <a:p>
-            <a:pPr marL="342900" indent="-342900">
-              <a:buFont typeface="Arial" panose="020B0604020202020204" pitchFamily="34" charset="0"/>
-              <a:buChar char="•"/>
-            </a:pPr>
-            <a:r>
-              <a:rPr lang="en-US" dirty="0"/>
-              <a:t>Does it wash clothes? </a:t>
-            </a:r>
-          </a:p>
-          <a:p>
-            <a:pPr marL="342900" indent="-342900">
-              <a:buFont typeface="Arial" panose="020B0604020202020204" pitchFamily="34" charset="0"/>
-              <a:buChar char="•"/>
-            </a:pPr>
-            <a:r>
-              <a:rPr lang="en-US" dirty="0"/>
-              <a:t>Does the spin mode work? </a:t>
-            </a:r>
-          </a:p>
-          <a:p>
-            <a:pPr marL="342900" indent="-342900">
-              <a:buFont typeface="Arial" panose="020B0604020202020204" pitchFamily="34" charset="0"/>
-              <a:buChar char="•"/>
-            </a:pPr>
-            <a:r>
-              <a:rPr lang="en-US" dirty="0"/>
-              <a:t>Does the timer function correctly?</a:t>
-            </a:r>
+              <a:rPr lang="en-IN" dirty="0"/>
+              <a:t>In Agile Model, Testing happens throughout development. </a:t>
+            </a:r>
+            <a:r>
+              <a:rPr lang="en-US" dirty="0"/>
+              <a:t>Quality is built into every Sprint</a:t>
+            </a:r>
+            <a:endParaRPr lang="en-IN" dirty="0"/>
           </a:p>
           <a:p>
             <a:endParaRPr lang="en-IN" dirty="0"/>
@@ -9409,7 +10999,7 @@
           <p:cNvPr id="7" name="TextBox 6">
             <a:extLst>
               <a:ext uri="{FF2B5EF4-FFF2-40B4-BE49-F238E27FC236}">
-                <a16:creationId xmlns:a16="http://schemas.microsoft.com/office/drawing/2014/main" id="{BE891805-783C-6E8E-288A-D176050329CE}"/>
+                <a16:creationId xmlns:a16="http://schemas.microsoft.com/office/drawing/2014/main" id="{AE3C203C-1315-61CB-6380-959F18EE5E7A}"/>
               </a:ext>
             </a:extLst>
           </p:cNvPr>
@@ -9418,8 +11008,8 @@
         </p:nvSpPr>
         <p:spPr>
           <a:xfrm>
-            <a:off x="837828" y="4359840"/>
-            <a:ext cx="4394152" cy="535596"/>
+            <a:off x="955554" y="3211250"/>
+            <a:ext cx="4713150" cy="535788"/>
           </a:xfrm>
           <a:prstGeom prst="rect">
             <a:avLst/>
@@ -9443,18 +11033,9 @@
           </a:lstStyle>
           <a:p>
             <a:r>
-              <a:rPr lang="en-US" dirty="0"/>
-              <a:t>You are testing its </a:t>
-            </a:r>
-            <a:r>
-              <a:rPr lang="en-US" b="1" dirty="0"/>
-              <a:t>functionality</a:t>
-            </a:r>
-            <a:r>
-              <a:rPr lang="en-US" dirty="0"/>
-              <a:t>.</a:t>
-            </a:r>
-            <a:endParaRPr lang="en-IN" dirty="0"/>
+              <a:rPr lang="en-IN" dirty="0"/>
+              <a:t>Quality is everyone's responsibility</a:t>
+            </a:r>
           </a:p>
         </p:txBody>
       </p:sp>
@@ -9463,7 +11044,7 @@
           <p:cNvPr id="8" name="TextBox 7">
             <a:extLst>
               <a:ext uri="{FF2B5EF4-FFF2-40B4-BE49-F238E27FC236}">
-                <a16:creationId xmlns:a16="http://schemas.microsoft.com/office/drawing/2014/main" id="{07AE39AA-8996-BD00-C66E-89D6AF2999B1}"/>
+                <a16:creationId xmlns:a16="http://schemas.microsoft.com/office/drawing/2014/main" id="{7EFE7151-BE60-93F1-829C-75F939A399CB}"/>
               </a:ext>
             </a:extLst>
           </p:cNvPr>
@@ -9472,8 +11053,8 @@
         </p:nvSpPr>
         <p:spPr>
           <a:xfrm>
-            <a:off x="6454452" y="1462597"/>
-            <a:ext cx="5424883" cy="4598438"/>
+            <a:off x="6886500" y="2767393"/>
+            <a:ext cx="3055645" cy="3582776"/>
           </a:xfrm>
           <a:prstGeom prst="rect">
             <a:avLst/>
@@ -9498,98 +11079,56 @@
           <a:p>
             <a:r>
               <a:rPr lang="en-US" dirty="0"/>
-              <a:t>Consider an Online Shopping Website.</a:t>
-            </a:r>
-          </a:p>
-          <a:p>
-            <a:r>
-              <a:rPr lang="en-US" dirty="0"/>
-              <a:t>Things to test:</a:t>
-            </a:r>
-          </a:p>
-          <a:p>
-            <a:r>
-              <a:rPr lang="en-US" dirty="0"/>
-              <a:t>✅ Login works</a:t>
-            </a:r>
-          </a:p>
-          <a:p>
-            <a:r>
-              <a:rPr lang="en-US" dirty="0"/>
-              <a:t>✅ Search products</a:t>
-            </a:r>
-          </a:p>
-          <a:p>
-            <a:r>
-              <a:rPr lang="en-US" dirty="0"/>
-              <a:t>✅ Add to Cart</a:t>
-            </a:r>
-          </a:p>
-          <a:p>
-            <a:r>
-              <a:rPr lang="en-US" dirty="0"/>
-              <a:t>✅ Remove from Cart</a:t>
-            </a:r>
-          </a:p>
-          <a:p>
-            <a:r>
-              <a:rPr lang="en-US" dirty="0"/>
-              <a:t>✅ Place Order</a:t>
-            </a:r>
-          </a:p>
-          <a:p>
-            <a:r>
-              <a:rPr lang="en-US" dirty="0"/>
-              <a:t>✅ Payment succeeds</a:t>
-            </a:r>
-          </a:p>
-          <a:p>
-            <a:endParaRPr lang="en-IN" dirty="0"/>
-          </a:p>
-        </p:txBody>
-      </p:sp>
-      <p:sp>
-        <p:nvSpPr>
-          <p:cNvPr id="9" name="TextBox 8">
-            <a:extLst>
-              <a:ext uri="{FF2B5EF4-FFF2-40B4-BE49-F238E27FC236}">
-                <a16:creationId xmlns:a16="http://schemas.microsoft.com/office/drawing/2014/main" id="{D5BE90F3-FF15-BDAD-74DE-2F9AB544F183}"/>
-              </a:ext>
-            </a:extLst>
-          </p:cNvPr>
-          <p:cNvSpPr txBox="1"/>
-          <p:nvPr/>
-        </p:nvSpPr>
-        <p:spPr>
-          <a:xfrm>
-            <a:off x="5850439" y="5629322"/>
-            <a:ext cx="6335040" cy="1043619"/>
-          </a:xfrm>
-          <a:prstGeom prst="rect">
-            <a:avLst/>
-          </a:prstGeom>
-          <a:noFill/>
-        </p:spPr>
-        <p:txBody>
-          <a:bodyPr wrap="square" rtlCol="0">
-            <a:spAutoFit/>
-          </a:bodyPr>
-          <a:lstStyle>
-            <a:defPPr>
-              <a:defRPr lang="en-US"/>
-            </a:defPPr>
-            <a:lvl1pPr>
-              <a:lnSpc>
-                <a:spcPct val="150000"/>
-              </a:lnSpc>
-              <a:defRPr sz="2200"/>
-            </a:lvl1pPr>
-          </a:lstStyle>
-          <a:p>
-            <a:r>
-              <a:rPr lang="en-US" dirty="0"/>
-              <a:t>If all these features work correctly, the functionality is correct.</a:t>
-            </a:r>
+              <a:t>Not only testers, but</a:t>
+            </a:r>
+          </a:p>
+          <a:p>
+            <a:pPr marL="342900" indent="-342900">
+              <a:buFont typeface="Arial" panose="020B0604020202020204" pitchFamily="34" charset="0"/>
+              <a:buChar char="•"/>
+            </a:pPr>
+            <a:r>
+              <a:rPr lang="en-US" dirty="0"/>
+              <a:t>Developers </a:t>
+            </a:r>
+          </a:p>
+          <a:p>
+            <a:pPr marL="342900" indent="-342900">
+              <a:buFont typeface="Arial" panose="020B0604020202020204" pitchFamily="34" charset="0"/>
+              <a:buChar char="•"/>
+            </a:pPr>
+            <a:r>
+              <a:rPr lang="en-US" dirty="0"/>
+              <a:t>Testers </a:t>
+            </a:r>
+          </a:p>
+          <a:p>
+            <a:pPr marL="342900" indent="-342900">
+              <a:buFont typeface="Arial" panose="020B0604020202020204" pitchFamily="34" charset="0"/>
+              <a:buChar char="•"/>
+            </a:pPr>
+            <a:r>
+              <a:rPr lang="en-US" dirty="0"/>
+              <a:t>Scrum Master </a:t>
+            </a:r>
+          </a:p>
+          <a:p>
+            <a:pPr marL="342900" indent="-342900">
+              <a:buFont typeface="Arial" panose="020B0604020202020204" pitchFamily="34" charset="0"/>
+              <a:buChar char="•"/>
+            </a:pPr>
+            <a:r>
+              <a:rPr lang="en-US" dirty="0"/>
+              <a:t>Product Owner </a:t>
+            </a:r>
+          </a:p>
+          <a:p>
+            <a:r>
+              <a:rPr lang="en-US" dirty="0"/>
+              <a:t>Everyone contributes</a:t>
+            </a:r>
+          </a:p>
+          <a:p>
             <a:endParaRPr lang="en-IN" dirty="0"/>
           </a:p>
         </p:txBody>
@@ -9597,7 +11136,7 @@
     </p:spTree>
     <p:extLst>
       <p:ext uri="{BB962C8B-B14F-4D97-AF65-F5344CB8AC3E}">
-        <p14:creationId xmlns:p14="http://schemas.microsoft.com/office/powerpoint/2010/main" val="3092331678"/>
+        <p14:creationId xmlns:p14="http://schemas.microsoft.com/office/powerpoint/2010/main" val="3255476496"/>
       </p:ext>
     </p:extLst>
   </p:cSld>
@@ -9641,7 +11180,7 @@
           <p:cNvPr id="4" name="TextBox 3">
             <a:extLst>
               <a:ext uri="{FF2B5EF4-FFF2-40B4-BE49-F238E27FC236}">
-                <a16:creationId xmlns:a16="http://schemas.microsoft.com/office/drawing/2014/main" id="{D1298DEE-D799-A2EB-489F-890057344FB5}"/>
+                <a16:creationId xmlns:a16="http://schemas.microsoft.com/office/drawing/2014/main" id="{6A282C12-6D18-A57C-69FA-56E9474EA072}"/>
               </a:ext>
             </a:extLst>
           </p:cNvPr>
@@ -9650,8 +11189,8 @@
         </p:nvSpPr>
         <p:spPr>
           <a:xfrm>
-            <a:off x="909836" y="332656"/>
-            <a:ext cx="5360763" cy="443198"/>
+            <a:off x="909836" y="188640"/>
+            <a:ext cx="3536546" cy="443198"/>
           </a:xfrm>
           <a:prstGeom prst="rect">
             <a:avLst/>
@@ -9680,7 +11219,7 @@
           <a:p>
             <a:r>
               <a:rPr lang="en-IN" dirty="0"/>
-              <a:t>2. UI Testing (User Interface Testing)</a:t>
+              <a:t>Agile Quality Practices</a:t>
             </a:r>
           </a:p>
         </p:txBody>
@@ -9690,7 +11229,7 @@
           <p:cNvPr id="5" name="TextBox 4">
             <a:extLst>
               <a:ext uri="{FF2B5EF4-FFF2-40B4-BE49-F238E27FC236}">
-                <a16:creationId xmlns:a16="http://schemas.microsoft.com/office/drawing/2014/main" id="{98207364-BF49-42AF-BB54-29E71B57846D}"/>
+                <a16:creationId xmlns:a16="http://schemas.microsoft.com/office/drawing/2014/main" id="{4A629AB1-CAA8-F19D-3F1B-D335985FC078}"/>
               </a:ext>
             </a:extLst>
           </p:cNvPr>
@@ -9699,8 +11238,8 @@
         </p:nvSpPr>
         <p:spPr>
           <a:xfrm>
-            <a:off x="981844" y="908720"/>
-            <a:ext cx="9243236" cy="443198"/>
+            <a:off x="909836" y="836712"/>
+            <a:ext cx="3047629" cy="413959"/>
           </a:xfrm>
           <a:prstGeom prst="rect">
             <a:avLst/>
@@ -9717,17 +11256,20 @@
             </a:defPPr>
             <a:lvl1pPr>
               <a:lnSpc>
-                <a:spcPct val="150000"/>
-              </a:lnSpc>
-              <a:defRPr sz="2200"/>
+                <a:spcPct val="95000"/>
+              </a:lnSpc>
+              <a:defRPr sz="2200" b="1">
+                <a:solidFill>
+                  <a:srgbClr val="FF0000"/>
+                </a:solidFill>
+              </a:defRPr>
             </a:lvl1pPr>
           </a:lstStyle>
           <a:p>
             <a:r>
-              <a:rPr lang="en-US" dirty="0"/>
-              <a:t>It checks the appearance and interaction of the application</a:t>
-            </a:r>
-            <a:endParaRPr lang="en-IN" dirty="0"/>
+              <a:rPr lang="en-IN" dirty="0"/>
+              <a:t>1. Continuous Testing</a:t>
+            </a:r>
           </a:p>
         </p:txBody>
       </p:sp>
@@ -9736,7 +11278,7 @@
           <p:cNvPr id="6" name="TextBox 5">
             <a:extLst>
               <a:ext uri="{FF2B5EF4-FFF2-40B4-BE49-F238E27FC236}">
-                <a16:creationId xmlns:a16="http://schemas.microsoft.com/office/drawing/2014/main" id="{B2D84DC3-C453-533D-C55A-0A48B2676AD1}"/>
+                <a16:creationId xmlns:a16="http://schemas.microsoft.com/office/drawing/2014/main" id="{B8474CF4-FBFC-6AF1-BC74-10EC2D95EE95}"/>
               </a:ext>
             </a:extLst>
           </p:cNvPr>
@@ -9745,8 +11287,8 @@
         </p:nvSpPr>
         <p:spPr>
           <a:xfrm>
-            <a:off x="974010" y="1444508"/>
-            <a:ext cx="6479659" cy="535788"/>
+            <a:off x="837828" y="1250671"/>
+            <a:ext cx="6552728" cy="2059282"/>
           </a:xfrm>
           <a:prstGeom prst="rect">
             <a:avLst/>
@@ -9771,8 +11313,10 @@
           <a:p>
             <a:r>
               <a:rPr lang="en-US" dirty="0"/>
-              <a:t>Suppose two restaurants serve the same food.</a:t>
-            </a:r>
+              <a:t>Testing begins immediately. Instead of waiting till the end, Every feature is tested during development.</a:t>
+            </a:r>
+          </a:p>
+          <a:p>
             <a:endParaRPr lang="en-IN" dirty="0"/>
           </a:p>
         </p:txBody>
@@ -9782,7 +11326,7 @@
           <p:cNvPr id="7" name="TextBox 6">
             <a:extLst>
               <a:ext uri="{FF2B5EF4-FFF2-40B4-BE49-F238E27FC236}">
-                <a16:creationId xmlns:a16="http://schemas.microsoft.com/office/drawing/2014/main" id="{4CB76303-5F05-FEC5-DFA4-C247E1E6E226}"/>
+                <a16:creationId xmlns:a16="http://schemas.microsoft.com/office/drawing/2014/main" id="{809393DB-18D7-F7DC-88D9-220BF9F5B5EB}"/>
               </a:ext>
             </a:extLst>
           </p:cNvPr>
@@ -9791,8 +11335,8 @@
         </p:nvSpPr>
         <p:spPr>
           <a:xfrm>
-            <a:off x="837828" y="2129431"/>
-            <a:ext cx="3240360" cy="2567113"/>
+            <a:off x="7843009" y="1043691"/>
+            <a:ext cx="3260829" cy="2800767"/>
           </a:xfrm>
           <a:prstGeom prst="rect">
             <a:avLst/>
@@ -9815,42 +11359,88 @@
             </a:lvl1pPr>
           </a:lstStyle>
           <a:p>
-            <a:r>
-              <a:rPr lang="en-US" dirty="0"/>
-              <a:t>Restaurant A</a:t>
-            </a:r>
-          </a:p>
-          <a:p>
-            <a:pPr marL="342900" indent="-342900">
-              <a:buFont typeface="Arial" panose="020B0604020202020204" pitchFamily="34" charset="0"/>
-              <a:buChar char="•"/>
+            <a:pPr>
+              <a:lnSpc>
+                <a:spcPct val="100000"/>
+              </a:lnSpc>
             </a:pPr>
             <a:r>
               <a:rPr lang="en-US" dirty="0"/>
-              <a:t>Clean tables </a:t>
-            </a:r>
-          </a:p>
-          <a:p>
-            <a:pPr marL="342900" indent="-342900">
-              <a:buFont typeface="Arial" panose="020B0604020202020204" pitchFamily="34" charset="0"/>
-              <a:buChar char="•"/>
+              <a:t>Write Login Page</a:t>
+            </a:r>
+          </a:p>
+          <a:p>
+            <a:pPr>
+              <a:lnSpc>
+                <a:spcPct val="100000"/>
+              </a:lnSpc>
             </a:pPr>
             <a:r>
               <a:rPr lang="en-US" dirty="0"/>
-              <a:t>Nice lighting </a:t>
-            </a:r>
-          </a:p>
-          <a:p>
-            <a:pPr marL="342900" indent="-342900">
-              <a:buFont typeface="Arial" panose="020B0604020202020204" pitchFamily="34" charset="0"/>
-              <a:buChar char="•"/>
+              <a:t>↓</a:t>
+            </a:r>
+          </a:p>
+          <a:p>
+            <a:pPr>
+              <a:lnSpc>
+                <a:spcPct val="100000"/>
+              </a:lnSpc>
             </a:pPr>
             <a:r>
               <a:rPr lang="en-US" dirty="0"/>
-              <a:t>Comfortable chairs</a:t>
-            </a:r>
-          </a:p>
-          <a:p>
+              <a:t>Immediately test Login</a:t>
+            </a:r>
+          </a:p>
+          <a:p>
+            <a:pPr>
+              <a:lnSpc>
+                <a:spcPct val="100000"/>
+              </a:lnSpc>
+            </a:pPr>
+            <a:r>
+              <a:rPr lang="en-US" dirty="0"/>
+              <a:t>↓</a:t>
+            </a:r>
+          </a:p>
+          <a:p>
+            <a:pPr>
+              <a:lnSpc>
+                <a:spcPct val="100000"/>
+              </a:lnSpc>
+            </a:pPr>
+            <a:r>
+              <a:rPr lang="en-US" dirty="0"/>
+              <a:t>Fix bugs</a:t>
+            </a:r>
+          </a:p>
+          <a:p>
+            <a:pPr>
+              <a:lnSpc>
+                <a:spcPct val="100000"/>
+              </a:lnSpc>
+            </a:pPr>
+            <a:r>
+              <a:rPr lang="en-US" dirty="0"/>
+              <a:t>↓</a:t>
+            </a:r>
+          </a:p>
+          <a:p>
+            <a:pPr>
+              <a:lnSpc>
+                <a:spcPct val="100000"/>
+              </a:lnSpc>
+            </a:pPr>
+            <a:r>
+              <a:rPr lang="en-US" dirty="0"/>
+              <a:t>Move to next feature</a:t>
+            </a:r>
+          </a:p>
+          <a:p>
+            <a:pPr>
+              <a:lnSpc>
+                <a:spcPct val="100000"/>
+              </a:lnSpc>
+            </a:pPr>
             <a:endParaRPr lang="en-IN" dirty="0"/>
           </a:p>
         </p:txBody>
@@ -9860,7 +11450,7 @@
           <p:cNvPr id="8" name="TextBox 7">
             <a:extLst>
               <a:ext uri="{FF2B5EF4-FFF2-40B4-BE49-F238E27FC236}">
-                <a16:creationId xmlns:a16="http://schemas.microsoft.com/office/drawing/2014/main" id="{B56FCA97-4DAE-10AC-8371-1634402F52F5}"/>
+                <a16:creationId xmlns:a16="http://schemas.microsoft.com/office/drawing/2014/main" id="{D66CD4BE-8026-FDD9-BD18-923FC568E4F8}"/>
               </a:ext>
             </a:extLst>
           </p:cNvPr>
@@ -9869,8 +11459,8 @@
         </p:nvSpPr>
         <p:spPr>
           <a:xfrm>
-            <a:off x="4294212" y="2129431"/>
-            <a:ext cx="2808312" cy="2567113"/>
+            <a:off x="1053852" y="3749263"/>
+            <a:ext cx="2940228" cy="443198"/>
           </a:xfrm>
           <a:prstGeom prst="rect">
             <a:avLst/>
@@ -9887,49 +11477,20 @@
             </a:defPPr>
             <a:lvl1pPr>
               <a:lnSpc>
-                <a:spcPct val="150000"/>
-              </a:lnSpc>
-              <a:defRPr sz="2200"/>
+                <a:spcPct val="95000"/>
+              </a:lnSpc>
+              <a:defRPr sz="2200" b="1">
+                <a:solidFill>
+                  <a:srgbClr val="FF0000"/>
+                </a:solidFill>
+              </a:defRPr>
             </a:lvl1pPr>
           </a:lstStyle>
           <a:p>
             <a:r>
-              <a:rPr lang="en-US" dirty="0"/>
-              <a:t>Restaurant B</a:t>
-            </a:r>
-          </a:p>
-          <a:p>
-            <a:pPr marL="342900" indent="-342900">
-              <a:buFont typeface="Arial" panose="020B0604020202020204" pitchFamily="34" charset="0"/>
-              <a:buChar char="•"/>
-            </a:pPr>
-            <a:r>
-              <a:rPr lang="en-US" dirty="0"/>
-              <a:t>Dirty tables </a:t>
-            </a:r>
-          </a:p>
-          <a:p>
-            <a:pPr marL="342900" indent="-342900">
-              <a:buFont typeface="Arial" panose="020B0604020202020204" pitchFamily="34" charset="0"/>
-              <a:buChar char="•"/>
-            </a:pPr>
-            <a:r>
-              <a:rPr lang="en-US" dirty="0"/>
-              <a:t>Broken chairs </a:t>
-            </a:r>
-          </a:p>
-          <a:p>
-            <a:pPr marL="342900" indent="-342900">
-              <a:buFont typeface="Arial" panose="020B0604020202020204" pitchFamily="34" charset="0"/>
-              <a:buChar char="•"/>
-            </a:pPr>
-            <a:r>
-              <a:rPr lang="en-US" dirty="0"/>
-              <a:t>Poor lighting</a:t>
-            </a:r>
-          </a:p>
-          <a:p>
-            <a:endParaRPr lang="en-IN" dirty="0"/>
+              <a:rPr lang="en-IN" dirty="0"/>
+              <a:t>2. Test Automation</a:t>
+            </a:r>
           </a:p>
         </p:txBody>
       </p:sp>
@@ -9938,7 +11499,7 @@
           <p:cNvPr id="9" name="TextBox 8">
             <a:extLst>
               <a:ext uri="{FF2B5EF4-FFF2-40B4-BE49-F238E27FC236}">
-                <a16:creationId xmlns:a16="http://schemas.microsoft.com/office/drawing/2014/main" id="{792A1BE3-2A88-A080-4CB4-6EF3DE5A07F9}"/>
+                <a16:creationId xmlns:a16="http://schemas.microsoft.com/office/drawing/2014/main" id="{1E91EA0C-95DA-6856-2E4A-A1A6824F39D9}"/>
               </a:ext>
             </a:extLst>
           </p:cNvPr>
@@ -9947,8 +11508,8 @@
         </p:nvSpPr>
         <p:spPr>
           <a:xfrm>
-            <a:off x="1557908" y="4281502"/>
-            <a:ext cx="4219425" cy="535788"/>
+            <a:off x="1053852" y="4258417"/>
+            <a:ext cx="10441160" cy="1551450"/>
           </a:xfrm>
           <a:prstGeom prst="rect">
             <a:avLst/>
@@ -9973,8 +11534,10 @@
           <a:p>
             <a:r>
               <a:rPr lang="en-US" dirty="0"/>
-              <a:t>Which one would you prefer?</a:t>
-            </a:r>
+              <a:t>Instead of manually testing 100 times, A testing tool performs repetitive tests automatically</a:t>
+            </a:r>
+          </a:p>
+          <a:p>
             <a:endParaRPr lang="en-IN" dirty="0"/>
           </a:p>
         </p:txBody>
@@ -9984,7 +11547,7 @@
           <p:cNvPr id="10" name="TextBox 9">
             <a:extLst>
               <a:ext uri="{FF2B5EF4-FFF2-40B4-BE49-F238E27FC236}">
-                <a16:creationId xmlns:a16="http://schemas.microsoft.com/office/drawing/2014/main" id="{1F2391A5-CE75-D2BD-4AFA-919101E2F934}"/>
+                <a16:creationId xmlns:a16="http://schemas.microsoft.com/office/drawing/2014/main" id="{7F68DED7-60B1-CD77-4450-B56E1E874972}"/>
               </a:ext>
             </a:extLst>
           </p:cNvPr>
@@ -9993,8 +11556,8 @@
         </p:nvSpPr>
         <p:spPr>
           <a:xfrm>
-            <a:off x="974010" y="4798718"/>
-            <a:ext cx="5113099" cy="2059282"/>
+            <a:off x="1064318" y="5448101"/>
+            <a:ext cx="10286678" cy="1551450"/>
           </a:xfrm>
           <a:prstGeom prst="rect">
             <a:avLst/>
@@ -10019,125 +11582,7 @@
           <a:p>
             <a:r>
               <a:rPr lang="en-US" dirty="0"/>
-              <a:t>The food may be the same, but the user experience is completely different</a:t>
-            </a:r>
-          </a:p>
-          <a:p>
-            <a:endParaRPr lang="en-IN" dirty="0"/>
-          </a:p>
-        </p:txBody>
-      </p:sp>
-      <p:sp>
-        <p:nvSpPr>
-          <p:cNvPr id="11" name="TextBox 10">
-            <a:extLst>
-              <a:ext uri="{FF2B5EF4-FFF2-40B4-BE49-F238E27FC236}">
-                <a16:creationId xmlns:a16="http://schemas.microsoft.com/office/drawing/2014/main" id="{421D1E63-1696-748F-EAA4-2E521CFEE4D8}"/>
-              </a:ext>
-            </a:extLst>
-          </p:cNvPr>
-          <p:cNvSpPr txBox="1"/>
-          <p:nvPr/>
-        </p:nvSpPr>
-        <p:spPr>
-          <a:xfrm>
-            <a:off x="7669693" y="1982283"/>
-            <a:ext cx="3888432" cy="5106270"/>
-          </a:xfrm>
-          <a:prstGeom prst="rect">
-            <a:avLst/>
-          </a:prstGeom>
-          <a:noFill/>
-        </p:spPr>
-        <p:txBody>
-          <a:bodyPr wrap="square" rtlCol="0">
-            <a:spAutoFit/>
-          </a:bodyPr>
-          <a:lstStyle>
-            <a:defPPr>
-              <a:defRPr lang="en-US"/>
-            </a:defPPr>
-            <a:lvl1pPr>
-              <a:lnSpc>
-                <a:spcPct val="150000"/>
-              </a:lnSpc>
-              <a:defRPr sz="2200"/>
-            </a:lvl1pPr>
-          </a:lstStyle>
-          <a:p>
-            <a:r>
-              <a:rPr lang="en-US" dirty="0"/>
-              <a:t>Things to check:</a:t>
-            </a:r>
-          </a:p>
-          <a:p>
-            <a:pPr marL="342900" indent="-342900">
-              <a:buFont typeface="Arial" panose="020B0604020202020204" pitchFamily="34" charset="0"/>
-              <a:buChar char="•"/>
-            </a:pPr>
-            <a:r>
-              <a:rPr lang="en-US" dirty="0"/>
-              <a:t>Buttons visible </a:t>
-            </a:r>
-          </a:p>
-          <a:p>
-            <a:pPr marL="342900" indent="-342900">
-              <a:buFont typeface="Arial" panose="020B0604020202020204" pitchFamily="34" charset="0"/>
-              <a:buChar char="•"/>
-            </a:pPr>
-            <a:r>
-              <a:rPr lang="en-US" dirty="0"/>
-              <a:t>Fonts readable </a:t>
-            </a:r>
-          </a:p>
-          <a:p>
-            <a:pPr marL="342900" indent="-342900">
-              <a:buFont typeface="Arial" panose="020B0604020202020204" pitchFamily="34" charset="0"/>
-              <a:buChar char="•"/>
-            </a:pPr>
-            <a:r>
-              <a:rPr lang="en-US" dirty="0"/>
-              <a:t>Logo is displayed</a:t>
-            </a:r>
-          </a:p>
-          <a:p>
-            <a:pPr marL="342900" indent="-342900">
-              <a:buFont typeface="Arial" panose="020B0604020202020204" pitchFamily="34" charset="0"/>
-              <a:buChar char="•"/>
-            </a:pPr>
-            <a:r>
-              <a:rPr lang="en-US" dirty="0"/>
-              <a:t>Images load correctly </a:t>
-            </a:r>
-          </a:p>
-          <a:p>
-            <a:pPr marL="342900" indent="-342900">
-              <a:buFont typeface="Arial" panose="020B0604020202020204" pitchFamily="34" charset="0"/>
-              <a:buChar char="•"/>
-            </a:pPr>
-            <a:r>
-              <a:rPr lang="en-US" dirty="0"/>
-              <a:t>Colors are consistent </a:t>
-            </a:r>
-          </a:p>
-          <a:p>
-            <a:pPr marL="342900" indent="-342900">
-              <a:buFont typeface="Arial" panose="020B0604020202020204" pitchFamily="34" charset="0"/>
-              <a:buChar char="•"/>
-            </a:pPr>
-            <a:r>
-              <a:rPr lang="en-US" dirty="0"/>
-              <a:t>Navigation works </a:t>
-            </a:r>
-          </a:p>
-          <a:p>
-            <a:pPr marL="342900" indent="-342900">
-              <a:buFont typeface="Arial" panose="020B0604020202020204" pitchFamily="34" charset="0"/>
-              <a:buChar char="•"/>
-            </a:pPr>
-            <a:r>
-              <a:rPr lang="en-US" dirty="0"/>
-              <a:t>Mobile layout looks good</a:t>
+              <a:t>Instead of checking attendance manually, A biometric machine does it automatically.</a:t>
             </a:r>
           </a:p>
           <a:p>
@@ -10148,7 +11593,7 @@
     </p:spTree>
     <p:extLst>
       <p:ext uri="{BB962C8B-B14F-4D97-AF65-F5344CB8AC3E}">
-        <p14:creationId xmlns:p14="http://schemas.microsoft.com/office/powerpoint/2010/main" val="851307479"/>
+        <p14:creationId xmlns:p14="http://schemas.microsoft.com/office/powerpoint/2010/main" val="3133974278"/>
       </p:ext>
     </p:extLst>
   </p:cSld>
@@ -10192,7 +11637,7 @@
           <p:cNvPr id="4" name="TextBox 3">
             <a:extLst>
               <a:ext uri="{FF2B5EF4-FFF2-40B4-BE49-F238E27FC236}">
-                <a16:creationId xmlns:a16="http://schemas.microsoft.com/office/drawing/2014/main" id="{97385ABB-4DB2-49DE-3929-1B18CBE0A45B}"/>
+                <a16:creationId xmlns:a16="http://schemas.microsoft.com/office/drawing/2014/main" id="{C2E791AB-661A-4A4A-B05E-379EF6D66DFE}"/>
               </a:ext>
             </a:extLst>
           </p:cNvPr>
@@ -10201,8 +11646,8 @@
         </p:nvSpPr>
         <p:spPr>
           <a:xfrm>
-            <a:off x="909836" y="332656"/>
-            <a:ext cx="3573414" cy="443198"/>
+            <a:off x="837828" y="332656"/>
+            <a:ext cx="5165197" cy="443198"/>
           </a:xfrm>
           <a:prstGeom prst="rect">
             <a:avLst/>
@@ -10231,7 +11676,7 @@
           <a:p>
             <a:r>
               <a:rPr lang="en-IN" dirty="0"/>
-              <a:t>3. Performance Testing</a:t>
+              <a:t>3. Test-Driven Development (TDD)</a:t>
             </a:r>
           </a:p>
         </p:txBody>
@@ -10241,7 +11686,7 @@
           <p:cNvPr id="5" name="TextBox 4">
             <a:extLst>
               <a:ext uri="{FF2B5EF4-FFF2-40B4-BE49-F238E27FC236}">
-                <a16:creationId xmlns:a16="http://schemas.microsoft.com/office/drawing/2014/main" id="{72C73409-0885-EF8F-BAA8-29E34F01A28C}"/>
+                <a16:creationId xmlns:a16="http://schemas.microsoft.com/office/drawing/2014/main" id="{FA59605E-E9A5-29AB-8933-D187807584E5}"/>
               </a:ext>
             </a:extLst>
           </p:cNvPr>
@@ -10250,8 +11695,8 @@
         </p:nvSpPr>
         <p:spPr>
           <a:xfrm>
-            <a:off x="873127" y="836712"/>
-            <a:ext cx="6617517" cy="535788"/>
+            <a:off x="889350" y="810322"/>
+            <a:ext cx="10585176" cy="1043619"/>
           </a:xfrm>
           <a:prstGeom prst="rect">
             <a:avLst/>
@@ -10276,18 +11721,20 @@
           <a:p>
             <a:r>
               <a:rPr lang="en-US" dirty="0"/>
-              <a:t>It measures speed, stability, and responsiveness</a:t>
-            </a:r>
+              <a:t>Write Test -&gt;  Write Code -&gt; Run Test -&gt; Improve Code</a:t>
+            </a:r>
+          </a:p>
+          <a:p>
             <a:endParaRPr lang="en-IN" dirty="0"/>
           </a:p>
         </p:txBody>
       </p:sp>
       <p:sp>
         <p:nvSpPr>
-          <p:cNvPr id="7" name="TextBox 6">
+          <p:cNvPr id="6" name="TextBox 5">
             <a:extLst>
               <a:ext uri="{FF2B5EF4-FFF2-40B4-BE49-F238E27FC236}">
-                <a16:creationId xmlns:a16="http://schemas.microsoft.com/office/drawing/2014/main" id="{A7DC326C-FBC1-C8CD-7ABB-7D30A1A080FC}"/>
+                <a16:creationId xmlns:a16="http://schemas.microsoft.com/office/drawing/2014/main" id="{41F5F514-5C59-C28A-0AAD-550BA00CB719}"/>
               </a:ext>
             </a:extLst>
           </p:cNvPr>
@@ -10296,8 +11743,8 @@
         </p:nvSpPr>
         <p:spPr>
           <a:xfrm>
-            <a:off x="882960" y="1371080"/>
-            <a:ext cx="10657184" cy="1551450"/>
+            <a:off x="860242" y="1788979"/>
+            <a:ext cx="2924198" cy="413959"/>
           </a:xfrm>
           <a:prstGeom prst="rect">
             <a:avLst/>
@@ -10314,28 +11761,29 @@
             </a:defPPr>
             <a:lvl1pPr>
               <a:lnSpc>
-                <a:spcPct val="150000"/>
-              </a:lnSpc>
-              <a:defRPr sz="2200"/>
+                <a:spcPct val="95000"/>
+              </a:lnSpc>
+              <a:defRPr sz="2200" b="1">
+                <a:solidFill>
+                  <a:srgbClr val="FF0000"/>
+                </a:solidFill>
+              </a:defRPr>
             </a:lvl1pPr>
           </a:lstStyle>
           <a:p>
             <a:r>
-              <a:rPr lang="en-US" dirty="0"/>
-              <a:t>Imagine booking train tickets during a festival. Thousands of users log in at the same time.</a:t>
-            </a:r>
-          </a:p>
-          <a:p>
-            <a:endParaRPr lang="en-IN" dirty="0"/>
-          </a:p>
-        </p:txBody>
-      </p:sp>
-      <p:sp>
-        <p:nvSpPr>
-          <p:cNvPr id="8" name="TextBox 7">
+              <a:rPr lang="en-IN" dirty="0"/>
+              <a:t>4. Pair Programming</a:t>
+            </a:r>
+          </a:p>
+        </p:txBody>
+      </p:sp>
+      <p:sp>
+        <p:nvSpPr>
+          <p:cNvPr id="7" name="TextBox 6">
             <a:extLst>
               <a:ext uri="{FF2B5EF4-FFF2-40B4-BE49-F238E27FC236}">
-                <a16:creationId xmlns:a16="http://schemas.microsoft.com/office/drawing/2014/main" id="{FCCB8D0D-ED9D-05A7-1A89-0150D1375204}"/>
+                <a16:creationId xmlns:a16="http://schemas.microsoft.com/office/drawing/2014/main" id="{21459456-1E39-89F2-BD72-A3A7EA443A99}"/>
               </a:ext>
             </a:extLst>
           </p:cNvPr>
@@ -10344,8 +11792,8 @@
         </p:nvSpPr>
         <p:spPr>
           <a:xfrm>
-            <a:off x="909836" y="2408362"/>
-            <a:ext cx="5616624" cy="1551450"/>
+            <a:off x="889350" y="2202938"/>
+            <a:ext cx="11328583" cy="1551450"/>
           </a:xfrm>
           <a:prstGeom prst="rect">
             <a:avLst/>
@@ -10368,44 +11816,28 @@
             </a:lvl1pPr>
           </a:lstStyle>
           <a:p>
-            <a:pPr marL="342900" indent="-342900">
-              <a:buFont typeface="Arial" panose="020B0604020202020204" pitchFamily="34" charset="0"/>
-              <a:buChar char="•"/>
-            </a:pPr>
-            <a:r>
-              <a:rPr lang="en-US" dirty="0"/>
-              <a:t>Does the website remain fast?</a:t>
-            </a:r>
-          </a:p>
-          <a:p>
-            <a:pPr marL="342900" indent="-342900">
-              <a:buFont typeface="Arial" panose="020B0604020202020204" pitchFamily="34" charset="0"/>
-              <a:buChar char="•"/>
-            </a:pPr>
-            <a:r>
-              <a:rPr lang="en-US" dirty="0"/>
-              <a:t>Does it crash?</a:t>
-            </a:r>
-          </a:p>
-          <a:p>
-            <a:pPr marL="342900" indent="-342900">
-              <a:buFont typeface="Arial" panose="020B0604020202020204" pitchFamily="34" charset="0"/>
-              <a:buChar char="•"/>
-            </a:pPr>
-            <a:r>
-              <a:rPr lang="en-US" dirty="0"/>
-              <a:t>How quickly does it load?</a:t>
-            </a:r>
+            <a:r>
+              <a:rPr lang="en-US" dirty="0"/>
+              <a:t>Two developers work together. One writes code. One reviews simultaneously.</a:t>
+            </a:r>
+          </a:p>
+          <a:p>
+            <a:r>
+              <a:rPr lang="en-US" dirty="0"/>
+              <a:t>This reduces mistakes.</a:t>
+            </a:r>
+          </a:p>
+          <a:p>
             <a:endParaRPr lang="en-IN" dirty="0"/>
           </a:p>
         </p:txBody>
       </p:sp>
       <p:sp>
         <p:nvSpPr>
-          <p:cNvPr id="2" name="TextBox 1">
+          <p:cNvPr id="8" name="TextBox 7">
             <a:extLst>
               <a:ext uri="{FF2B5EF4-FFF2-40B4-BE49-F238E27FC236}">
-                <a16:creationId xmlns:a16="http://schemas.microsoft.com/office/drawing/2014/main" id="{A6B4FA42-A76F-5B69-5822-6429C8DF07EF}"/>
+                <a16:creationId xmlns:a16="http://schemas.microsoft.com/office/drawing/2014/main" id="{EE186809-85EC-44F1-1A27-DFF1F4050AFE}"/>
               </a:ext>
             </a:extLst>
           </p:cNvPr>
@@ -10414,8 +11846,8 @@
         </p:nvSpPr>
         <p:spPr>
           <a:xfrm>
-            <a:off x="916124" y="4221088"/>
-            <a:ext cx="3831498" cy="535788"/>
+            <a:off x="889350" y="3689426"/>
+            <a:ext cx="4187365" cy="413959"/>
           </a:xfrm>
           <a:prstGeom prst="rect">
             <a:avLst/>
@@ -10432,6 +11864,55 @@
             </a:defPPr>
             <a:lvl1pPr>
               <a:lnSpc>
+                <a:spcPct val="95000"/>
+              </a:lnSpc>
+              <a:defRPr sz="2200" b="1">
+                <a:solidFill>
+                  <a:srgbClr val="FF0000"/>
+                </a:solidFill>
+              </a:defRPr>
+            </a:lvl1pPr>
+          </a:lstStyle>
+          <a:p>
+            <a:r>
+              <a:rPr lang="en-IN" dirty="0"/>
+              <a:t>5. Continuous Integration (CI)</a:t>
+            </a:r>
+          </a:p>
+        </p:txBody>
+      </p:sp>
+      <p:sp>
+        <p:nvSpPr>
+          <p:cNvPr id="9" name="TextBox 8">
+            <a:extLst>
+              <a:ext uri="{FF2B5EF4-FFF2-40B4-BE49-F238E27FC236}">
+                <a16:creationId xmlns:a16="http://schemas.microsoft.com/office/drawing/2014/main" id="{4329D583-DFED-C8DD-70EE-1AC25CC0AB39}"/>
+              </a:ext>
+            </a:extLst>
+          </p:cNvPr>
+          <p:cNvSpPr txBox="1"/>
+          <p:nvPr/>
+        </p:nvSpPr>
+        <p:spPr>
+          <a:xfrm>
+            <a:off x="935597" y="4052401"/>
+            <a:ext cx="10492682" cy="3074944"/>
+          </a:xfrm>
+          <a:prstGeom prst="rect">
+            <a:avLst/>
+          </a:prstGeom>
+          <a:noFill/>
+        </p:spPr>
+        <p:txBody>
+          <a:bodyPr wrap="square" rtlCol="0">
+            <a:spAutoFit/>
+          </a:bodyPr>
+          <a:lstStyle>
+            <a:defPPr>
+              <a:defRPr lang="en-US"/>
+            </a:defPPr>
+            <a:lvl1pPr>
+              <a:lnSpc>
                 <a:spcPct val="150000"/>
               </a:lnSpc>
               <a:defRPr sz="2200"/>
@@ -10439,16 +11920,55 @@
           </a:lstStyle>
           <a:p>
             <a:r>
-              <a:rPr lang="en-IN" dirty="0"/>
-              <a:t>This is Performance Testing.</a:t>
-            </a:r>
+              <a:rPr lang="en-US" dirty="0"/>
+              <a:t>Developers merge code several times a day. Every merge automatically</a:t>
+            </a:r>
+          </a:p>
+          <a:p>
+            <a:pPr marL="342900" indent="-342900">
+              <a:buFont typeface="Arial" panose="020B0604020202020204" pitchFamily="34" charset="0"/>
+              <a:buChar char="•"/>
+            </a:pPr>
+            <a:r>
+              <a:rPr lang="en-US" dirty="0"/>
+              <a:t>Builds application </a:t>
+            </a:r>
+          </a:p>
+          <a:p>
+            <a:pPr marL="342900" indent="-342900">
+              <a:buFont typeface="Arial" panose="020B0604020202020204" pitchFamily="34" charset="0"/>
+              <a:buChar char="•"/>
+            </a:pPr>
+            <a:r>
+              <a:rPr lang="en-US" dirty="0"/>
+              <a:t>Runs tests </a:t>
+            </a:r>
+          </a:p>
+          <a:p>
+            <a:pPr marL="342900" indent="-342900">
+              <a:buFont typeface="Arial" panose="020B0604020202020204" pitchFamily="34" charset="0"/>
+              <a:buChar char="•"/>
+            </a:pPr>
+            <a:r>
+              <a:rPr lang="en-US" dirty="0"/>
+              <a:t>Detects bugs </a:t>
+            </a:r>
+          </a:p>
+          <a:p>
+            <a:r>
+              <a:rPr lang="en-US" dirty="0"/>
+              <a:t>before release</a:t>
+            </a:r>
+          </a:p>
+          <a:p>
+            <a:endParaRPr lang="en-IN" dirty="0"/>
           </a:p>
         </p:txBody>
       </p:sp>
     </p:spTree>
     <p:extLst>
       <p:ext uri="{BB962C8B-B14F-4D97-AF65-F5344CB8AC3E}">
-        <p14:creationId xmlns:p14="http://schemas.microsoft.com/office/powerpoint/2010/main" val="1757275685"/>
+        <p14:creationId xmlns:p14="http://schemas.microsoft.com/office/powerpoint/2010/main" val="442549559"/>
       </p:ext>
     </p:extLst>
   </p:cSld>
@@ -10492,7 +12012,7 @@
           <p:cNvPr id="4" name="TextBox 3">
             <a:extLst>
               <a:ext uri="{FF2B5EF4-FFF2-40B4-BE49-F238E27FC236}">
-                <a16:creationId xmlns:a16="http://schemas.microsoft.com/office/drawing/2014/main" id="{99C375F3-77F9-95B9-4323-C3FE913B5BC8}"/>
+                <a16:creationId xmlns:a16="http://schemas.microsoft.com/office/drawing/2014/main" id="{FC2046E1-C567-2F18-9706-DD8E7E8DFE70}"/>
               </a:ext>
             </a:extLst>
           </p:cNvPr>
@@ -10501,8 +12021,8 @@
         </p:nvSpPr>
         <p:spPr>
           <a:xfrm>
-            <a:off x="1053852" y="260648"/>
-            <a:ext cx="4528804" cy="443198"/>
+            <a:off x="693812" y="260648"/>
+            <a:ext cx="3557384" cy="443198"/>
           </a:xfrm>
           <a:prstGeom prst="rect">
             <a:avLst/>
@@ -10531,7 +12051,7 @@
           <a:p>
             <a:r>
               <a:rPr lang="en-IN" dirty="0"/>
-              <a:t>Types of Performance Testing</a:t>
+              <a:t>6. Acceptance Testing</a:t>
             </a:r>
           </a:p>
         </p:txBody>
@@ -10541,7 +12061,7 @@
           <p:cNvPr id="5" name="TextBox 4">
             <a:extLst>
               <a:ext uri="{FF2B5EF4-FFF2-40B4-BE49-F238E27FC236}">
-                <a16:creationId xmlns:a16="http://schemas.microsoft.com/office/drawing/2014/main" id="{72F0DA4B-95AA-41A3-C3A2-E0B29E20A0D8}"/>
+                <a16:creationId xmlns:a16="http://schemas.microsoft.com/office/drawing/2014/main" id="{B1E85BDB-14A4-CF39-68AE-B03A0D1A849D}"/>
               </a:ext>
             </a:extLst>
           </p:cNvPr>
@@ -10550,8 +12070,8 @@
         </p:nvSpPr>
         <p:spPr>
           <a:xfrm>
-            <a:off x="1028193" y="908720"/>
-            <a:ext cx="2236510" cy="413959"/>
+            <a:off x="721703" y="764704"/>
+            <a:ext cx="10153128" cy="1043619"/>
           </a:xfrm>
           <a:prstGeom prst="rect">
             <a:avLst/>
@@ -10568,20 +12088,19 @@
             </a:defPPr>
             <a:lvl1pPr>
               <a:lnSpc>
-                <a:spcPct val="95000"/>
-              </a:lnSpc>
-              <a:defRPr sz="2200" b="1">
-                <a:solidFill>
-                  <a:srgbClr val="FF0000"/>
-                </a:solidFill>
-              </a:defRPr>
+                <a:spcPct val="150000"/>
+              </a:lnSpc>
+              <a:defRPr sz="2200"/>
             </a:lvl1pPr>
           </a:lstStyle>
           <a:p>
             <a:r>
-              <a:rPr lang="en-IN" dirty="0"/>
-              <a:t>A. Load Testing</a:t>
-            </a:r>
+              <a:rPr lang="en-US" dirty="0"/>
+              <a:t>Customer verifies whether the feature meets expectations.</a:t>
+            </a:r>
+          </a:p>
+          <a:p>
+            <a:endParaRPr lang="en-IN" dirty="0"/>
           </a:p>
         </p:txBody>
       </p:sp>
@@ -10590,7 +12109,7 @@
           <p:cNvPr id="6" name="TextBox 5">
             <a:extLst>
               <a:ext uri="{FF2B5EF4-FFF2-40B4-BE49-F238E27FC236}">
-                <a16:creationId xmlns:a16="http://schemas.microsoft.com/office/drawing/2014/main" id="{BA05B30B-D9AD-819C-5DA9-278FFEAABBA7}"/>
+                <a16:creationId xmlns:a16="http://schemas.microsoft.com/office/drawing/2014/main" id="{100AEC0D-F17F-7CE5-68F1-653C6F49ECA5}"/>
               </a:ext>
             </a:extLst>
           </p:cNvPr>
@@ -10599,8 +12118,8 @@
         </p:nvSpPr>
         <p:spPr>
           <a:xfrm>
-            <a:off x="1053853" y="1356736"/>
-            <a:ext cx="4680519" cy="2059282"/>
+            <a:off x="714300" y="1440127"/>
+            <a:ext cx="10873208" cy="2059282"/>
           </a:xfrm>
           <a:prstGeom prst="rect">
             <a:avLst/>
@@ -10625,304 +12144,19 @@
           <a:p>
             <a:r>
               <a:rPr lang="en-US" dirty="0"/>
-              <a:t>Tests software under expected user load. Can the website handle 5,000 users?</a:t>
-            </a:r>
-          </a:p>
-          <a:p>
-            <a:endParaRPr lang="en-IN" dirty="0"/>
-          </a:p>
-        </p:txBody>
-      </p:sp>
-      <p:sp>
-        <p:nvSpPr>
-          <p:cNvPr id="7" name="TextBox 6">
-            <a:extLst>
-              <a:ext uri="{FF2B5EF4-FFF2-40B4-BE49-F238E27FC236}">
-                <a16:creationId xmlns:a16="http://schemas.microsoft.com/office/drawing/2014/main" id="{636925F0-2E82-7B33-70A6-9011C977CFDF}"/>
-              </a:ext>
-            </a:extLst>
-          </p:cNvPr>
-          <p:cNvSpPr txBox="1"/>
-          <p:nvPr/>
-        </p:nvSpPr>
-        <p:spPr>
-          <a:xfrm>
-            <a:off x="6958508" y="880324"/>
-            <a:ext cx="2265364" cy="413959"/>
-          </a:xfrm>
-          <a:prstGeom prst="rect">
-            <a:avLst/>
-          </a:prstGeom>
-          <a:noFill/>
-        </p:spPr>
-        <p:txBody>
-          <a:bodyPr wrap="square" rtlCol="0">
-            <a:spAutoFit/>
-          </a:bodyPr>
-          <a:lstStyle>
-            <a:defPPr>
-              <a:defRPr lang="en-US"/>
-            </a:defPPr>
-            <a:lvl1pPr>
-              <a:lnSpc>
-                <a:spcPct val="95000"/>
-              </a:lnSpc>
-              <a:defRPr sz="2200" b="1">
-                <a:solidFill>
-                  <a:srgbClr val="FF0000"/>
-                </a:solidFill>
-              </a:defRPr>
-            </a:lvl1pPr>
-          </a:lstStyle>
-          <a:p>
-            <a:r>
-              <a:rPr lang="en-IN" dirty="0"/>
-              <a:t>B. Stress Testing</a:t>
-            </a:r>
-          </a:p>
-        </p:txBody>
-      </p:sp>
-      <p:sp>
-        <p:nvSpPr>
-          <p:cNvPr id="8" name="TextBox 7">
-            <a:extLst>
-              <a:ext uri="{FF2B5EF4-FFF2-40B4-BE49-F238E27FC236}">
-                <a16:creationId xmlns:a16="http://schemas.microsoft.com/office/drawing/2014/main" id="{52906FEE-A0AF-5DB3-4754-4D2A9996013D}"/>
-              </a:ext>
-            </a:extLst>
-          </p:cNvPr>
-          <p:cNvSpPr txBox="1"/>
-          <p:nvPr/>
-        </p:nvSpPr>
-        <p:spPr>
-          <a:xfrm>
-            <a:off x="6958508" y="1356736"/>
-            <a:ext cx="4794902" cy="1551450"/>
-          </a:xfrm>
-          <a:prstGeom prst="rect">
-            <a:avLst/>
-          </a:prstGeom>
-          <a:noFill/>
-        </p:spPr>
-        <p:txBody>
-          <a:bodyPr wrap="square" rtlCol="0">
-            <a:spAutoFit/>
-          </a:bodyPr>
-          <a:lstStyle>
-            <a:defPPr>
-              <a:defRPr lang="en-US"/>
-            </a:defPPr>
-            <a:lvl1pPr>
-              <a:lnSpc>
-                <a:spcPct val="150000"/>
-              </a:lnSpc>
-              <a:defRPr sz="2200"/>
-            </a:lvl1pPr>
-          </a:lstStyle>
-          <a:p>
-            <a:r>
-              <a:rPr lang="en-US" dirty="0"/>
-              <a:t>Pushes the system beyond its limit.</a:t>
-            </a:r>
-          </a:p>
-          <a:p>
-            <a:r>
-              <a:rPr lang="en-US" dirty="0"/>
-              <a:t>Can it survive 100,000 users?</a:t>
-            </a:r>
-          </a:p>
-          <a:p>
-            <a:endParaRPr lang="en-IN" dirty="0"/>
-          </a:p>
-        </p:txBody>
-      </p:sp>
-      <p:sp>
-        <p:nvSpPr>
-          <p:cNvPr id="9" name="TextBox 8">
-            <a:extLst>
-              <a:ext uri="{FF2B5EF4-FFF2-40B4-BE49-F238E27FC236}">
-                <a16:creationId xmlns:a16="http://schemas.microsoft.com/office/drawing/2014/main" id="{EBE53777-552C-A5AE-9D81-1B30B3DCB5C7}"/>
-              </a:ext>
-            </a:extLst>
-          </p:cNvPr>
-          <p:cNvSpPr txBox="1"/>
-          <p:nvPr/>
-        </p:nvSpPr>
-        <p:spPr>
-          <a:xfrm>
-            <a:off x="1052534" y="3425350"/>
-            <a:ext cx="3052439" cy="413959"/>
-          </a:xfrm>
-          <a:prstGeom prst="rect">
-            <a:avLst/>
-          </a:prstGeom>
-          <a:noFill/>
-        </p:spPr>
-        <p:txBody>
-          <a:bodyPr wrap="square" rtlCol="0">
-            <a:spAutoFit/>
-          </a:bodyPr>
-          <a:lstStyle>
-            <a:defPPr>
-              <a:defRPr lang="en-US"/>
-            </a:defPPr>
-            <a:lvl1pPr>
-              <a:lnSpc>
-                <a:spcPct val="95000"/>
-              </a:lnSpc>
-              <a:defRPr sz="2200" b="1">
-                <a:solidFill>
-                  <a:srgbClr val="FF0000"/>
-                </a:solidFill>
-              </a:defRPr>
-            </a:lvl1pPr>
-          </a:lstStyle>
-          <a:p>
-            <a:r>
-              <a:rPr lang="en-IN" dirty="0"/>
-              <a:t>C. Endurance Testing</a:t>
-            </a:r>
-          </a:p>
-        </p:txBody>
-      </p:sp>
-      <p:sp>
-        <p:nvSpPr>
-          <p:cNvPr id="10" name="TextBox 9">
-            <a:extLst>
-              <a:ext uri="{FF2B5EF4-FFF2-40B4-BE49-F238E27FC236}">
-                <a16:creationId xmlns:a16="http://schemas.microsoft.com/office/drawing/2014/main" id="{310B7895-B505-849E-174A-0F65176F9D58}"/>
-              </a:ext>
-            </a:extLst>
-          </p:cNvPr>
-          <p:cNvSpPr txBox="1"/>
-          <p:nvPr/>
-        </p:nvSpPr>
-        <p:spPr>
-          <a:xfrm>
-            <a:off x="1052535" y="4005064"/>
-            <a:ext cx="5401918" cy="2059282"/>
-          </a:xfrm>
-          <a:prstGeom prst="rect">
-            <a:avLst/>
-          </a:prstGeom>
-          <a:noFill/>
-        </p:spPr>
-        <p:txBody>
-          <a:bodyPr wrap="square" rtlCol="0">
-            <a:spAutoFit/>
-          </a:bodyPr>
-          <a:lstStyle>
-            <a:defPPr>
-              <a:defRPr lang="en-US"/>
-            </a:defPPr>
-            <a:lvl1pPr>
-              <a:lnSpc>
-                <a:spcPct val="150000"/>
-              </a:lnSpc>
-              <a:defRPr sz="2200"/>
-            </a:lvl1pPr>
-          </a:lstStyle>
-          <a:p>
-            <a:r>
-              <a:rPr lang="en-US" dirty="0"/>
-              <a:t>Checks whether the software performs well over a long period. Can the server run continuously for 48 hours?</a:t>
-            </a:r>
-          </a:p>
-          <a:p>
-            <a:endParaRPr lang="en-IN" dirty="0"/>
-          </a:p>
-        </p:txBody>
-      </p:sp>
-      <p:sp>
-        <p:nvSpPr>
-          <p:cNvPr id="11" name="TextBox 10">
-            <a:extLst>
-              <a:ext uri="{FF2B5EF4-FFF2-40B4-BE49-F238E27FC236}">
-                <a16:creationId xmlns:a16="http://schemas.microsoft.com/office/drawing/2014/main" id="{D832DF39-E138-4D56-E732-1AD5E6728069}"/>
-              </a:ext>
-            </a:extLst>
-          </p:cNvPr>
-          <p:cNvSpPr txBox="1"/>
-          <p:nvPr/>
-        </p:nvSpPr>
-        <p:spPr>
-          <a:xfrm>
-            <a:off x="7093284" y="3425350"/>
-            <a:ext cx="2294218" cy="413959"/>
-          </a:xfrm>
-          <a:prstGeom prst="rect">
-            <a:avLst/>
-          </a:prstGeom>
-          <a:noFill/>
-        </p:spPr>
-        <p:txBody>
-          <a:bodyPr wrap="square" rtlCol="0">
-            <a:spAutoFit/>
-          </a:bodyPr>
-          <a:lstStyle>
-            <a:defPPr>
-              <a:defRPr lang="en-US"/>
-            </a:defPPr>
-            <a:lvl1pPr>
-              <a:lnSpc>
-                <a:spcPct val="95000"/>
-              </a:lnSpc>
-              <a:defRPr sz="2200" b="1">
-                <a:solidFill>
-                  <a:srgbClr val="FF0000"/>
-                </a:solidFill>
-              </a:defRPr>
-            </a:lvl1pPr>
-          </a:lstStyle>
-          <a:p>
-            <a:r>
-              <a:rPr lang="en-IN" dirty="0"/>
-              <a:t>D. Spike Testing</a:t>
-            </a:r>
-          </a:p>
-        </p:txBody>
-      </p:sp>
-      <p:sp>
-        <p:nvSpPr>
-          <p:cNvPr id="12" name="TextBox 11">
-            <a:extLst>
-              <a:ext uri="{FF2B5EF4-FFF2-40B4-BE49-F238E27FC236}">
-                <a16:creationId xmlns:a16="http://schemas.microsoft.com/office/drawing/2014/main" id="{E067C59C-5B60-D5BE-BE8B-E8C1491A2A37}"/>
-              </a:ext>
-            </a:extLst>
-          </p:cNvPr>
-          <p:cNvSpPr txBox="1"/>
-          <p:nvPr/>
-        </p:nvSpPr>
-        <p:spPr>
-          <a:xfrm>
-            <a:off x="7023008" y="3921612"/>
-            <a:ext cx="4401728" cy="2567113"/>
-          </a:xfrm>
-          <a:prstGeom prst="rect">
-            <a:avLst/>
-          </a:prstGeom>
-          <a:noFill/>
-        </p:spPr>
-        <p:txBody>
-          <a:bodyPr wrap="square" rtlCol="0">
-            <a:spAutoFit/>
-          </a:bodyPr>
-          <a:lstStyle>
-            <a:defPPr>
-              <a:defRPr lang="en-US"/>
-            </a:defPPr>
-            <a:lvl1pPr>
-              <a:lnSpc>
-                <a:spcPct val="150000"/>
-              </a:lnSpc>
-              <a:defRPr sz="2200"/>
-            </a:lvl1pPr>
-          </a:lstStyle>
-          <a:p>
-            <a:r>
-              <a:rPr lang="en-US" dirty="0"/>
-              <a:t>Suddenly increases the number of users. Users increase from 500 to 20,000 within one minute.</a:t>
+              <a:t>Customer requested Online Payment.</a:t>
+            </a:r>
+          </a:p>
+          <a:p>
+            <a:r>
+              <a:rPr lang="en-US" dirty="0"/>
+              <a:t>QA confirms Payment works.</a:t>
+            </a:r>
+          </a:p>
+          <a:p>
+            <a:r>
+              <a:rPr lang="en-US" dirty="0"/>
+              <a:t>Customer also confirms Payment matches business needs</a:t>
             </a:r>
           </a:p>
           <a:p>
@@ -10933,7 +12167,7 @@
     </p:spTree>
     <p:extLst>
       <p:ext uri="{BB962C8B-B14F-4D97-AF65-F5344CB8AC3E}">
-        <p14:creationId xmlns:p14="http://schemas.microsoft.com/office/powerpoint/2010/main" val="2221628321"/>
+        <p14:creationId xmlns:p14="http://schemas.microsoft.com/office/powerpoint/2010/main" val="896639986"/>
       </p:ext>
     </p:extLst>
   </p:cSld>
@@ -10977,7 +12211,7 @@
           <p:cNvPr id="4" name="TextBox 3">
             <a:extLst>
               <a:ext uri="{FF2B5EF4-FFF2-40B4-BE49-F238E27FC236}">
-                <a16:creationId xmlns:a16="http://schemas.microsoft.com/office/drawing/2014/main" id="{05FCECF7-C368-B968-A0D3-3F7D4B515740}"/>
+                <a16:creationId xmlns:a16="http://schemas.microsoft.com/office/drawing/2014/main" id="{577BDD60-3446-7A7E-2F21-B0A4F2D6E517}"/>
               </a:ext>
             </a:extLst>
           </p:cNvPr>
@@ -10986,8 +12220,8 @@
         </p:nvSpPr>
         <p:spPr>
           <a:xfrm>
-            <a:off x="981844" y="332656"/>
-            <a:ext cx="2784737" cy="443198"/>
+            <a:off x="693812" y="260648"/>
+            <a:ext cx="3251211" cy="413959"/>
           </a:xfrm>
           <a:prstGeom prst="rect">
             <a:avLst/>
@@ -11016,310 +12250,45 @@
           <a:p>
             <a:r>
               <a:rPr lang="en-IN" dirty="0"/>
-              <a:t>4. Security Testing</a:t>
-            </a:r>
-          </a:p>
-        </p:txBody>
-      </p:sp>
-      <p:sp>
-        <p:nvSpPr>
-          <p:cNvPr id="5" name="TextBox 4">
+              <a:t>Agile QA Principles</a:t>
+            </a:r>
+          </a:p>
+        </p:txBody>
+      </p:sp>
+      <p:pic>
+        <p:nvPicPr>
+          <p:cNvPr id="6" name="Picture 5">
             <a:extLst>
               <a:ext uri="{FF2B5EF4-FFF2-40B4-BE49-F238E27FC236}">
-                <a16:creationId xmlns:a16="http://schemas.microsoft.com/office/drawing/2014/main" id="{A0480A38-8C6D-74E9-7B59-3BDB2E30757A}"/>
+                <a16:creationId xmlns:a16="http://schemas.microsoft.com/office/drawing/2014/main" id="{A4E3E793-8F33-9E09-1B61-76A1B87C852A}"/>
               </a:ext>
             </a:extLst>
           </p:cNvPr>
-          <p:cNvSpPr txBox="1"/>
+          <p:cNvPicPr>
+            <a:picLocks noChangeAspect="1"/>
+          </p:cNvPicPr>
           <p:nvPr/>
-        </p:nvSpPr>
-        <p:spPr>
-          <a:xfrm>
-            <a:off x="981844" y="908720"/>
-            <a:ext cx="5319085" cy="535788"/>
+        </p:nvPicPr>
+        <p:blipFill>
+          <a:blip r:embed="rId2"/>
+          <a:stretch>
+            <a:fillRect/>
+          </a:stretch>
+        </p:blipFill>
+        <p:spPr>
+          <a:xfrm>
+            <a:off x="1701924" y="980728"/>
+            <a:ext cx="8784976" cy="5236287"/>
           </a:xfrm>
           <a:prstGeom prst="rect">
             <a:avLst/>
           </a:prstGeom>
-          <a:noFill/>
-        </p:spPr>
-        <p:txBody>
-          <a:bodyPr wrap="square" rtlCol="0">
-            <a:spAutoFit/>
-          </a:bodyPr>
-          <a:lstStyle>
-            <a:defPPr>
-              <a:defRPr lang="en-US"/>
-            </a:defPPr>
-            <a:lvl1pPr>
-              <a:lnSpc>
-                <a:spcPct val="150000"/>
-              </a:lnSpc>
-              <a:defRPr sz="2200"/>
-            </a:lvl1pPr>
-          </a:lstStyle>
-          <a:p>
-            <a:r>
-              <a:rPr lang="en-US" dirty="0"/>
-              <a:t>It ensures that user data remains safe.</a:t>
-            </a:r>
-            <a:endParaRPr lang="en-IN" dirty="0"/>
-          </a:p>
-        </p:txBody>
-      </p:sp>
-      <p:sp>
-        <p:nvSpPr>
-          <p:cNvPr id="6" name="TextBox 5">
-            <a:extLst>
-              <a:ext uri="{FF2B5EF4-FFF2-40B4-BE49-F238E27FC236}">
-                <a16:creationId xmlns:a16="http://schemas.microsoft.com/office/drawing/2014/main" id="{39A632B9-2924-A92A-9EBA-A69D709422D2}"/>
-              </a:ext>
-            </a:extLst>
-          </p:cNvPr>
-          <p:cNvSpPr txBox="1"/>
-          <p:nvPr/>
-        </p:nvSpPr>
-        <p:spPr>
-          <a:xfrm>
-            <a:off x="981844" y="1556792"/>
-            <a:ext cx="3960440" cy="4090607"/>
-          </a:xfrm>
-          <a:prstGeom prst="rect">
-            <a:avLst/>
-          </a:prstGeom>
-          <a:noFill/>
-        </p:spPr>
-        <p:txBody>
-          <a:bodyPr wrap="square" rtlCol="0">
-            <a:spAutoFit/>
-          </a:bodyPr>
-          <a:lstStyle>
-            <a:defPPr>
-              <a:defRPr lang="en-US"/>
-            </a:defPPr>
-            <a:lvl1pPr>
-              <a:lnSpc>
-                <a:spcPct val="150000"/>
-              </a:lnSpc>
-              <a:defRPr sz="2200"/>
-            </a:lvl1pPr>
-          </a:lstStyle>
-          <a:p>
-            <a:r>
-              <a:rPr lang="en-US" dirty="0"/>
-              <a:t>Think about your house.</a:t>
-            </a:r>
-          </a:p>
-          <a:p>
-            <a:r>
-              <a:rPr lang="en-US" dirty="0"/>
-              <a:t>You have:</a:t>
-            </a:r>
-          </a:p>
-          <a:p>
-            <a:pPr marL="342900" indent="-342900">
-              <a:buFont typeface="Arial" panose="020B0604020202020204" pitchFamily="34" charset="0"/>
-              <a:buChar char="•"/>
-            </a:pPr>
-            <a:r>
-              <a:rPr lang="en-US" dirty="0"/>
-              <a:t>Strong locks </a:t>
-            </a:r>
-          </a:p>
-          <a:p>
-            <a:pPr marL="342900" indent="-342900">
-              <a:buFont typeface="Arial" panose="020B0604020202020204" pitchFamily="34" charset="0"/>
-              <a:buChar char="•"/>
-            </a:pPr>
-            <a:r>
-              <a:rPr lang="en-US" dirty="0"/>
-              <a:t>CCTV cameras </a:t>
-            </a:r>
-          </a:p>
-          <a:p>
-            <a:pPr marL="342900" indent="-342900">
-              <a:buFont typeface="Arial" panose="020B0604020202020204" pitchFamily="34" charset="0"/>
-              <a:buChar char="•"/>
-            </a:pPr>
-            <a:r>
-              <a:rPr lang="en-US" dirty="0"/>
-              <a:t>Security guards </a:t>
-            </a:r>
-          </a:p>
-          <a:p>
-            <a:pPr marL="342900" indent="-342900">
-              <a:buFont typeface="Arial" panose="020B0604020202020204" pitchFamily="34" charset="0"/>
-              <a:buChar char="•"/>
-            </a:pPr>
-            <a:r>
-              <a:rPr lang="en-US" dirty="0"/>
-              <a:t>Alarm system </a:t>
-            </a:r>
-          </a:p>
-          <a:p>
-            <a:r>
-              <a:rPr lang="en-US" dirty="0"/>
-              <a:t>These protect your house.</a:t>
-            </a:r>
-          </a:p>
-          <a:p>
-            <a:endParaRPr lang="en-IN" dirty="0"/>
-          </a:p>
-        </p:txBody>
-      </p:sp>
-      <p:sp>
-        <p:nvSpPr>
-          <p:cNvPr id="7" name="TextBox 6">
-            <a:extLst>
-              <a:ext uri="{FF2B5EF4-FFF2-40B4-BE49-F238E27FC236}">
-                <a16:creationId xmlns:a16="http://schemas.microsoft.com/office/drawing/2014/main" id="{C142D5BE-41C8-BB2A-2DB1-B2946F62D701}"/>
-              </a:ext>
-            </a:extLst>
-          </p:cNvPr>
-          <p:cNvSpPr txBox="1"/>
-          <p:nvPr/>
-        </p:nvSpPr>
-        <p:spPr>
-          <a:xfrm>
-            <a:off x="981844" y="5223895"/>
-            <a:ext cx="5078634" cy="535788"/>
-          </a:xfrm>
-          <a:prstGeom prst="rect">
-            <a:avLst/>
-          </a:prstGeom>
-          <a:noFill/>
-        </p:spPr>
-        <p:txBody>
-          <a:bodyPr wrap="square" rtlCol="0">
-            <a:spAutoFit/>
-          </a:bodyPr>
-          <a:lstStyle>
-            <a:defPPr>
-              <a:defRPr lang="en-US"/>
-            </a:defPPr>
-            <a:lvl1pPr>
-              <a:lnSpc>
-                <a:spcPct val="150000"/>
-              </a:lnSpc>
-              <a:defRPr sz="2200"/>
-            </a:lvl1pPr>
-          </a:lstStyle>
-          <a:p>
-            <a:r>
-              <a:rPr lang="en-IN" dirty="0"/>
-              <a:t>Similarly, software needs protection.</a:t>
-            </a:r>
-          </a:p>
-        </p:txBody>
-      </p:sp>
-      <p:sp>
-        <p:nvSpPr>
-          <p:cNvPr id="8" name="TextBox 7">
-            <a:extLst>
-              <a:ext uri="{FF2B5EF4-FFF2-40B4-BE49-F238E27FC236}">
-                <a16:creationId xmlns:a16="http://schemas.microsoft.com/office/drawing/2014/main" id="{C11FE9D2-7EF8-933D-B7A6-BA96A85F562F}"/>
-              </a:ext>
-            </a:extLst>
-          </p:cNvPr>
-          <p:cNvSpPr txBox="1"/>
-          <p:nvPr/>
-        </p:nvSpPr>
-        <p:spPr>
-          <a:xfrm>
-            <a:off x="6742484" y="1669076"/>
-            <a:ext cx="4896544" cy="4090607"/>
-          </a:xfrm>
-          <a:prstGeom prst="rect">
-            <a:avLst/>
-          </a:prstGeom>
-          <a:noFill/>
-        </p:spPr>
-        <p:txBody>
-          <a:bodyPr wrap="square" rtlCol="0">
-            <a:spAutoFit/>
-          </a:bodyPr>
-          <a:lstStyle>
-            <a:defPPr>
-              <a:defRPr lang="en-US"/>
-            </a:defPPr>
-            <a:lvl1pPr>
-              <a:lnSpc>
-                <a:spcPct val="150000"/>
-              </a:lnSpc>
-              <a:defRPr sz="2200"/>
-            </a:lvl1pPr>
-          </a:lstStyle>
-          <a:p>
-            <a:r>
-              <a:rPr lang="en-US" dirty="0"/>
-              <a:t>For an Online Banking App:</a:t>
-            </a:r>
-          </a:p>
-          <a:p>
-            <a:r>
-              <a:rPr lang="en-US" dirty="0"/>
-              <a:t>Security Testing checks:</a:t>
-            </a:r>
-          </a:p>
-          <a:p>
-            <a:pPr marL="342900" indent="-342900">
-              <a:buFont typeface="Arial" panose="020B0604020202020204" pitchFamily="34" charset="0"/>
-              <a:buChar char="•"/>
-            </a:pPr>
-            <a:r>
-              <a:rPr lang="en-US" dirty="0"/>
-              <a:t>Strong passwords </a:t>
-            </a:r>
-          </a:p>
-          <a:p>
-            <a:pPr marL="342900" indent="-342900">
-              <a:buFont typeface="Arial" panose="020B0604020202020204" pitchFamily="34" charset="0"/>
-              <a:buChar char="•"/>
-            </a:pPr>
-            <a:r>
-              <a:rPr lang="en-US" dirty="0"/>
-              <a:t>Secure login </a:t>
-            </a:r>
-          </a:p>
-          <a:p>
-            <a:pPr marL="342900" indent="-342900">
-              <a:buFont typeface="Arial" panose="020B0604020202020204" pitchFamily="34" charset="0"/>
-              <a:buChar char="•"/>
-            </a:pPr>
-            <a:r>
-              <a:rPr lang="en-US" dirty="0"/>
-              <a:t>Data encryption </a:t>
-            </a:r>
-          </a:p>
-          <a:p>
-            <a:pPr marL="342900" indent="-342900">
-              <a:buFont typeface="Arial" panose="020B0604020202020204" pitchFamily="34" charset="0"/>
-              <a:buChar char="•"/>
-            </a:pPr>
-            <a:r>
-              <a:rPr lang="en-US" dirty="0"/>
-              <a:t>Unauthorized access prevention </a:t>
-            </a:r>
-          </a:p>
-          <a:p>
-            <a:pPr marL="342900" indent="-342900">
-              <a:buFont typeface="Arial" panose="020B0604020202020204" pitchFamily="34" charset="0"/>
-              <a:buChar char="•"/>
-            </a:pPr>
-            <a:r>
-              <a:rPr lang="en-US" dirty="0"/>
-              <a:t>Safe money transfer</a:t>
-            </a:r>
-          </a:p>
-          <a:p>
-            <a:endParaRPr lang="en-IN" dirty="0"/>
-          </a:p>
-        </p:txBody>
-      </p:sp>
+        </p:spPr>
+      </p:pic>
     </p:spTree>
     <p:extLst>
       <p:ext uri="{BB962C8B-B14F-4D97-AF65-F5344CB8AC3E}">
-        <p14:creationId xmlns:p14="http://schemas.microsoft.com/office/powerpoint/2010/main" val="3853316336"/>
+        <p14:creationId xmlns:p14="http://schemas.microsoft.com/office/powerpoint/2010/main" val="3446938539"/>
       </p:ext>
     </p:extLst>
   </p:cSld>
@@ -11358,40 +12327,277 @@
           <a:chExt cx="0" cy="0"/>
         </a:xfrm>
       </p:grpSpPr>
-      <p:pic>
-        <p:nvPicPr>
-          <p:cNvPr id="5" name="Picture 4">
+      <p:sp>
+        <p:nvSpPr>
+          <p:cNvPr id="4" name="TextBox 3">
             <a:extLst>
               <a:ext uri="{FF2B5EF4-FFF2-40B4-BE49-F238E27FC236}">
-                <a16:creationId xmlns:a16="http://schemas.microsoft.com/office/drawing/2014/main" id="{0FA16A63-BD98-5CA0-ACDD-0A02A6A7B0FD}"/>
+                <a16:creationId xmlns:a16="http://schemas.microsoft.com/office/drawing/2014/main" id="{ADFA1E54-4B4E-21E8-E2C8-9B8A75C4BC04}"/>
               </a:ext>
             </a:extLst>
           </p:cNvPr>
-          <p:cNvPicPr>
-            <a:picLocks noChangeAspect="1"/>
-          </p:cNvPicPr>
+          <p:cNvSpPr txBox="1"/>
           <p:nvPr/>
-        </p:nvPicPr>
-        <p:blipFill>
-          <a:blip r:embed="rId2"/>
-          <a:stretch>
-            <a:fillRect/>
-          </a:stretch>
-        </p:blipFill>
-        <p:spPr>
-          <a:xfrm>
-            <a:off x="909836" y="908720"/>
-            <a:ext cx="10678856" cy="4680520"/>
+        </p:nvSpPr>
+        <p:spPr>
+          <a:xfrm>
+            <a:off x="765820" y="260648"/>
+            <a:ext cx="2597186" cy="443198"/>
           </a:xfrm>
           <a:prstGeom prst="rect">
             <a:avLst/>
           </a:prstGeom>
-        </p:spPr>
-      </p:pic>
+          <a:noFill/>
+        </p:spPr>
+        <p:txBody>
+          <a:bodyPr wrap="square" rtlCol="0">
+            <a:spAutoFit/>
+          </a:bodyPr>
+          <a:lstStyle>
+            <a:defPPr>
+              <a:defRPr lang="en-US"/>
+            </a:defPPr>
+            <a:lvl1pPr>
+              <a:lnSpc>
+                <a:spcPct val="95000"/>
+              </a:lnSpc>
+              <a:defRPr sz="2200" b="1">
+                <a:solidFill>
+                  <a:srgbClr val="FF0000"/>
+                </a:solidFill>
+              </a:defRPr>
+            </a:lvl1pPr>
+          </a:lstStyle>
+          <a:p>
+            <a:r>
+              <a:rPr lang="en-IN" dirty="0"/>
+              <a:t>Software Testing</a:t>
+            </a:r>
+          </a:p>
+        </p:txBody>
+      </p:sp>
+      <p:sp>
+        <p:nvSpPr>
+          <p:cNvPr id="5" name="TextBox 4">
+            <a:extLst>
+              <a:ext uri="{FF2B5EF4-FFF2-40B4-BE49-F238E27FC236}">
+                <a16:creationId xmlns:a16="http://schemas.microsoft.com/office/drawing/2014/main" id="{81A264AF-698A-C750-7C14-F6527F54896A}"/>
+              </a:ext>
+            </a:extLst>
+          </p:cNvPr>
+          <p:cNvSpPr txBox="1"/>
+          <p:nvPr/>
+        </p:nvSpPr>
+        <p:spPr>
+          <a:xfrm>
+            <a:off x="765820" y="674607"/>
+            <a:ext cx="6942926" cy="536622"/>
+          </a:xfrm>
+          <a:prstGeom prst="rect">
+            <a:avLst/>
+          </a:prstGeom>
+          <a:noFill/>
+        </p:spPr>
+        <p:txBody>
+          <a:bodyPr wrap="square" rtlCol="0">
+            <a:spAutoFit/>
+          </a:bodyPr>
+          <a:lstStyle>
+            <a:defPPr>
+              <a:defRPr lang="en-US"/>
+            </a:defPPr>
+            <a:lvl1pPr>
+              <a:lnSpc>
+                <a:spcPct val="150000"/>
+              </a:lnSpc>
+              <a:defRPr sz="2200"/>
+            </a:lvl1pPr>
+          </a:lstStyle>
+          <a:p>
+            <a:r>
+              <a:rPr lang="en-US" dirty="0"/>
+              <a:t>Imagine you have bought a new smartphone 📱</a:t>
+            </a:r>
+            <a:endParaRPr lang="en-IN" dirty="0"/>
+          </a:p>
+        </p:txBody>
+      </p:sp>
+      <p:sp>
+        <p:nvSpPr>
+          <p:cNvPr id="6" name="TextBox 5">
+            <a:extLst>
+              <a:ext uri="{FF2B5EF4-FFF2-40B4-BE49-F238E27FC236}">
+                <a16:creationId xmlns:a16="http://schemas.microsoft.com/office/drawing/2014/main" id="{1AC7A405-F382-7AD5-E96D-D150AE69DDEF}"/>
+              </a:ext>
+            </a:extLst>
+          </p:cNvPr>
+          <p:cNvSpPr txBox="1"/>
+          <p:nvPr/>
+        </p:nvSpPr>
+        <p:spPr>
+          <a:xfrm>
+            <a:off x="765820" y="1211229"/>
+            <a:ext cx="6923690" cy="535788"/>
+          </a:xfrm>
+          <a:prstGeom prst="rect">
+            <a:avLst/>
+          </a:prstGeom>
+          <a:noFill/>
+        </p:spPr>
+        <p:txBody>
+          <a:bodyPr wrap="square" rtlCol="0">
+            <a:spAutoFit/>
+          </a:bodyPr>
+          <a:lstStyle>
+            <a:defPPr>
+              <a:defRPr lang="en-US"/>
+            </a:defPPr>
+            <a:lvl1pPr>
+              <a:lnSpc>
+                <a:spcPct val="150000"/>
+              </a:lnSpc>
+              <a:defRPr sz="2200"/>
+            </a:lvl1pPr>
+          </a:lstStyle>
+          <a:p>
+            <a:r>
+              <a:rPr lang="en-US" dirty="0"/>
+              <a:t>Before using it, you naturally check several things:</a:t>
+            </a:r>
+            <a:endParaRPr lang="en-IN" dirty="0"/>
+          </a:p>
+        </p:txBody>
+      </p:sp>
+      <p:sp>
+        <p:nvSpPr>
+          <p:cNvPr id="7" name="TextBox 6">
+            <a:extLst>
+              <a:ext uri="{FF2B5EF4-FFF2-40B4-BE49-F238E27FC236}">
+                <a16:creationId xmlns:a16="http://schemas.microsoft.com/office/drawing/2014/main" id="{2E1C27B6-6F9A-C4CD-6948-B53B92A7F9C5}"/>
+              </a:ext>
+            </a:extLst>
+          </p:cNvPr>
+          <p:cNvSpPr txBox="1"/>
+          <p:nvPr/>
+        </p:nvSpPr>
+        <p:spPr>
+          <a:xfrm>
+            <a:off x="837828" y="1747017"/>
+            <a:ext cx="8640960" cy="2060308"/>
+          </a:xfrm>
+          <a:prstGeom prst="rect">
+            <a:avLst/>
+          </a:prstGeom>
+          <a:noFill/>
+        </p:spPr>
+        <p:txBody>
+          <a:bodyPr wrap="square" rtlCol="0">
+            <a:spAutoFit/>
+          </a:bodyPr>
+          <a:lstStyle>
+            <a:defPPr>
+              <a:defRPr lang="en-US"/>
+            </a:defPPr>
+            <a:lvl1pPr>
+              <a:lnSpc>
+                <a:spcPct val="150000"/>
+              </a:lnSpc>
+              <a:defRPr sz="2200"/>
+            </a:lvl1pPr>
+          </a:lstStyle>
+          <a:p>
+            <a:pPr marL="342900" indent="-342900">
+              <a:buFont typeface="Arial" panose="020B0604020202020204" pitchFamily="34" charset="0"/>
+              <a:buChar char="•"/>
+            </a:pPr>
+            <a:r>
+              <a:rPr lang="en-US" dirty="0"/>
+              <a:t>Does it make calls? ☎️</a:t>
+            </a:r>
+          </a:p>
+          <a:p>
+            <a:pPr marL="342900" indent="-342900">
+              <a:buFont typeface="Arial" panose="020B0604020202020204" pitchFamily="34" charset="0"/>
+              <a:buChar char="•"/>
+            </a:pPr>
+            <a:r>
+              <a:rPr lang="en-US" dirty="0"/>
+              <a:t>Is the screen easy to use? 👆</a:t>
+            </a:r>
+          </a:p>
+          <a:p>
+            <a:pPr marL="342900" indent="-342900">
+              <a:buFont typeface="Arial" panose="020B0604020202020204" pitchFamily="34" charset="0"/>
+              <a:buChar char="•"/>
+            </a:pPr>
+            <a:r>
+              <a:rPr lang="en-US" dirty="0"/>
+              <a:t>Does it become slow when many apps are open? 🐢</a:t>
+            </a:r>
+          </a:p>
+          <a:p>
+            <a:pPr marL="342900" indent="-342900">
+              <a:buFont typeface="Arial" panose="020B0604020202020204" pitchFamily="34" charset="0"/>
+              <a:buChar char="•"/>
+            </a:pPr>
+            <a:r>
+              <a:rPr lang="en-US" dirty="0"/>
+              <a:t>Is your fingerprint data secure? 🔒</a:t>
+            </a:r>
+            <a:endParaRPr lang="en-IN" dirty="0"/>
+          </a:p>
+        </p:txBody>
+      </p:sp>
+      <p:sp>
+        <p:nvSpPr>
+          <p:cNvPr id="9" name="TextBox 8">
+            <a:extLst>
+              <a:ext uri="{FF2B5EF4-FFF2-40B4-BE49-F238E27FC236}">
+                <a16:creationId xmlns:a16="http://schemas.microsoft.com/office/drawing/2014/main" id="{A9124B0B-0E75-2440-4CD1-D76B2FCFDE0F}"/>
+              </a:ext>
+            </a:extLst>
+          </p:cNvPr>
+          <p:cNvSpPr txBox="1"/>
+          <p:nvPr/>
+        </p:nvSpPr>
+        <p:spPr>
+          <a:xfrm>
+            <a:off x="621804" y="4149080"/>
+            <a:ext cx="10585176" cy="1043619"/>
+          </a:xfrm>
+          <a:prstGeom prst="rect">
+            <a:avLst/>
+          </a:prstGeom>
+          <a:noFill/>
+        </p:spPr>
+        <p:txBody>
+          <a:bodyPr wrap="square" rtlCol="0">
+            <a:spAutoFit/>
+          </a:bodyPr>
+          <a:lstStyle>
+            <a:defPPr>
+              <a:defRPr lang="en-US"/>
+            </a:defPPr>
+            <a:lvl1pPr>
+              <a:lnSpc>
+                <a:spcPct val="150000"/>
+              </a:lnSpc>
+              <a:defRPr sz="2200"/>
+            </a:lvl1pPr>
+          </a:lstStyle>
+          <a:p>
+            <a:r>
+              <a:rPr lang="en-US" dirty="0"/>
+              <a:t>Similarly, software applications also undergo different kinds of testing before they are released.</a:t>
+            </a:r>
+            <a:endParaRPr lang="en-IN" dirty="0"/>
+          </a:p>
+        </p:txBody>
+      </p:sp>
     </p:spTree>
     <p:extLst>
       <p:ext uri="{BB962C8B-B14F-4D97-AF65-F5344CB8AC3E}">
-        <p14:creationId xmlns:p14="http://schemas.microsoft.com/office/powerpoint/2010/main" val="670635515"/>
+        <p14:creationId xmlns:p14="http://schemas.microsoft.com/office/powerpoint/2010/main" val="2110656651"/>
       </p:ext>
     </p:extLst>
   </p:cSld>
@@ -11745,6 +12951,2436 @@
     <p:extLst>
       <p:ext uri="{BB962C8B-B14F-4D97-AF65-F5344CB8AC3E}">
         <p14:creationId xmlns:p14="http://schemas.microsoft.com/office/powerpoint/2010/main" val="1840801394"/>
+      </p:ext>
+    </p:extLst>
+  </p:cSld>
+  <p:clrMapOvr>
+    <a:masterClrMapping/>
+  </p:clrMapOvr>
+  <mc:AlternateContent xmlns:mc="http://schemas.openxmlformats.org/markup-compatibility/2006" xmlns:p14="http://schemas.microsoft.com/office/powerpoint/2010/main">
+    <mc:Choice Requires="p14">
+      <p:transition spd="med" p14:dur="700">
+        <p:fade/>
+      </p:transition>
+    </mc:Choice>
+    <mc:Fallback xmlns="">
+      <p:transition spd="med">
+        <p:fade/>
+      </p:transition>
+    </mc:Fallback>
+  </mc:AlternateContent>
+</p:sld>
+</file>
+
+<file path=ppt/slides/slide30.xml><?xml version="1.0" encoding="utf-8"?>
+<p:sld xmlns:a="http://schemas.openxmlformats.org/drawingml/2006/main" xmlns:r="http://schemas.openxmlformats.org/officeDocument/2006/relationships" xmlns:p="http://schemas.openxmlformats.org/presentationml/2006/main">
+  <p:cSld>
+    <p:spTree>
+      <p:nvGrpSpPr>
+        <p:cNvPr id="1" name=""/>
+        <p:cNvGrpSpPr/>
+        <p:nvPr/>
+      </p:nvGrpSpPr>
+      <p:grpSpPr>
+        <a:xfrm>
+          <a:off x="0" y="0"/>
+          <a:ext cx="0" cy="0"/>
+          <a:chOff x="0" y="0"/>
+          <a:chExt cx="0" cy="0"/>
+        </a:xfrm>
+      </p:grpSpPr>
+      <p:sp>
+        <p:nvSpPr>
+          <p:cNvPr id="4" name="TextBox 3">
+            <a:extLst>
+              <a:ext uri="{FF2B5EF4-FFF2-40B4-BE49-F238E27FC236}">
+                <a16:creationId xmlns:a16="http://schemas.microsoft.com/office/drawing/2014/main" id="{896B039C-C6EF-6589-CF80-6737C4F70D56}"/>
+              </a:ext>
+            </a:extLst>
+          </p:cNvPr>
+          <p:cNvSpPr txBox="1"/>
+          <p:nvPr/>
+        </p:nvSpPr>
+        <p:spPr>
+          <a:xfrm>
+            <a:off x="981844" y="332656"/>
+            <a:ext cx="3926075" cy="443198"/>
+          </a:xfrm>
+          <a:prstGeom prst="rect">
+            <a:avLst/>
+          </a:prstGeom>
+          <a:noFill/>
+        </p:spPr>
+        <p:txBody>
+          <a:bodyPr wrap="square" rtlCol="0">
+            <a:spAutoFit/>
+          </a:bodyPr>
+          <a:lstStyle>
+            <a:defPPr>
+              <a:defRPr lang="en-US"/>
+            </a:defPPr>
+            <a:lvl1pPr>
+              <a:lnSpc>
+                <a:spcPct val="95000"/>
+              </a:lnSpc>
+              <a:defRPr sz="2200" b="1">
+                <a:solidFill>
+                  <a:srgbClr val="FF0000"/>
+                </a:solidFill>
+              </a:defRPr>
+            </a:lvl1pPr>
+          </a:lstStyle>
+          <a:p>
+            <a:r>
+              <a:rPr lang="en-IN" dirty="0"/>
+              <a:t>What is Software Testing?</a:t>
+            </a:r>
+          </a:p>
+        </p:txBody>
+      </p:sp>
+      <p:sp>
+        <p:nvSpPr>
+          <p:cNvPr id="5" name="TextBox 4">
+            <a:extLst>
+              <a:ext uri="{FF2B5EF4-FFF2-40B4-BE49-F238E27FC236}">
+                <a16:creationId xmlns:a16="http://schemas.microsoft.com/office/drawing/2014/main" id="{5C09A29D-C167-769D-8555-B7060E1EC80B}"/>
+              </a:ext>
+            </a:extLst>
+          </p:cNvPr>
+          <p:cNvSpPr txBox="1"/>
+          <p:nvPr/>
+        </p:nvSpPr>
+        <p:spPr>
+          <a:xfrm>
+            <a:off x="981844" y="836712"/>
+            <a:ext cx="10513168" cy="1144929"/>
+          </a:xfrm>
+          <a:prstGeom prst="rect">
+            <a:avLst/>
+          </a:prstGeom>
+          <a:noFill/>
+        </p:spPr>
+        <p:txBody>
+          <a:bodyPr wrap="square" rtlCol="0">
+            <a:spAutoFit/>
+          </a:bodyPr>
+          <a:lstStyle>
+            <a:defPPr>
+              <a:defRPr lang="en-US"/>
+            </a:defPPr>
+            <a:lvl1pPr>
+              <a:lnSpc>
+                <a:spcPct val="150000"/>
+              </a:lnSpc>
+              <a:defRPr sz="2200"/>
+            </a:lvl1pPr>
+          </a:lstStyle>
+          <a:p>
+            <a:r>
+              <a:rPr lang="en-US" dirty="0"/>
+              <a:t>Software Testing is the process of checking whether a software application works correctly, meets user requirements, and is free from defects</a:t>
+            </a:r>
+            <a:endParaRPr lang="en-IN" dirty="0"/>
+          </a:p>
+        </p:txBody>
+      </p:sp>
+      <p:sp>
+        <p:nvSpPr>
+          <p:cNvPr id="6" name="TextBox 5">
+            <a:extLst>
+              <a:ext uri="{FF2B5EF4-FFF2-40B4-BE49-F238E27FC236}">
+                <a16:creationId xmlns:a16="http://schemas.microsoft.com/office/drawing/2014/main" id="{81002E4C-42D8-420B-928A-492898AA9ED2}"/>
+              </a:ext>
+            </a:extLst>
+          </p:cNvPr>
+          <p:cNvSpPr txBox="1"/>
+          <p:nvPr/>
+        </p:nvSpPr>
+        <p:spPr>
+          <a:xfrm>
+            <a:off x="1125860" y="2204864"/>
+            <a:ext cx="5960286" cy="2289858"/>
+          </a:xfrm>
+          <a:prstGeom prst="rect">
+            <a:avLst/>
+          </a:prstGeom>
+          <a:noFill/>
+        </p:spPr>
+        <p:txBody>
+          <a:bodyPr wrap="square" rtlCol="0">
+            <a:spAutoFit/>
+          </a:bodyPr>
+          <a:lstStyle>
+            <a:defPPr>
+              <a:defRPr lang="en-US"/>
+            </a:defPPr>
+            <a:lvl1pPr>
+              <a:lnSpc>
+                <a:spcPct val="150000"/>
+              </a:lnSpc>
+              <a:defRPr sz="2200"/>
+            </a:lvl1pPr>
+          </a:lstStyle>
+          <a:p>
+            <a:r>
+              <a:rPr lang="en-US" dirty="0"/>
+              <a:t>Its goal is to ensure that the software is:</a:t>
+            </a:r>
+          </a:p>
+          <a:p>
+            <a:pPr marL="342900" indent="-342900">
+              <a:buFont typeface="Arial" panose="020B0604020202020204" pitchFamily="34" charset="0"/>
+              <a:buChar char="•"/>
+            </a:pPr>
+            <a:r>
+              <a:rPr lang="en-US" dirty="0"/>
+              <a:t>Correct ✅ </a:t>
+            </a:r>
+          </a:p>
+          <a:p>
+            <a:pPr marL="342900" indent="-342900">
+              <a:buFont typeface="Arial" panose="020B0604020202020204" pitchFamily="34" charset="0"/>
+              <a:buChar char="•"/>
+            </a:pPr>
+            <a:r>
+              <a:rPr lang="en-US" dirty="0"/>
+              <a:t>Fast ⚡ </a:t>
+            </a:r>
+          </a:p>
+          <a:p>
+            <a:pPr marL="342900" indent="-342900">
+              <a:buFont typeface="Arial" panose="020B0604020202020204" pitchFamily="34" charset="0"/>
+              <a:buChar char="•"/>
+            </a:pPr>
+            <a:r>
+              <a:rPr lang="en-US" dirty="0"/>
+              <a:t>Secure 🔒 </a:t>
+            </a:r>
+          </a:p>
+          <a:p>
+            <a:pPr marL="342900" indent="-342900">
+              <a:buFont typeface="Arial" panose="020B0604020202020204" pitchFamily="34" charset="0"/>
+              <a:buChar char="•"/>
+            </a:pPr>
+            <a:r>
+              <a:rPr lang="en-US" dirty="0"/>
+              <a:t>User-friendly 😊</a:t>
+            </a:r>
+          </a:p>
+          <a:p>
+            <a:endParaRPr lang="en-IN" dirty="0"/>
+          </a:p>
+        </p:txBody>
+      </p:sp>
+    </p:spTree>
+    <p:extLst>
+      <p:ext uri="{BB962C8B-B14F-4D97-AF65-F5344CB8AC3E}">
+        <p14:creationId xmlns:p14="http://schemas.microsoft.com/office/powerpoint/2010/main" val="2539598359"/>
+      </p:ext>
+    </p:extLst>
+  </p:cSld>
+  <p:clrMapOvr>
+    <a:masterClrMapping/>
+  </p:clrMapOvr>
+  <mc:AlternateContent xmlns:mc="http://schemas.openxmlformats.org/markup-compatibility/2006" xmlns:p14="http://schemas.microsoft.com/office/powerpoint/2010/main">
+    <mc:Choice Requires="p14">
+      <p:transition spd="med" p14:dur="700">
+        <p:fade/>
+      </p:transition>
+    </mc:Choice>
+    <mc:Fallback xmlns="">
+      <p:transition spd="med">
+        <p:fade/>
+      </p:transition>
+    </mc:Fallback>
+  </mc:AlternateContent>
+</p:sld>
+</file>
+
+<file path=ppt/slides/slide31.xml><?xml version="1.0" encoding="utf-8"?>
+<p:sld xmlns:a="http://schemas.openxmlformats.org/drawingml/2006/main" xmlns:r="http://schemas.openxmlformats.org/officeDocument/2006/relationships" xmlns:p="http://schemas.openxmlformats.org/presentationml/2006/main">
+  <p:cSld>
+    <p:spTree>
+      <p:nvGrpSpPr>
+        <p:cNvPr id="1" name=""/>
+        <p:cNvGrpSpPr/>
+        <p:nvPr/>
+      </p:nvGrpSpPr>
+      <p:grpSpPr>
+        <a:xfrm>
+          <a:off x="0" y="0"/>
+          <a:ext cx="0" cy="0"/>
+          <a:chOff x="0" y="0"/>
+          <a:chExt cx="0" cy="0"/>
+        </a:xfrm>
+      </p:grpSpPr>
+      <p:sp>
+        <p:nvSpPr>
+          <p:cNvPr id="4" name="TextBox 3">
+            <a:extLst>
+              <a:ext uri="{FF2B5EF4-FFF2-40B4-BE49-F238E27FC236}">
+                <a16:creationId xmlns:a16="http://schemas.microsoft.com/office/drawing/2014/main" id="{D14BBB98-1725-2A36-BCAC-CAEC1CEB566B}"/>
+              </a:ext>
+            </a:extLst>
+          </p:cNvPr>
+          <p:cNvSpPr txBox="1"/>
+          <p:nvPr/>
+        </p:nvSpPr>
+        <p:spPr>
+          <a:xfrm>
+            <a:off x="1053852" y="332656"/>
+            <a:ext cx="3499676" cy="443198"/>
+          </a:xfrm>
+          <a:prstGeom prst="rect">
+            <a:avLst/>
+          </a:prstGeom>
+          <a:noFill/>
+        </p:spPr>
+        <p:txBody>
+          <a:bodyPr wrap="square" rtlCol="0">
+            <a:spAutoFit/>
+          </a:bodyPr>
+          <a:lstStyle>
+            <a:defPPr>
+              <a:defRPr lang="en-US"/>
+            </a:defPPr>
+            <a:lvl1pPr>
+              <a:lnSpc>
+                <a:spcPct val="95000"/>
+              </a:lnSpc>
+              <a:defRPr sz="2200" b="1">
+                <a:solidFill>
+                  <a:srgbClr val="FF0000"/>
+                </a:solidFill>
+              </a:defRPr>
+            </a:lvl1pPr>
+          </a:lstStyle>
+          <a:p>
+            <a:r>
+              <a:rPr lang="en-IN" dirty="0"/>
+              <a:t>1. Functionality Testing</a:t>
+            </a:r>
+          </a:p>
+        </p:txBody>
+      </p:sp>
+      <p:sp>
+        <p:nvSpPr>
+          <p:cNvPr id="5" name="TextBox 4">
+            <a:extLst>
+              <a:ext uri="{FF2B5EF4-FFF2-40B4-BE49-F238E27FC236}">
+                <a16:creationId xmlns:a16="http://schemas.microsoft.com/office/drawing/2014/main" id="{2D5B81A4-D5BD-54E4-3D1B-E4CD8897E35B}"/>
+              </a:ext>
+            </a:extLst>
+          </p:cNvPr>
+          <p:cNvSpPr txBox="1"/>
+          <p:nvPr/>
+        </p:nvSpPr>
+        <p:spPr>
+          <a:xfrm>
+            <a:off x="1053852" y="836712"/>
+            <a:ext cx="8983550" cy="535788"/>
+          </a:xfrm>
+          <a:prstGeom prst="rect">
+            <a:avLst/>
+          </a:prstGeom>
+          <a:noFill/>
+        </p:spPr>
+        <p:txBody>
+          <a:bodyPr wrap="square" rtlCol="0">
+            <a:spAutoFit/>
+          </a:bodyPr>
+          <a:lstStyle>
+            <a:defPPr>
+              <a:defRPr lang="en-US"/>
+            </a:defPPr>
+            <a:lvl1pPr>
+              <a:lnSpc>
+                <a:spcPct val="150000"/>
+              </a:lnSpc>
+              <a:defRPr sz="2200"/>
+            </a:lvl1pPr>
+          </a:lstStyle>
+          <a:p>
+            <a:r>
+              <a:rPr lang="en-US" dirty="0"/>
+              <a:t>It verifies that every feature works according to the requirements</a:t>
+            </a:r>
+            <a:endParaRPr lang="en-IN" dirty="0"/>
+          </a:p>
+        </p:txBody>
+      </p:sp>
+      <p:sp>
+        <p:nvSpPr>
+          <p:cNvPr id="6" name="TextBox 5">
+            <a:extLst>
+              <a:ext uri="{FF2B5EF4-FFF2-40B4-BE49-F238E27FC236}">
+                <a16:creationId xmlns:a16="http://schemas.microsoft.com/office/drawing/2014/main" id="{1CF27282-939B-4BCA-3630-342421E63B16}"/>
+              </a:ext>
+            </a:extLst>
+          </p:cNvPr>
+          <p:cNvSpPr txBox="1"/>
+          <p:nvPr/>
+        </p:nvSpPr>
+        <p:spPr>
+          <a:xfrm>
+            <a:off x="837828" y="1462597"/>
+            <a:ext cx="5166799" cy="3074944"/>
+          </a:xfrm>
+          <a:prstGeom prst="rect">
+            <a:avLst/>
+          </a:prstGeom>
+          <a:noFill/>
+        </p:spPr>
+        <p:txBody>
+          <a:bodyPr wrap="square" rtlCol="0">
+            <a:spAutoFit/>
+          </a:bodyPr>
+          <a:lstStyle>
+            <a:defPPr>
+              <a:defRPr lang="en-US"/>
+            </a:defPPr>
+            <a:lvl1pPr>
+              <a:lnSpc>
+                <a:spcPct val="150000"/>
+              </a:lnSpc>
+              <a:defRPr sz="2200"/>
+            </a:lvl1pPr>
+          </a:lstStyle>
+          <a:p>
+            <a:r>
+              <a:rPr lang="en-US" dirty="0"/>
+              <a:t>Imagine buying a washing machine.</a:t>
+            </a:r>
+          </a:p>
+          <a:p>
+            <a:r>
+              <a:rPr lang="en-US" dirty="0"/>
+              <a:t>You check:</a:t>
+            </a:r>
+          </a:p>
+          <a:p>
+            <a:pPr marL="342900" indent="-342900">
+              <a:buFont typeface="Arial" panose="020B0604020202020204" pitchFamily="34" charset="0"/>
+              <a:buChar char="•"/>
+            </a:pPr>
+            <a:r>
+              <a:rPr lang="en-US" dirty="0"/>
+              <a:t>Does it wash clothes? </a:t>
+            </a:r>
+          </a:p>
+          <a:p>
+            <a:pPr marL="342900" indent="-342900">
+              <a:buFont typeface="Arial" panose="020B0604020202020204" pitchFamily="34" charset="0"/>
+              <a:buChar char="•"/>
+            </a:pPr>
+            <a:r>
+              <a:rPr lang="en-US" dirty="0"/>
+              <a:t>Does the spin mode work? </a:t>
+            </a:r>
+          </a:p>
+          <a:p>
+            <a:pPr marL="342900" indent="-342900">
+              <a:buFont typeface="Arial" panose="020B0604020202020204" pitchFamily="34" charset="0"/>
+              <a:buChar char="•"/>
+            </a:pPr>
+            <a:r>
+              <a:rPr lang="en-US" dirty="0"/>
+              <a:t>Does the timer function correctly?</a:t>
+            </a:r>
+          </a:p>
+          <a:p>
+            <a:endParaRPr lang="en-IN" dirty="0"/>
+          </a:p>
+        </p:txBody>
+      </p:sp>
+      <p:sp>
+        <p:nvSpPr>
+          <p:cNvPr id="7" name="TextBox 6">
+            <a:extLst>
+              <a:ext uri="{FF2B5EF4-FFF2-40B4-BE49-F238E27FC236}">
+                <a16:creationId xmlns:a16="http://schemas.microsoft.com/office/drawing/2014/main" id="{BE891805-783C-6E8E-288A-D176050329CE}"/>
+              </a:ext>
+            </a:extLst>
+          </p:cNvPr>
+          <p:cNvSpPr txBox="1"/>
+          <p:nvPr/>
+        </p:nvSpPr>
+        <p:spPr>
+          <a:xfrm>
+            <a:off x="837828" y="4359840"/>
+            <a:ext cx="4394152" cy="535596"/>
+          </a:xfrm>
+          <a:prstGeom prst="rect">
+            <a:avLst/>
+          </a:prstGeom>
+          <a:noFill/>
+        </p:spPr>
+        <p:txBody>
+          <a:bodyPr wrap="square" rtlCol="0">
+            <a:spAutoFit/>
+          </a:bodyPr>
+          <a:lstStyle>
+            <a:defPPr>
+              <a:defRPr lang="en-US"/>
+            </a:defPPr>
+            <a:lvl1pPr>
+              <a:lnSpc>
+                <a:spcPct val="150000"/>
+              </a:lnSpc>
+              <a:defRPr sz="2200"/>
+            </a:lvl1pPr>
+          </a:lstStyle>
+          <a:p>
+            <a:r>
+              <a:rPr lang="en-US" dirty="0"/>
+              <a:t>You are testing its </a:t>
+            </a:r>
+            <a:r>
+              <a:rPr lang="en-US" b="1" dirty="0"/>
+              <a:t>functionality</a:t>
+            </a:r>
+            <a:r>
+              <a:rPr lang="en-US" dirty="0"/>
+              <a:t>.</a:t>
+            </a:r>
+            <a:endParaRPr lang="en-IN" dirty="0"/>
+          </a:p>
+        </p:txBody>
+      </p:sp>
+      <p:sp>
+        <p:nvSpPr>
+          <p:cNvPr id="8" name="TextBox 7">
+            <a:extLst>
+              <a:ext uri="{FF2B5EF4-FFF2-40B4-BE49-F238E27FC236}">
+                <a16:creationId xmlns:a16="http://schemas.microsoft.com/office/drawing/2014/main" id="{07AE39AA-8996-BD00-C66E-89D6AF2999B1}"/>
+              </a:ext>
+            </a:extLst>
+          </p:cNvPr>
+          <p:cNvSpPr txBox="1"/>
+          <p:nvPr/>
+        </p:nvSpPr>
+        <p:spPr>
+          <a:xfrm>
+            <a:off x="6454452" y="1462597"/>
+            <a:ext cx="5424883" cy="4598438"/>
+          </a:xfrm>
+          <a:prstGeom prst="rect">
+            <a:avLst/>
+          </a:prstGeom>
+          <a:noFill/>
+        </p:spPr>
+        <p:txBody>
+          <a:bodyPr wrap="square" rtlCol="0">
+            <a:spAutoFit/>
+          </a:bodyPr>
+          <a:lstStyle>
+            <a:defPPr>
+              <a:defRPr lang="en-US"/>
+            </a:defPPr>
+            <a:lvl1pPr>
+              <a:lnSpc>
+                <a:spcPct val="150000"/>
+              </a:lnSpc>
+              <a:defRPr sz="2200"/>
+            </a:lvl1pPr>
+          </a:lstStyle>
+          <a:p>
+            <a:r>
+              <a:rPr lang="en-US" dirty="0"/>
+              <a:t>Consider an Online Shopping Website.</a:t>
+            </a:r>
+          </a:p>
+          <a:p>
+            <a:r>
+              <a:rPr lang="en-US" dirty="0"/>
+              <a:t>Things to test:</a:t>
+            </a:r>
+          </a:p>
+          <a:p>
+            <a:r>
+              <a:rPr lang="en-US" dirty="0"/>
+              <a:t>✅ Login works</a:t>
+            </a:r>
+          </a:p>
+          <a:p>
+            <a:r>
+              <a:rPr lang="en-US" dirty="0"/>
+              <a:t>✅ Search products</a:t>
+            </a:r>
+          </a:p>
+          <a:p>
+            <a:r>
+              <a:rPr lang="en-US" dirty="0"/>
+              <a:t>✅ Add to Cart</a:t>
+            </a:r>
+          </a:p>
+          <a:p>
+            <a:r>
+              <a:rPr lang="en-US" dirty="0"/>
+              <a:t>✅ Remove from Cart</a:t>
+            </a:r>
+          </a:p>
+          <a:p>
+            <a:r>
+              <a:rPr lang="en-US" dirty="0"/>
+              <a:t>✅ Place Order</a:t>
+            </a:r>
+          </a:p>
+          <a:p>
+            <a:r>
+              <a:rPr lang="en-US" dirty="0"/>
+              <a:t>✅ Payment succeeds</a:t>
+            </a:r>
+          </a:p>
+          <a:p>
+            <a:endParaRPr lang="en-IN" dirty="0"/>
+          </a:p>
+        </p:txBody>
+      </p:sp>
+      <p:sp>
+        <p:nvSpPr>
+          <p:cNvPr id="9" name="TextBox 8">
+            <a:extLst>
+              <a:ext uri="{FF2B5EF4-FFF2-40B4-BE49-F238E27FC236}">
+                <a16:creationId xmlns:a16="http://schemas.microsoft.com/office/drawing/2014/main" id="{D5BE90F3-FF15-BDAD-74DE-2F9AB544F183}"/>
+              </a:ext>
+            </a:extLst>
+          </p:cNvPr>
+          <p:cNvSpPr txBox="1"/>
+          <p:nvPr/>
+        </p:nvSpPr>
+        <p:spPr>
+          <a:xfrm>
+            <a:off x="5850439" y="5629322"/>
+            <a:ext cx="6335040" cy="1043619"/>
+          </a:xfrm>
+          <a:prstGeom prst="rect">
+            <a:avLst/>
+          </a:prstGeom>
+          <a:noFill/>
+        </p:spPr>
+        <p:txBody>
+          <a:bodyPr wrap="square" rtlCol="0">
+            <a:spAutoFit/>
+          </a:bodyPr>
+          <a:lstStyle>
+            <a:defPPr>
+              <a:defRPr lang="en-US"/>
+            </a:defPPr>
+            <a:lvl1pPr>
+              <a:lnSpc>
+                <a:spcPct val="150000"/>
+              </a:lnSpc>
+              <a:defRPr sz="2200"/>
+            </a:lvl1pPr>
+          </a:lstStyle>
+          <a:p>
+            <a:r>
+              <a:rPr lang="en-US" dirty="0"/>
+              <a:t>If all these features work correctly, the functionality is correct.</a:t>
+            </a:r>
+            <a:endParaRPr lang="en-IN" dirty="0"/>
+          </a:p>
+        </p:txBody>
+      </p:sp>
+    </p:spTree>
+    <p:extLst>
+      <p:ext uri="{BB962C8B-B14F-4D97-AF65-F5344CB8AC3E}">
+        <p14:creationId xmlns:p14="http://schemas.microsoft.com/office/powerpoint/2010/main" val="3092331678"/>
+      </p:ext>
+    </p:extLst>
+  </p:cSld>
+  <p:clrMapOvr>
+    <a:masterClrMapping/>
+  </p:clrMapOvr>
+  <mc:AlternateContent xmlns:mc="http://schemas.openxmlformats.org/markup-compatibility/2006" xmlns:p14="http://schemas.microsoft.com/office/powerpoint/2010/main">
+    <mc:Choice Requires="p14">
+      <p:transition spd="med" p14:dur="700">
+        <p:fade/>
+      </p:transition>
+    </mc:Choice>
+    <mc:Fallback xmlns="">
+      <p:transition spd="med">
+        <p:fade/>
+      </p:transition>
+    </mc:Fallback>
+  </mc:AlternateContent>
+</p:sld>
+</file>
+
+<file path=ppt/slides/slide32.xml><?xml version="1.0" encoding="utf-8"?>
+<p:sld xmlns:a="http://schemas.openxmlformats.org/drawingml/2006/main" xmlns:r="http://schemas.openxmlformats.org/officeDocument/2006/relationships" xmlns:p="http://schemas.openxmlformats.org/presentationml/2006/main">
+  <p:cSld>
+    <p:spTree>
+      <p:nvGrpSpPr>
+        <p:cNvPr id="1" name=""/>
+        <p:cNvGrpSpPr/>
+        <p:nvPr/>
+      </p:nvGrpSpPr>
+      <p:grpSpPr>
+        <a:xfrm>
+          <a:off x="0" y="0"/>
+          <a:ext cx="0" cy="0"/>
+          <a:chOff x="0" y="0"/>
+          <a:chExt cx="0" cy="0"/>
+        </a:xfrm>
+      </p:grpSpPr>
+      <p:sp>
+        <p:nvSpPr>
+          <p:cNvPr id="4" name="TextBox 3">
+            <a:extLst>
+              <a:ext uri="{FF2B5EF4-FFF2-40B4-BE49-F238E27FC236}">
+                <a16:creationId xmlns:a16="http://schemas.microsoft.com/office/drawing/2014/main" id="{D1298DEE-D799-A2EB-489F-890057344FB5}"/>
+              </a:ext>
+            </a:extLst>
+          </p:cNvPr>
+          <p:cNvSpPr txBox="1"/>
+          <p:nvPr/>
+        </p:nvSpPr>
+        <p:spPr>
+          <a:xfrm>
+            <a:off x="909836" y="332656"/>
+            <a:ext cx="5360763" cy="443198"/>
+          </a:xfrm>
+          <a:prstGeom prst="rect">
+            <a:avLst/>
+          </a:prstGeom>
+          <a:noFill/>
+        </p:spPr>
+        <p:txBody>
+          <a:bodyPr wrap="square" rtlCol="0">
+            <a:spAutoFit/>
+          </a:bodyPr>
+          <a:lstStyle>
+            <a:defPPr>
+              <a:defRPr lang="en-US"/>
+            </a:defPPr>
+            <a:lvl1pPr>
+              <a:lnSpc>
+                <a:spcPct val="95000"/>
+              </a:lnSpc>
+              <a:defRPr sz="2200" b="1">
+                <a:solidFill>
+                  <a:srgbClr val="FF0000"/>
+                </a:solidFill>
+              </a:defRPr>
+            </a:lvl1pPr>
+          </a:lstStyle>
+          <a:p>
+            <a:r>
+              <a:rPr lang="en-IN" dirty="0"/>
+              <a:t>2. UI Testing (User Interface Testing)</a:t>
+            </a:r>
+          </a:p>
+        </p:txBody>
+      </p:sp>
+      <p:sp>
+        <p:nvSpPr>
+          <p:cNvPr id="5" name="TextBox 4">
+            <a:extLst>
+              <a:ext uri="{FF2B5EF4-FFF2-40B4-BE49-F238E27FC236}">
+                <a16:creationId xmlns:a16="http://schemas.microsoft.com/office/drawing/2014/main" id="{98207364-BF49-42AF-BB54-29E71B57846D}"/>
+              </a:ext>
+            </a:extLst>
+          </p:cNvPr>
+          <p:cNvSpPr txBox="1"/>
+          <p:nvPr/>
+        </p:nvSpPr>
+        <p:spPr>
+          <a:xfrm>
+            <a:off x="981844" y="908720"/>
+            <a:ext cx="9243236" cy="443198"/>
+          </a:xfrm>
+          <a:prstGeom prst="rect">
+            <a:avLst/>
+          </a:prstGeom>
+          <a:noFill/>
+        </p:spPr>
+        <p:txBody>
+          <a:bodyPr wrap="square" rtlCol="0">
+            <a:spAutoFit/>
+          </a:bodyPr>
+          <a:lstStyle>
+            <a:defPPr>
+              <a:defRPr lang="en-US"/>
+            </a:defPPr>
+            <a:lvl1pPr>
+              <a:lnSpc>
+                <a:spcPct val="150000"/>
+              </a:lnSpc>
+              <a:defRPr sz="2200"/>
+            </a:lvl1pPr>
+          </a:lstStyle>
+          <a:p>
+            <a:r>
+              <a:rPr lang="en-US" dirty="0"/>
+              <a:t>It checks the appearance and interaction of the application</a:t>
+            </a:r>
+            <a:endParaRPr lang="en-IN" dirty="0"/>
+          </a:p>
+        </p:txBody>
+      </p:sp>
+      <p:sp>
+        <p:nvSpPr>
+          <p:cNvPr id="6" name="TextBox 5">
+            <a:extLst>
+              <a:ext uri="{FF2B5EF4-FFF2-40B4-BE49-F238E27FC236}">
+                <a16:creationId xmlns:a16="http://schemas.microsoft.com/office/drawing/2014/main" id="{B2D84DC3-C453-533D-C55A-0A48B2676AD1}"/>
+              </a:ext>
+            </a:extLst>
+          </p:cNvPr>
+          <p:cNvSpPr txBox="1"/>
+          <p:nvPr/>
+        </p:nvSpPr>
+        <p:spPr>
+          <a:xfrm>
+            <a:off x="974010" y="1444508"/>
+            <a:ext cx="6479659" cy="535788"/>
+          </a:xfrm>
+          <a:prstGeom prst="rect">
+            <a:avLst/>
+          </a:prstGeom>
+          <a:noFill/>
+        </p:spPr>
+        <p:txBody>
+          <a:bodyPr wrap="square" rtlCol="0">
+            <a:spAutoFit/>
+          </a:bodyPr>
+          <a:lstStyle>
+            <a:defPPr>
+              <a:defRPr lang="en-US"/>
+            </a:defPPr>
+            <a:lvl1pPr>
+              <a:lnSpc>
+                <a:spcPct val="150000"/>
+              </a:lnSpc>
+              <a:defRPr sz="2200"/>
+            </a:lvl1pPr>
+          </a:lstStyle>
+          <a:p>
+            <a:r>
+              <a:rPr lang="en-US" dirty="0"/>
+              <a:t>Suppose two restaurants serve the same food.</a:t>
+            </a:r>
+            <a:endParaRPr lang="en-IN" dirty="0"/>
+          </a:p>
+        </p:txBody>
+      </p:sp>
+      <p:sp>
+        <p:nvSpPr>
+          <p:cNvPr id="7" name="TextBox 6">
+            <a:extLst>
+              <a:ext uri="{FF2B5EF4-FFF2-40B4-BE49-F238E27FC236}">
+                <a16:creationId xmlns:a16="http://schemas.microsoft.com/office/drawing/2014/main" id="{4CB76303-5F05-FEC5-DFA4-C247E1E6E226}"/>
+              </a:ext>
+            </a:extLst>
+          </p:cNvPr>
+          <p:cNvSpPr txBox="1"/>
+          <p:nvPr/>
+        </p:nvSpPr>
+        <p:spPr>
+          <a:xfrm>
+            <a:off x="837828" y="2129431"/>
+            <a:ext cx="3240360" cy="2567113"/>
+          </a:xfrm>
+          <a:prstGeom prst="rect">
+            <a:avLst/>
+          </a:prstGeom>
+          <a:noFill/>
+        </p:spPr>
+        <p:txBody>
+          <a:bodyPr wrap="square" rtlCol="0">
+            <a:spAutoFit/>
+          </a:bodyPr>
+          <a:lstStyle>
+            <a:defPPr>
+              <a:defRPr lang="en-US"/>
+            </a:defPPr>
+            <a:lvl1pPr>
+              <a:lnSpc>
+                <a:spcPct val="150000"/>
+              </a:lnSpc>
+              <a:defRPr sz="2200"/>
+            </a:lvl1pPr>
+          </a:lstStyle>
+          <a:p>
+            <a:r>
+              <a:rPr lang="en-US" dirty="0"/>
+              <a:t>Restaurant A</a:t>
+            </a:r>
+          </a:p>
+          <a:p>
+            <a:pPr marL="342900" indent="-342900">
+              <a:buFont typeface="Arial" panose="020B0604020202020204" pitchFamily="34" charset="0"/>
+              <a:buChar char="•"/>
+            </a:pPr>
+            <a:r>
+              <a:rPr lang="en-US" dirty="0"/>
+              <a:t>Clean tables </a:t>
+            </a:r>
+          </a:p>
+          <a:p>
+            <a:pPr marL="342900" indent="-342900">
+              <a:buFont typeface="Arial" panose="020B0604020202020204" pitchFamily="34" charset="0"/>
+              <a:buChar char="•"/>
+            </a:pPr>
+            <a:r>
+              <a:rPr lang="en-US" dirty="0"/>
+              <a:t>Nice lighting </a:t>
+            </a:r>
+          </a:p>
+          <a:p>
+            <a:pPr marL="342900" indent="-342900">
+              <a:buFont typeface="Arial" panose="020B0604020202020204" pitchFamily="34" charset="0"/>
+              <a:buChar char="•"/>
+            </a:pPr>
+            <a:r>
+              <a:rPr lang="en-US" dirty="0"/>
+              <a:t>Comfortable chairs</a:t>
+            </a:r>
+          </a:p>
+          <a:p>
+            <a:endParaRPr lang="en-IN" dirty="0"/>
+          </a:p>
+        </p:txBody>
+      </p:sp>
+      <p:sp>
+        <p:nvSpPr>
+          <p:cNvPr id="8" name="TextBox 7">
+            <a:extLst>
+              <a:ext uri="{FF2B5EF4-FFF2-40B4-BE49-F238E27FC236}">
+                <a16:creationId xmlns:a16="http://schemas.microsoft.com/office/drawing/2014/main" id="{B56FCA97-4DAE-10AC-8371-1634402F52F5}"/>
+              </a:ext>
+            </a:extLst>
+          </p:cNvPr>
+          <p:cNvSpPr txBox="1"/>
+          <p:nvPr/>
+        </p:nvSpPr>
+        <p:spPr>
+          <a:xfrm>
+            <a:off x="4294212" y="2129431"/>
+            <a:ext cx="2808312" cy="2567113"/>
+          </a:xfrm>
+          <a:prstGeom prst="rect">
+            <a:avLst/>
+          </a:prstGeom>
+          <a:noFill/>
+        </p:spPr>
+        <p:txBody>
+          <a:bodyPr wrap="square" rtlCol="0">
+            <a:spAutoFit/>
+          </a:bodyPr>
+          <a:lstStyle>
+            <a:defPPr>
+              <a:defRPr lang="en-US"/>
+            </a:defPPr>
+            <a:lvl1pPr>
+              <a:lnSpc>
+                <a:spcPct val="150000"/>
+              </a:lnSpc>
+              <a:defRPr sz="2200"/>
+            </a:lvl1pPr>
+          </a:lstStyle>
+          <a:p>
+            <a:r>
+              <a:rPr lang="en-US" dirty="0"/>
+              <a:t>Restaurant B</a:t>
+            </a:r>
+          </a:p>
+          <a:p>
+            <a:pPr marL="342900" indent="-342900">
+              <a:buFont typeface="Arial" panose="020B0604020202020204" pitchFamily="34" charset="0"/>
+              <a:buChar char="•"/>
+            </a:pPr>
+            <a:r>
+              <a:rPr lang="en-US" dirty="0"/>
+              <a:t>Dirty tables </a:t>
+            </a:r>
+          </a:p>
+          <a:p>
+            <a:pPr marL="342900" indent="-342900">
+              <a:buFont typeface="Arial" panose="020B0604020202020204" pitchFamily="34" charset="0"/>
+              <a:buChar char="•"/>
+            </a:pPr>
+            <a:r>
+              <a:rPr lang="en-US" dirty="0"/>
+              <a:t>Broken chairs </a:t>
+            </a:r>
+          </a:p>
+          <a:p>
+            <a:pPr marL="342900" indent="-342900">
+              <a:buFont typeface="Arial" panose="020B0604020202020204" pitchFamily="34" charset="0"/>
+              <a:buChar char="•"/>
+            </a:pPr>
+            <a:r>
+              <a:rPr lang="en-US" dirty="0"/>
+              <a:t>Poor lighting</a:t>
+            </a:r>
+          </a:p>
+          <a:p>
+            <a:endParaRPr lang="en-IN" dirty="0"/>
+          </a:p>
+        </p:txBody>
+      </p:sp>
+      <p:sp>
+        <p:nvSpPr>
+          <p:cNvPr id="9" name="TextBox 8">
+            <a:extLst>
+              <a:ext uri="{FF2B5EF4-FFF2-40B4-BE49-F238E27FC236}">
+                <a16:creationId xmlns:a16="http://schemas.microsoft.com/office/drawing/2014/main" id="{792A1BE3-2A88-A080-4CB4-6EF3DE5A07F9}"/>
+              </a:ext>
+            </a:extLst>
+          </p:cNvPr>
+          <p:cNvSpPr txBox="1"/>
+          <p:nvPr/>
+        </p:nvSpPr>
+        <p:spPr>
+          <a:xfrm>
+            <a:off x="1557908" y="4281502"/>
+            <a:ext cx="4219425" cy="535788"/>
+          </a:xfrm>
+          <a:prstGeom prst="rect">
+            <a:avLst/>
+          </a:prstGeom>
+          <a:noFill/>
+        </p:spPr>
+        <p:txBody>
+          <a:bodyPr wrap="square" rtlCol="0">
+            <a:spAutoFit/>
+          </a:bodyPr>
+          <a:lstStyle>
+            <a:defPPr>
+              <a:defRPr lang="en-US"/>
+            </a:defPPr>
+            <a:lvl1pPr>
+              <a:lnSpc>
+                <a:spcPct val="150000"/>
+              </a:lnSpc>
+              <a:defRPr sz="2200"/>
+            </a:lvl1pPr>
+          </a:lstStyle>
+          <a:p>
+            <a:r>
+              <a:rPr lang="en-US" dirty="0"/>
+              <a:t>Which one would you prefer?</a:t>
+            </a:r>
+            <a:endParaRPr lang="en-IN" dirty="0"/>
+          </a:p>
+        </p:txBody>
+      </p:sp>
+      <p:sp>
+        <p:nvSpPr>
+          <p:cNvPr id="10" name="TextBox 9">
+            <a:extLst>
+              <a:ext uri="{FF2B5EF4-FFF2-40B4-BE49-F238E27FC236}">
+                <a16:creationId xmlns:a16="http://schemas.microsoft.com/office/drawing/2014/main" id="{1F2391A5-CE75-D2BD-4AFA-919101E2F934}"/>
+              </a:ext>
+            </a:extLst>
+          </p:cNvPr>
+          <p:cNvSpPr txBox="1"/>
+          <p:nvPr/>
+        </p:nvSpPr>
+        <p:spPr>
+          <a:xfrm>
+            <a:off x="974010" y="4798718"/>
+            <a:ext cx="5113099" cy="2059282"/>
+          </a:xfrm>
+          <a:prstGeom prst="rect">
+            <a:avLst/>
+          </a:prstGeom>
+          <a:noFill/>
+        </p:spPr>
+        <p:txBody>
+          <a:bodyPr wrap="square" rtlCol="0">
+            <a:spAutoFit/>
+          </a:bodyPr>
+          <a:lstStyle>
+            <a:defPPr>
+              <a:defRPr lang="en-US"/>
+            </a:defPPr>
+            <a:lvl1pPr>
+              <a:lnSpc>
+                <a:spcPct val="150000"/>
+              </a:lnSpc>
+              <a:defRPr sz="2200"/>
+            </a:lvl1pPr>
+          </a:lstStyle>
+          <a:p>
+            <a:r>
+              <a:rPr lang="en-US" dirty="0"/>
+              <a:t>The food may be the same, but the user experience is completely different</a:t>
+            </a:r>
+          </a:p>
+          <a:p>
+            <a:endParaRPr lang="en-IN" dirty="0"/>
+          </a:p>
+        </p:txBody>
+      </p:sp>
+      <p:sp>
+        <p:nvSpPr>
+          <p:cNvPr id="11" name="TextBox 10">
+            <a:extLst>
+              <a:ext uri="{FF2B5EF4-FFF2-40B4-BE49-F238E27FC236}">
+                <a16:creationId xmlns:a16="http://schemas.microsoft.com/office/drawing/2014/main" id="{421D1E63-1696-748F-EAA4-2E521CFEE4D8}"/>
+              </a:ext>
+            </a:extLst>
+          </p:cNvPr>
+          <p:cNvSpPr txBox="1"/>
+          <p:nvPr/>
+        </p:nvSpPr>
+        <p:spPr>
+          <a:xfrm>
+            <a:off x="7669693" y="1982283"/>
+            <a:ext cx="3888432" cy="5106270"/>
+          </a:xfrm>
+          <a:prstGeom prst="rect">
+            <a:avLst/>
+          </a:prstGeom>
+          <a:noFill/>
+        </p:spPr>
+        <p:txBody>
+          <a:bodyPr wrap="square" rtlCol="0">
+            <a:spAutoFit/>
+          </a:bodyPr>
+          <a:lstStyle>
+            <a:defPPr>
+              <a:defRPr lang="en-US"/>
+            </a:defPPr>
+            <a:lvl1pPr>
+              <a:lnSpc>
+                <a:spcPct val="150000"/>
+              </a:lnSpc>
+              <a:defRPr sz="2200"/>
+            </a:lvl1pPr>
+          </a:lstStyle>
+          <a:p>
+            <a:r>
+              <a:rPr lang="en-US" dirty="0"/>
+              <a:t>Things to check:</a:t>
+            </a:r>
+          </a:p>
+          <a:p>
+            <a:pPr marL="342900" indent="-342900">
+              <a:buFont typeface="Arial" panose="020B0604020202020204" pitchFamily="34" charset="0"/>
+              <a:buChar char="•"/>
+            </a:pPr>
+            <a:r>
+              <a:rPr lang="en-US" dirty="0"/>
+              <a:t>Buttons visible </a:t>
+            </a:r>
+          </a:p>
+          <a:p>
+            <a:pPr marL="342900" indent="-342900">
+              <a:buFont typeface="Arial" panose="020B0604020202020204" pitchFamily="34" charset="0"/>
+              <a:buChar char="•"/>
+            </a:pPr>
+            <a:r>
+              <a:rPr lang="en-US" dirty="0"/>
+              <a:t>Fonts readable </a:t>
+            </a:r>
+          </a:p>
+          <a:p>
+            <a:pPr marL="342900" indent="-342900">
+              <a:buFont typeface="Arial" panose="020B0604020202020204" pitchFamily="34" charset="0"/>
+              <a:buChar char="•"/>
+            </a:pPr>
+            <a:r>
+              <a:rPr lang="en-US" dirty="0"/>
+              <a:t>Logo is displayed</a:t>
+            </a:r>
+          </a:p>
+          <a:p>
+            <a:pPr marL="342900" indent="-342900">
+              <a:buFont typeface="Arial" panose="020B0604020202020204" pitchFamily="34" charset="0"/>
+              <a:buChar char="•"/>
+            </a:pPr>
+            <a:r>
+              <a:rPr lang="en-US" dirty="0"/>
+              <a:t>Images load correctly </a:t>
+            </a:r>
+          </a:p>
+          <a:p>
+            <a:pPr marL="342900" indent="-342900">
+              <a:buFont typeface="Arial" panose="020B0604020202020204" pitchFamily="34" charset="0"/>
+              <a:buChar char="•"/>
+            </a:pPr>
+            <a:r>
+              <a:rPr lang="en-US" dirty="0"/>
+              <a:t>Colors are consistent </a:t>
+            </a:r>
+          </a:p>
+          <a:p>
+            <a:pPr marL="342900" indent="-342900">
+              <a:buFont typeface="Arial" panose="020B0604020202020204" pitchFamily="34" charset="0"/>
+              <a:buChar char="•"/>
+            </a:pPr>
+            <a:r>
+              <a:rPr lang="en-US" dirty="0"/>
+              <a:t>Navigation works </a:t>
+            </a:r>
+          </a:p>
+          <a:p>
+            <a:pPr marL="342900" indent="-342900">
+              <a:buFont typeface="Arial" panose="020B0604020202020204" pitchFamily="34" charset="0"/>
+              <a:buChar char="•"/>
+            </a:pPr>
+            <a:r>
+              <a:rPr lang="en-US" dirty="0"/>
+              <a:t>Mobile layout looks good</a:t>
+            </a:r>
+          </a:p>
+          <a:p>
+            <a:endParaRPr lang="en-IN" dirty="0"/>
+          </a:p>
+        </p:txBody>
+      </p:sp>
+    </p:spTree>
+    <p:extLst>
+      <p:ext uri="{BB962C8B-B14F-4D97-AF65-F5344CB8AC3E}">
+        <p14:creationId xmlns:p14="http://schemas.microsoft.com/office/powerpoint/2010/main" val="851307479"/>
+      </p:ext>
+    </p:extLst>
+  </p:cSld>
+  <p:clrMapOvr>
+    <a:masterClrMapping/>
+  </p:clrMapOvr>
+  <mc:AlternateContent xmlns:mc="http://schemas.openxmlformats.org/markup-compatibility/2006" xmlns:p14="http://schemas.microsoft.com/office/powerpoint/2010/main">
+    <mc:Choice Requires="p14">
+      <p:transition spd="med" p14:dur="700">
+        <p:fade/>
+      </p:transition>
+    </mc:Choice>
+    <mc:Fallback xmlns="">
+      <p:transition spd="med">
+        <p:fade/>
+      </p:transition>
+    </mc:Fallback>
+  </mc:AlternateContent>
+</p:sld>
+</file>
+
+<file path=ppt/slides/slide33.xml><?xml version="1.0" encoding="utf-8"?>
+<p:sld xmlns:a="http://schemas.openxmlformats.org/drawingml/2006/main" xmlns:r="http://schemas.openxmlformats.org/officeDocument/2006/relationships" xmlns:p="http://schemas.openxmlformats.org/presentationml/2006/main">
+  <p:cSld>
+    <p:spTree>
+      <p:nvGrpSpPr>
+        <p:cNvPr id="1" name=""/>
+        <p:cNvGrpSpPr/>
+        <p:nvPr/>
+      </p:nvGrpSpPr>
+      <p:grpSpPr>
+        <a:xfrm>
+          <a:off x="0" y="0"/>
+          <a:ext cx="0" cy="0"/>
+          <a:chOff x="0" y="0"/>
+          <a:chExt cx="0" cy="0"/>
+        </a:xfrm>
+      </p:grpSpPr>
+      <p:sp>
+        <p:nvSpPr>
+          <p:cNvPr id="4" name="TextBox 3">
+            <a:extLst>
+              <a:ext uri="{FF2B5EF4-FFF2-40B4-BE49-F238E27FC236}">
+                <a16:creationId xmlns:a16="http://schemas.microsoft.com/office/drawing/2014/main" id="{97385ABB-4DB2-49DE-3929-1B18CBE0A45B}"/>
+              </a:ext>
+            </a:extLst>
+          </p:cNvPr>
+          <p:cNvSpPr txBox="1"/>
+          <p:nvPr/>
+        </p:nvSpPr>
+        <p:spPr>
+          <a:xfrm>
+            <a:off x="909836" y="332656"/>
+            <a:ext cx="3573414" cy="443198"/>
+          </a:xfrm>
+          <a:prstGeom prst="rect">
+            <a:avLst/>
+          </a:prstGeom>
+          <a:noFill/>
+        </p:spPr>
+        <p:txBody>
+          <a:bodyPr wrap="square" rtlCol="0">
+            <a:spAutoFit/>
+          </a:bodyPr>
+          <a:lstStyle>
+            <a:defPPr>
+              <a:defRPr lang="en-US"/>
+            </a:defPPr>
+            <a:lvl1pPr>
+              <a:lnSpc>
+                <a:spcPct val="95000"/>
+              </a:lnSpc>
+              <a:defRPr sz="2200" b="1">
+                <a:solidFill>
+                  <a:srgbClr val="FF0000"/>
+                </a:solidFill>
+              </a:defRPr>
+            </a:lvl1pPr>
+          </a:lstStyle>
+          <a:p>
+            <a:r>
+              <a:rPr lang="en-IN" dirty="0"/>
+              <a:t>3. Performance Testing</a:t>
+            </a:r>
+          </a:p>
+        </p:txBody>
+      </p:sp>
+      <p:sp>
+        <p:nvSpPr>
+          <p:cNvPr id="5" name="TextBox 4">
+            <a:extLst>
+              <a:ext uri="{FF2B5EF4-FFF2-40B4-BE49-F238E27FC236}">
+                <a16:creationId xmlns:a16="http://schemas.microsoft.com/office/drawing/2014/main" id="{72C73409-0885-EF8F-BAA8-29E34F01A28C}"/>
+              </a:ext>
+            </a:extLst>
+          </p:cNvPr>
+          <p:cNvSpPr txBox="1"/>
+          <p:nvPr/>
+        </p:nvSpPr>
+        <p:spPr>
+          <a:xfrm>
+            <a:off x="873127" y="836712"/>
+            <a:ext cx="6617517" cy="535788"/>
+          </a:xfrm>
+          <a:prstGeom prst="rect">
+            <a:avLst/>
+          </a:prstGeom>
+          <a:noFill/>
+        </p:spPr>
+        <p:txBody>
+          <a:bodyPr wrap="square" rtlCol="0">
+            <a:spAutoFit/>
+          </a:bodyPr>
+          <a:lstStyle>
+            <a:defPPr>
+              <a:defRPr lang="en-US"/>
+            </a:defPPr>
+            <a:lvl1pPr>
+              <a:lnSpc>
+                <a:spcPct val="150000"/>
+              </a:lnSpc>
+              <a:defRPr sz="2200"/>
+            </a:lvl1pPr>
+          </a:lstStyle>
+          <a:p>
+            <a:r>
+              <a:rPr lang="en-US" dirty="0"/>
+              <a:t>It measures speed, stability, and responsiveness</a:t>
+            </a:r>
+            <a:endParaRPr lang="en-IN" dirty="0"/>
+          </a:p>
+        </p:txBody>
+      </p:sp>
+      <p:sp>
+        <p:nvSpPr>
+          <p:cNvPr id="7" name="TextBox 6">
+            <a:extLst>
+              <a:ext uri="{FF2B5EF4-FFF2-40B4-BE49-F238E27FC236}">
+                <a16:creationId xmlns:a16="http://schemas.microsoft.com/office/drawing/2014/main" id="{A7DC326C-FBC1-C8CD-7ABB-7D30A1A080FC}"/>
+              </a:ext>
+            </a:extLst>
+          </p:cNvPr>
+          <p:cNvSpPr txBox="1"/>
+          <p:nvPr/>
+        </p:nvSpPr>
+        <p:spPr>
+          <a:xfrm>
+            <a:off x="882960" y="1371080"/>
+            <a:ext cx="10657184" cy="1551450"/>
+          </a:xfrm>
+          <a:prstGeom prst="rect">
+            <a:avLst/>
+          </a:prstGeom>
+          <a:noFill/>
+        </p:spPr>
+        <p:txBody>
+          <a:bodyPr wrap="square" rtlCol="0">
+            <a:spAutoFit/>
+          </a:bodyPr>
+          <a:lstStyle>
+            <a:defPPr>
+              <a:defRPr lang="en-US"/>
+            </a:defPPr>
+            <a:lvl1pPr>
+              <a:lnSpc>
+                <a:spcPct val="150000"/>
+              </a:lnSpc>
+              <a:defRPr sz="2200"/>
+            </a:lvl1pPr>
+          </a:lstStyle>
+          <a:p>
+            <a:r>
+              <a:rPr lang="en-US" dirty="0"/>
+              <a:t>Imagine booking train tickets during a festival. Thousands of users log in at the same time.</a:t>
+            </a:r>
+          </a:p>
+          <a:p>
+            <a:endParaRPr lang="en-IN" dirty="0"/>
+          </a:p>
+        </p:txBody>
+      </p:sp>
+      <p:sp>
+        <p:nvSpPr>
+          <p:cNvPr id="8" name="TextBox 7">
+            <a:extLst>
+              <a:ext uri="{FF2B5EF4-FFF2-40B4-BE49-F238E27FC236}">
+                <a16:creationId xmlns:a16="http://schemas.microsoft.com/office/drawing/2014/main" id="{FCCB8D0D-ED9D-05A7-1A89-0150D1375204}"/>
+              </a:ext>
+            </a:extLst>
+          </p:cNvPr>
+          <p:cNvSpPr txBox="1"/>
+          <p:nvPr/>
+        </p:nvSpPr>
+        <p:spPr>
+          <a:xfrm>
+            <a:off x="909836" y="2408362"/>
+            <a:ext cx="5616624" cy="1551450"/>
+          </a:xfrm>
+          <a:prstGeom prst="rect">
+            <a:avLst/>
+          </a:prstGeom>
+          <a:noFill/>
+        </p:spPr>
+        <p:txBody>
+          <a:bodyPr wrap="square" rtlCol="0">
+            <a:spAutoFit/>
+          </a:bodyPr>
+          <a:lstStyle>
+            <a:defPPr>
+              <a:defRPr lang="en-US"/>
+            </a:defPPr>
+            <a:lvl1pPr>
+              <a:lnSpc>
+                <a:spcPct val="150000"/>
+              </a:lnSpc>
+              <a:defRPr sz="2200"/>
+            </a:lvl1pPr>
+          </a:lstStyle>
+          <a:p>
+            <a:pPr marL="342900" indent="-342900">
+              <a:buFont typeface="Arial" panose="020B0604020202020204" pitchFamily="34" charset="0"/>
+              <a:buChar char="•"/>
+            </a:pPr>
+            <a:r>
+              <a:rPr lang="en-US" dirty="0"/>
+              <a:t>Does the website remain fast?</a:t>
+            </a:r>
+          </a:p>
+          <a:p>
+            <a:pPr marL="342900" indent="-342900">
+              <a:buFont typeface="Arial" panose="020B0604020202020204" pitchFamily="34" charset="0"/>
+              <a:buChar char="•"/>
+            </a:pPr>
+            <a:r>
+              <a:rPr lang="en-US" dirty="0"/>
+              <a:t>Does it crash?</a:t>
+            </a:r>
+          </a:p>
+          <a:p>
+            <a:pPr marL="342900" indent="-342900">
+              <a:buFont typeface="Arial" panose="020B0604020202020204" pitchFamily="34" charset="0"/>
+              <a:buChar char="•"/>
+            </a:pPr>
+            <a:r>
+              <a:rPr lang="en-US" dirty="0"/>
+              <a:t>How quickly does it load?</a:t>
+            </a:r>
+            <a:endParaRPr lang="en-IN" dirty="0"/>
+          </a:p>
+        </p:txBody>
+      </p:sp>
+      <p:sp>
+        <p:nvSpPr>
+          <p:cNvPr id="2" name="TextBox 1">
+            <a:extLst>
+              <a:ext uri="{FF2B5EF4-FFF2-40B4-BE49-F238E27FC236}">
+                <a16:creationId xmlns:a16="http://schemas.microsoft.com/office/drawing/2014/main" id="{A6B4FA42-A76F-5B69-5822-6429C8DF07EF}"/>
+              </a:ext>
+            </a:extLst>
+          </p:cNvPr>
+          <p:cNvSpPr txBox="1"/>
+          <p:nvPr/>
+        </p:nvSpPr>
+        <p:spPr>
+          <a:xfrm>
+            <a:off x="916124" y="4221088"/>
+            <a:ext cx="3831498" cy="535788"/>
+          </a:xfrm>
+          <a:prstGeom prst="rect">
+            <a:avLst/>
+          </a:prstGeom>
+          <a:noFill/>
+        </p:spPr>
+        <p:txBody>
+          <a:bodyPr wrap="square" rtlCol="0">
+            <a:spAutoFit/>
+          </a:bodyPr>
+          <a:lstStyle>
+            <a:defPPr>
+              <a:defRPr lang="en-US"/>
+            </a:defPPr>
+            <a:lvl1pPr>
+              <a:lnSpc>
+                <a:spcPct val="150000"/>
+              </a:lnSpc>
+              <a:defRPr sz="2200"/>
+            </a:lvl1pPr>
+          </a:lstStyle>
+          <a:p>
+            <a:r>
+              <a:rPr lang="en-IN" dirty="0"/>
+              <a:t>This is Performance Testing.</a:t>
+            </a:r>
+          </a:p>
+        </p:txBody>
+      </p:sp>
+    </p:spTree>
+    <p:extLst>
+      <p:ext uri="{BB962C8B-B14F-4D97-AF65-F5344CB8AC3E}">
+        <p14:creationId xmlns:p14="http://schemas.microsoft.com/office/powerpoint/2010/main" val="1757275685"/>
+      </p:ext>
+    </p:extLst>
+  </p:cSld>
+  <p:clrMapOvr>
+    <a:masterClrMapping/>
+  </p:clrMapOvr>
+  <mc:AlternateContent xmlns:mc="http://schemas.openxmlformats.org/markup-compatibility/2006" xmlns:p14="http://schemas.microsoft.com/office/powerpoint/2010/main">
+    <mc:Choice Requires="p14">
+      <p:transition spd="med" p14:dur="700">
+        <p:fade/>
+      </p:transition>
+    </mc:Choice>
+    <mc:Fallback xmlns="">
+      <p:transition spd="med">
+        <p:fade/>
+      </p:transition>
+    </mc:Fallback>
+  </mc:AlternateContent>
+</p:sld>
+</file>
+
+<file path=ppt/slides/slide34.xml><?xml version="1.0" encoding="utf-8"?>
+<p:sld xmlns:a="http://schemas.openxmlformats.org/drawingml/2006/main" xmlns:r="http://schemas.openxmlformats.org/officeDocument/2006/relationships" xmlns:p="http://schemas.openxmlformats.org/presentationml/2006/main">
+  <p:cSld>
+    <p:spTree>
+      <p:nvGrpSpPr>
+        <p:cNvPr id="1" name=""/>
+        <p:cNvGrpSpPr/>
+        <p:nvPr/>
+      </p:nvGrpSpPr>
+      <p:grpSpPr>
+        <a:xfrm>
+          <a:off x="0" y="0"/>
+          <a:ext cx="0" cy="0"/>
+          <a:chOff x="0" y="0"/>
+          <a:chExt cx="0" cy="0"/>
+        </a:xfrm>
+      </p:grpSpPr>
+      <p:sp>
+        <p:nvSpPr>
+          <p:cNvPr id="4" name="TextBox 3">
+            <a:extLst>
+              <a:ext uri="{FF2B5EF4-FFF2-40B4-BE49-F238E27FC236}">
+                <a16:creationId xmlns:a16="http://schemas.microsoft.com/office/drawing/2014/main" id="{99C375F3-77F9-95B9-4323-C3FE913B5BC8}"/>
+              </a:ext>
+            </a:extLst>
+          </p:cNvPr>
+          <p:cNvSpPr txBox="1"/>
+          <p:nvPr/>
+        </p:nvSpPr>
+        <p:spPr>
+          <a:xfrm>
+            <a:off x="1053852" y="260648"/>
+            <a:ext cx="4528804" cy="443198"/>
+          </a:xfrm>
+          <a:prstGeom prst="rect">
+            <a:avLst/>
+          </a:prstGeom>
+          <a:noFill/>
+        </p:spPr>
+        <p:txBody>
+          <a:bodyPr wrap="square" rtlCol="0">
+            <a:spAutoFit/>
+          </a:bodyPr>
+          <a:lstStyle>
+            <a:defPPr>
+              <a:defRPr lang="en-US"/>
+            </a:defPPr>
+            <a:lvl1pPr>
+              <a:lnSpc>
+                <a:spcPct val="95000"/>
+              </a:lnSpc>
+              <a:defRPr sz="2200" b="1">
+                <a:solidFill>
+                  <a:srgbClr val="FF0000"/>
+                </a:solidFill>
+              </a:defRPr>
+            </a:lvl1pPr>
+          </a:lstStyle>
+          <a:p>
+            <a:r>
+              <a:rPr lang="en-IN" dirty="0"/>
+              <a:t>Types of Performance Testing</a:t>
+            </a:r>
+          </a:p>
+        </p:txBody>
+      </p:sp>
+      <p:sp>
+        <p:nvSpPr>
+          <p:cNvPr id="5" name="TextBox 4">
+            <a:extLst>
+              <a:ext uri="{FF2B5EF4-FFF2-40B4-BE49-F238E27FC236}">
+                <a16:creationId xmlns:a16="http://schemas.microsoft.com/office/drawing/2014/main" id="{72F0DA4B-95AA-41A3-C3A2-E0B29E20A0D8}"/>
+              </a:ext>
+            </a:extLst>
+          </p:cNvPr>
+          <p:cNvSpPr txBox="1"/>
+          <p:nvPr/>
+        </p:nvSpPr>
+        <p:spPr>
+          <a:xfrm>
+            <a:off x="1028193" y="908720"/>
+            <a:ext cx="2236510" cy="413959"/>
+          </a:xfrm>
+          <a:prstGeom prst="rect">
+            <a:avLst/>
+          </a:prstGeom>
+          <a:noFill/>
+        </p:spPr>
+        <p:txBody>
+          <a:bodyPr wrap="square" rtlCol="0">
+            <a:spAutoFit/>
+          </a:bodyPr>
+          <a:lstStyle>
+            <a:defPPr>
+              <a:defRPr lang="en-US"/>
+            </a:defPPr>
+            <a:lvl1pPr>
+              <a:lnSpc>
+                <a:spcPct val="95000"/>
+              </a:lnSpc>
+              <a:defRPr sz="2200" b="1">
+                <a:solidFill>
+                  <a:srgbClr val="FF0000"/>
+                </a:solidFill>
+              </a:defRPr>
+            </a:lvl1pPr>
+          </a:lstStyle>
+          <a:p>
+            <a:r>
+              <a:rPr lang="en-IN" dirty="0"/>
+              <a:t>A. Load Testing</a:t>
+            </a:r>
+          </a:p>
+        </p:txBody>
+      </p:sp>
+      <p:sp>
+        <p:nvSpPr>
+          <p:cNvPr id="6" name="TextBox 5">
+            <a:extLst>
+              <a:ext uri="{FF2B5EF4-FFF2-40B4-BE49-F238E27FC236}">
+                <a16:creationId xmlns:a16="http://schemas.microsoft.com/office/drawing/2014/main" id="{BA05B30B-D9AD-819C-5DA9-278FFEAABBA7}"/>
+              </a:ext>
+            </a:extLst>
+          </p:cNvPr>
+          <p:cNvSpPr txBox="1"/>
+          <p:nvPr/>
+        </p:nvSpPr>
+        <p:spPr>
+          <a:xfrm>
+            <a:off x="1053853" y="1356736"/>
+            <a:ext cx="4680519" cy="2059282"/>
+          </a:xfrm>
+          <a:prstGeom prst="rect">
+            <a:avLst/>
+          </a:prstGeom>
+          <a:noFill/>
+        </p:spPr>
+        <p:txBody>
+          <a:bodyPr wrap="square" rtlCol="0">
+            <a:spAutoFit/>
+          </a:bodyPr>
+          <a:lstStyle>
+            <a:defPPr>
+              <a:defRPr lang="en-US"/>
+            </a:defPPr>
+            <a:lvl1pPr>
+              <a:lnSpc>
+                <a:spcPct val="150000"/>
+              </a:lnSpc>
+              <a:defRPr sz="2200"/>
+            </a:lvl1pPr>
+          </a:lstStyle>
+          <a:p>
+            <a:r>
+              <a:rPr lang="en-US" dirty="0"/>
+              <a:t>Tests software under expected user load. Can the website handle 5,000 users?</a:t>
+            </a:r>
+          </a:p>
+          <a:p>
+            <a:endParaRPr lang="en-IN" dirty="0"/>
+          </a:p>
+        </p:txBody>
+      </p:sp>
+      <p:sp>
+        <p:nvSpPr>
+          <p:cNvPr id="7" name="TextBox 6">
+            <a:extLst>
+              <a:ext uri="{FF2B5EF4-FFF2-40B4-BE49-F238E27FC236}">
+                <a16:creationId xmlns:a16="http://schemas.microsoft.com/office/drawing/2014/main" id="{636925F0-2E82-7B33-70A6-9011C977CFDF}"/>
+              </a:ext>
+            </a:extLst>
+          </p:cNvPr>
+          <p:cNvSpPr txBox="1"/>
+          <p:nvPr/>
+        </p:nvSpPr>
+        <p:spPr>
+          <a:xfrm>
+            <a:off x="6958508" y="880324"/>
+            <a:ext cx="2265364" cy="413959"/>
+          </a:xfrm>
+          <a:prstGeom prst="rect">
+            <a:avLst/>
+          </a:prstGeom>
+          <a:noFill/>
+        </p:spPr>
+        <p:txBody>
+          <a:bodyPr wrap="square" rtlCol="0">
+            <a:spAutoFit/>
+          </a:bodyPr>
+          <a:lstStyle>
+            <a:defPPr>
+              <a:defRPr lang="en-US"/>
+            </a:defPPr>
+            <a:lvl1pPr>
+              <a:lnSpc>
+                <a:spcPct val="95000"/>
+              </a:lnSpc>
+              <a:defRPr sz="2200" b="1">
+                <a:solidFill>
+                  <a:srgbClr val="FF0000"/>
+                </a:solidFill>
+              </a:defRPr>
+            </a:lvl1pPr>
+          </a:lstStyle>
+          <a:p>
+            <a:r>
+              <a:rPr lang="en-IN" dirty="0"/>
+              <a:t>B. Stress Testing</a:t>
+            </a:r>
+          </a:p>
+        </p:txBody>
+      </p:sp>
+      <p:sp>
+        <p:nvSpPr>
+          <p:cNvPr id="8" name="TextBox 7">
+            <a:extLst>
+              <a:ext uri="{FF2B5EF4-FFF2-40B4-BE49-F238E27FC236}">
+                <a16:creationId xmlns:a16="http://schemas.microsoft.com/office/drawing/2014/main" id="{52906FEE-A0AF-5DB3-4754-4D2A9996013D}"/>
+              </a:ext>
+            </a:extLst>
+          </p:cNvPr>
+          <p:cNvSpPr txBox="1"/>
+          <p:nvPr/>
+        </p:nvSpPr>
+        <p:spPr>
+          <a:xfrm>
+            <a:off x="6958508" y="1356736"/>
+            <a:ext cx="4794902" cy="1551450"/>
+          </a:xfrm>
+          <a:prstGeom prst="rect">
+            <a:avLst/>
+          </a:prstGeom>
+          <a:noFill/>
+        </p:spPr>
+        <p:txBody>
+          <a:bodyPr wrap="square" rtlCol="0">
+            <a:spAutoFit/>
+          </a:bodyPr>
+          <a:lstStyle>
+            <a:defPPr>
+              <a:defRPr lang="en-US"/>
+            </a:defPPr>
+            <a:lvl1pPr>
+              <a:lnSpc>
+                <a:spcPct val="150000"/>
+              </a:lnSpc>
+              <a:defRPr sz="2200"/>
+            </a:lvl1pPr>
+          </a:lstStyle>
+          <a:p>
+            <a:r>
+              <a:rPr lang="en-US" dirty="0"/>
+              <a:t>Pushes the system beyond its limit.</a:t>
+            </a:r>
+          </a:p>
+          <a:p>
+            <a:r>
+              <a:rPr lang="en-US" dirty="0"/>
+              <a:t>Can it survive 100,000 users?</a:t>
+            </a:r>
+          </a:p>
+          <a:p>
+            <a:endParaRPr lang="en-IN" dirty="0"/>
+          </a:p>
+        </p:txBody>
+      </p:sp>
+      <p:sp>
+        <p:nvSpPr>
+          <p:cNvPr id="9" name="TextBox 8">
+            <a:extLst>
+              <a:ext uri="{FF2B5EF4-FFF2-40B4-BE49-F238E27FC236}">
+                <a16:creationId xmlns:a16="http://schemas.microsoft.com/office/drawing/2014/main" id="{EBE53777-552C-A5AE-9D81-1B30B3DCB5C7}"/>
+              </a:ext>
+            </a:extLst>
+          </p:cNvPr>
+          <p:cNvSpPr txBox="1"/>
+          <p:nvPr/>
+        </p:nvSpPr>
+        <p:spPr>
+          <a:xfrm>
+            <a:off x="1052534" y="3425350"/>
+            <a:ext cx="3052439" cy="413959"/>
+          </a:xfrm>
+          <a:prstGeom prst="rect">
+            <a:avLst/>
+          </a:prstGeom>
+          <a:noFill/>
+        </p:spPr>
+        <p:txBody>
+          <a:bodyPr wrap="square" rtlCol="0">
+            <a:spAutoFit/>
+          </a:bodyPr>
+          <a:lstStyle>
+            <a:defPPr>
+              <a:defRPr lang="en-US"/>
+            </a:defPPr>
+            <a:lvl1pPr>
+              <a:lnSpc>
+                <a:spcPct val="95000"/>
+              </a:lnSpc>
+              <a:defRPr sz="2200" b="1">
+                <a:solidFill>
+                  <a:srgbClr val="FF0000"/>
+                </a:solidFill>
+              </a:defRPr>
+            </a:lvl1pPr>
+          </a:lstStyle>
+          <a:p>
+            <a:r>
+              <a:rPr lang="en-IN" dirty="0"/>
+              <a:t>C. Endurance Testing</a:t>
+            </a:r>
+          </a:p>
+        </p:txBody>
+      </p:sp>
+      <p:sp>
+        <p:nvSpPr>
+          <p:cNvPr id="10" name="TextBox 9">
+            <a:extLst>
+              <a:ext uri="{FF2B5EF4-FFF2-40B4-BE49-F238E27FC236}">
+                <a16:creationId xmlns:a16="http://schemas.microsoft.com/office/drawing/2014/main" id="{310B7895-B505-849E-174A-0F65176F9D58}"/>
+              </a:ext>
+            </a:extLst>
+          </p:cNvPr>
+          <p:cNvSpPr txBox="1"/>
+          <p:nvPr/>
+        </p:nvSpPr>
+        <p:spPr>
+          <a:xfrm>
+            <a:off x="1052535" y="4005064"/>
+            <a:ext cx="5401918" cy="2059282"/>
+          </a:xfrm>
+          <a:prstGeom prst="rect">
+            <a:avLst/>
+          </a:prstGeom>
+          <a:noFill/>
+        </p:spPr>
+        <p:txBody>
+          <a:bodyPr wrap="square" rtlCol="0">
+            <a:spAutoFit/>
+          </a:bodyPr>
+          <a:lstStyle>
+            <a:defPPr>
+              <a:defRPr lang="en-US"/>
+            </a:defPPr>
+            <a:lvl1pPr>
+              <a:lnSpc>
+                <a:spcPct val="150000"/>
+              </a:lnSpc>
+              <a:defRPr sz="2200"/>
+            </a:lvl1pPr>
+          </a:lstStyle>
+          <a:p>
+            <a:r>
+              <a:rPr lang="en-US" dirty="0"/>
+              <a:t>Checks whether the software performs well over a long period. Can the server run continuously for 48 hours?</a:t>
+            </a:r>
+          </a:p>
+          <a:p>
+            <a:endParaRPr lang="en-IN" dirty="0"/>
+          </a:p>
+        </p:txBody>
+      </p:sp>
+      <p:sp>
+        <p:nvSpPr>
+          <p:cNvPr id="11" name="TextBox 10">
+            <a:extLst>
+              <a:ext uri="{FF2B5EF4-FFF2-40B4-BE49-F238E27FC236}">
+                <a16:creationId xmlns:a16="http://schemas.microsoft.com/office/drawing/2014/main" id="{D832DF39-E138-4D56-E732-1AD5E6728069}"/>
+              </a:ext>
+            </a:extLst>
+          </p:cNvPr>
+          <p:cNvSpPr txBox="1"/>
+          <p:nvPr/>
+        </p:nvSpPr>
+        <p:spPr>
+          <a:xfrm>
+            <a:off x="7093284" y="3425350"/>
+            <a:ext cx="2294218" cy="413959"/>
+          </a:xfrm>
+          <a:prstGeom prst="rect">
+            <a:avLst/>
+          </a:prstGeom>
+          <a:noFill/>
+        </p:spPr>
+        <p:txBody>
+          <a:bodyPr wrap="square" rtlCol="0">
+            <a:spAutoFit/>
+          </a:bodyPr>
+          <a:lstStyle>
+            <a:defPPr>
+              <a:defRPr lang="en-US"/>
+            </a:defPPr>
+            <a:lvl1pPr>
+              <a:lnSpc>
+                <a:spcPct val="95000"/>
+              </a:lnSpc>
+              <a:defRPr sz="2200" b="1">
+                <a:solidFill>
+                  <a:srgbClr val="FF0000"/>
+                </a:solidFill>
+              </a:defRPr>
+            </a:lvl1pPr>
+          </a:lstStyle>
+          <a:p>
+            <a:r>
+              <a:rPr lang="en-IN" dirty="0"/>
+              <a:t>D. Spike Testing</a:t>
+            </a:r>
+          </a:p>
+        </p:txBody>
+      </p:sp>
+      <p:sp>
+        <p:nvSpPr>
+          <p:cNvPr id="12" name="TextBox 11">
+            <a:extLst>
+              <a:ext uri="{FF2B5EF4-FFF2-40B4-BE49-F238E27FC236}">
+                <a16:creationId xmlns:a16="http://schemas.microsoft.com/office/drawing/2014/main" id="{E067C59C-5B60-D5BE-BE8B-E8C1491A2A37}"/>
+              </a:ext>
+            </a:extLst>
+          </p:cNvPr>
+          <p:cNvSpPr txBox="1"/>
+          <p:nvPr/>
+        </p:nvSpPr>
+        <p:spPr>
+          <a:xfrm>
+            <a:off x="7023008" y="3921612"/>
+            <a:ext cx="4401728" cy="2567113"/>
+          </a:xfrm>
+          <a:prstGeom prst="rect">
+            <a:avLst/>
+          </a:prstGeom>
+          <a:noFill/>
+        </p:spPr>
+        <p:txBody>
+          <a:bodyPr wrap="square" rtlCol="0">
+            <a:spAutoFit/>
+          </a:bodyPr>
+          <a:lstStyle>
+            <a:defPPr>
+              <a:defRPr lang="en-US"/>
+            </a:defPPr>
+            <a:lvl1pPr>
+              <a:lnSpc>
+                <a:spcPct val="150000"/>
+              </a:lnSpc>
+              <a:defRPr sz="2200"/>
+            </a:lvl1pPr>
+          </a:lstStyle>
+          <a:p>
+            <a:r>
+              <a:rPr lang="en-US" dirty="0"/>
+              <a:t>Suddenly increases the number of users. Users increase from 500 to 20,000 within one minute.</a:t>
+            </a:r>
+          </a:p>
+          <a:p>
+            <a:endParaRPr lang="en-IN" dirty="0"/>
+          </a:p>
+        </p:txBody>
+      </p:sp>
+    </p:spTree>
+    <p:extLst>
+      <p:ext uri="{BB962C8B-B14F-4D97-AF65-F5344CB8AC3E}">
+        <p14:creationId xmlns:p14="http://schemas.microsoft.com/office/powerpoint/2010/main" val="2221628321"/>
+      </p:ext>
+    </p:extLst>
+  </p:cSld>
+  <p:clrMapOvr>
+    <a:masterClrMapping/>
+  </p:clrMapOvr>
+  <mc:AlternateContent xmlns:mc="http://schemas.openxmlformats.org/markup-compatibility/2006" xmlns:p14="http://schemas.microsoft.com/office/powerpoint/2010/main">
+    <mc:Choice Requires="p14">
+      <p:transition spd="med" p14:dur="700">
+        <p:fade/>
+      </p:transition>
+    </mc:Choice>
+    <mc:Fallback xmlns="">
+      <p:transition spd="med">
+        <p:fade/>
+      </p:transition>
+    </mc:Fallback>
+  </mc:AlternateContent>
+</p:sld>
+</file>
+
+<file path=ppt/slides/slide35.xml><?xml version="1.0" encoding="utf-8"?>
+<p:sld xmlns:a="http://schemas.openxmlformats.org/drawingml/2006/main" xmlns:r="http://schemas.openxmlformats.org/officeDocument/2006/relationships" xmlns:p="http://schemas.openxmlformats.org/presentationml/2006/main">
+  <p:cSld>
+    <p:spTree>
+      <p:nvGrpSpPr>
+        <p:cNvPr id="1" name=""/>
+        <p:cNvGrpSpPr/>
+        <p:nvPr/>
+      </p:nvGrpSpPr>
+      <p:grpSpPr>
+        <a:xfrm>
+          <a:off x="0" y="0"/>
+          <a:ext cx="0" cy="0"/>
+          <a:chOff x="0" y="0"/>
+          <a:chExt cx="0" cy="0"/>
+        </a:xfrm>
+      </p:grpSpPr>
+      <p:sp>
+        <p:nvSpPr>
+          <p:cNvPr id="4" name="TextBox 3">
+            <a:extLst>
+              <a:ext uri="{FF2B5EF4-FFF2-40B4-BE49-F238E27FC236}">
+                <a16:creationId xmlns:a16="http://schemas.microsoft.com/office/drawing/2014/main" id="{05FCECF7-C368-B968-A0D3-3F7D4B515740}"/>
+              </a:ext>
+            </a:extLst>
+          </p:cNvPr>
+          <p:cNvSpPr txBox="1"/>
+          <p:nvPr/>
+        </p:nvSpPr>
+        <p:spPr>
+          <a:xfrm>
+            <a:off x="981844" y="332656"/>
+            <a:ext cx="2784737" cy="443198"/>
+          </a:xfrm>
+          <a:prstGeom prst="rect">
+            <a:avLst/>
+          </a:prstGeom>
+          <a:noFill/>
+        </p:spPr>
+        <p:txBody>
+          <a:bodyPr wrap="square" rtlCol="0">
+            <a:spAutoFit/>
+          </a:bodyPr>
+          <a:lstStyle>
+            <a:defPPr>
+              <a:defRPr lang="en-US"/>
+            </a:defPPr>
+            <a:lvl1pPr>
+              <a:lnSpc>
+                <a:spcPct val="95000"/>
+              </a:lnSpc>
+              <a:defRPr sz="2200" b="1">
+                <a:solidFill>
+                  <a:srgbClr val="FF0000"/>
+                </a:solidFill>
+              </a:defRPr>
+            </a:lvl1pPr>
+          </a:lstStyle>
+          <a:p>
+            <a:r>
+              <a:rPr lang="en-IN" dirty="0"/>
+              <a:t>4. Security Testing</a:t>
+            </a:r>
+          </a:p>
+        </p:txBody>
+      </p:sp>
+      <p:sp>
+        <p:nvSpPr>
+          <p:cNvPr id="5" name="TextBox 4">
+            <a:extLst>
+              <a:ext uri="{FF2B5EF4-FFF2-40B4-BE49-F238E27FC236}">
+                <a16:creationId xmlns:a16="http://schemas.microsoft.com/office/drawing/2014/main" id="{A0480A38-8C6D-74E9-7B59-3BDB2E30757A}"/>
+              </a:ext>
+            </a:extLst>
+          </p:cNvPr>
+          <p:cNvSpPr txBox="1"/>
+          <p:nvPr/>
+        </p:nvSpPr>
+        <p:spPr>
+          <a:xfrm>
+            <a:off x="981844" y="908720"/>
+            <a:ext cx="5319085" cy="535788"/>
+          </a:xfrm>
+          <a:prstGeom prst="rect">
+            <a:avLst/>
+          </a:prstGeom>
+          <a:noFill/>
+        </p:spPr>
+        <p:txBody>
+          <a:bodyPr wrap="square" rtlCol="0">
+            <a:spAutoFit/>
+          </a:bodyPr>
+          <a:lstStyle>
+            <a:defPPr>
+              <a:defRPr lang="en-US"/>
+            </a:defPPr>
+            <a:lvl1pPr>
+              <a:lnSpc>
+                <a:spcPct val="150000"/>
+              </a:lnSpc>
+              <a:defRPr sz="2200"/>
+            </a:lvl1pPr>
+          </a:lstStyle>
+          <a:p>
+            <a:r>
+              <a:rPr lang="en-US" dirty="0"/>
+              <a:t>It ensures that user data remains safe.</a:t>
+            </a:r>
+            <a:endParaRPr lang="en-IN" dirty="0"/>
+          </a:p>
+        </p:txBody>
+      </p:sp>
+      <p:sp>
+        <p:nvSpPr>
+          <p:cNvPr id="6" name="TextBox 5">
+            <a:extLst>
+              <a:ext uri="{FF2B5EF4-FFF2-40B4-BE49-F238E27FC236}">
+                <a16:creationId xmlns:a16="http://schemas.microsoft.com/office/drawing/2014/main" id="{39A632B9-2924-A92A-9EBA-A69D709422D2}"/>
+              </a:ext>
+            </a:extLst>
+          </p:cNvPr>
+          <p:cNvSpPr txBox="1"/>
+          <p:nvPr/>
+        </p:nvSpPr>
+        <p:spPr>
+          <a:xfrm>
+            <a:off x="981844" y="1556792"/>
+            <a:ext cx="3960440" cy="4090607"/>
+          </a:xfrm>
+          <a:prstGeom prst="rect">
+            <a:avLst/>
+          </a:prstGeom>
+          <a:noFill/>
+        </p:spPr>
+        <p:txBody>
+          <a:bodyPr wrap="square" rtlCol="0">
+            <a:spAutoFit/>
+          </a:bodyPr>
+          <a:lstStyle>
+            <a:defPPr>
+              <a:defRPr lang="en-US"/>
+            </a:defPPr>
+            <a:lvl1pPr>
+              <a:lnSpc>
+                <a:spcPct val="150000"/>
+              </a:lnSpc>
+              <a:defRPr sz="2200"/>
+            </a:lvl1pPr>
+          </a:lstStyle>
+          <a:p>
+            <a:r>
+              <a:rPr lang="en-US" dirty="0"/>
+              <a:t>Think about your house.</a:t>
+            </a:r>
+          </a:p>
+          <a:p>
+            <a:r>
+              <a:rPr lang="en-US" dirty="0"/>
+              <a:t>You have:</a:t>
+            </a:r>
+          </a:p>
+          <a:p>
+            <a:pPr marL="342900" indent="-342900">
+              <a:buFont typeface="Arial" panose="020B0604020202020204" pitchFamily="34" charset="0"/>
+              <a:buChar char="•"/>
+            </a:pPr>
+            <a:r>
+              <a:rPr lang="en-US" dirty="0"/>
+              <a:t>Strong locks </a:t>
+            </a:r>
+          </a:p>
+          <a:p>
+            <a:pPr marL="342900" indent="-342900">
+              <a:buFont typeface="Arial" panose="020B0604020202020204" pitchFamily="34" charset="0"/>
+              <a:buChar char="•"/>
+            </a:pPr>
+            <a:r>
+              <a:rPr lang="en-US" dirty="0"/>
+              <a:t>CCTV cameras </a:t>
+            </a:r>
+          </a:p>
+          <a:p>
+            <a:pPr marL="342900" indent="-342900">
+              <a:buFont typeface="Arial" panose="020B0604020202020204" pitchFamily="34" charset="0"/>
+              <a:buChar char="•"/>
+            </a:pPr>
+            <a:r>
+              <a:rPr lang="en-US" dirty="0"/>
+              <a:t>Security guards </a:t>
+            </a:r>
+          </a:p>
+          <a:p>
+            <a:pPr marL="342900" indent="-342900">
+              <a:buFont typeface="Arial" panose="020B0604020202020204" pitchFamily="34" charset="0"/>
+              <a:buChar char="•"/>
+            </a:pPr>
+            <a:r>
+              <a:rPr lang="en-US" dirty="0"/>
+              <a:t>Alarm system </a:t>
+            </a:r>
+          </a:p>
+          <a:p>
+            <a:r>
+              <a:rPr lang="en-US" dirty="0"/>
+              <a:t>These protect your house.</a:t>
+            </a:r>
+          </a:p>
+          <a:p>
+            <a:endParaRPr lang="en-IN" dirty="0"/>
+          </a:p>
+        </p:txBody>
+      </p:sp>
+      <p:sp>
+        <p:nvSpPr>
+          <p:cNvPr id="7" name="TextBox 6">
+            <a:extLst>
+              <a:ext uri="{FF2B5EF4-FFF2-40B4-BE49-F238E27FC236}">
+                <a16:creationId xmlns:a16="http://schemas.microsoft.com/office/drawing/2014/main" id="{C142D5BE-41C8-BB2A-2DB1-B2946F62D701}"/>
+              </a:ext>
+            </a:extLst>
+          </p:cNvPr>
+          <p:cNvSpPr txBox="1"/>
+          <p:nvPr/>
+        </p:nvSpPr>
+        <p:spPr>
+          <a:xfrm>
+            <a:off x="981844" y="5223895"/>
+            <a:ext cx="5078634" cy="535788"/>
+          </a:xfrm>
+          <a:prstGeom prst="rect">
+            <a:avLst/>
+          </a:prstGeom>
+          <a:noFill/>
+        </p:spPr>
+        <p:txBody>
+          <a:bodyPr wrap="square" rtlCol="0">
+            <a:spAutoFit/>
+          </a:bodyPr>
+          <a:lstStyle>
+            <a:defPPr>
+              <a:defRPr lang="en-US"/>
+            </a:defPPr>
+            <a:lvl1pPr>
+              <a:lnSpc>
+                <a:spcPct val="150000"/>
+              </a:lnSpc>
+              <a:defRPr sz="2200"/>
+            </a:lvl1pPr>
+          </a:lstStyle>
+          <a:p>
+            <a:r>
+              <a:rPr lang="en-IN" dirty="0"/>
+              <a:t>Similarly, software needs protection.</a:t>
+            </a:r>
+          </a:p>
+        </p:txBody>
+      </p:sp>
+      <p:sp>
+        <p:nvSpPr>
+          <p:cNvPr id="8" name="TextBox 7">
+            <a:extLst>
+              <a:ext uri="{FF2B5EF4-FFF2-40B4-BE49-F238E27FC236}">
+                <a16:creationId xmlns:a16="http://schemas.microsoft.com/office/drawing/2014/main" id="{C11FE9D2-7EF8-933D-B7A6-BA96A85F562F}"/>
+              </a:ext>
+            </a:extLst>
+          </p:cNvPr>
+          <p:cNvSpPr txBox="1"/>
+          <p:nvPr/>
+        </p:nvSpPr>
+        <p:spPr>
+          <a:xfrm>
+            <a:off x="6742484" y="1669076"/>
+            <a:ext cx="4896544" cy="4090607"/>
+          </a:xfrm>
+          <a:prstGeom prst="rect">
+            <a:avLst/>
+          </a:prstGeom>
+          <a:noFill/>
+        </p:spPr>
+        <p:txBody>
+          <a:bodyPr wrap="square" rtlCol="0">
+            <a:spAutoFit/>
+          </a:bodyPr>
+          <a:lstStyle>
+            <a:defPPr>
+              <a:defRPr lang="en-US"/>
+            </a:defPPr>
+            <a:lvl1pPr>
+              <a:lnSpc>
+                <a:spcPct val="150000"/>
+              </a:lnSpc>
+              <a:defRPr sz="2200"/>
+            </a:lvl1pPr>
+          </a:lstStyle>
+          <a:p>
+            <a:r>
+              <a:rPr lang="en-US" dirty="0"/>
+              <a:t>For an Online Banking App:</a:t>
+            </a:r>
+          </a:p>
+          <a:p>
+            <a:r>
+              <a:rPr lang="en-US" dirty="0"/>
+              <a:t>Security Testing checks:</a:t>
+            </a:r>
+          </a:p>
+          <a:p>
+            <a:pPr marL="342900" indent="-342900">
+              <a:buFont typeface="Arial" panose="020B0604020202020204" pitchFamily="34" charset="0"/>
+              <a:buChar char="•"/>
+            </a:pPr>
+            <a:r>
+              <a:rPr lang="en-US" dirty="0"/>
+              <a:t>Strong passwords </a:t>
+            </a:r>
+          </a:p>
+          <a:p>
+            <a:pPr marL="342900" indent="-342900">
+              <a:buFont typeface="Arial" panose="020B0604020202020204" pitchFamily="34" charset="0"/>
+              <a:buChar char="•"/>
+            </a:pPr>
+            <a:r>
+              <a:rPr lang="en-US" dirty="0"/>
+              <a:t>Secure login </a:t>
+            </a:r>
+          </a:p>
+          <a:p>
+            <a:pPr marL="342900" indent="-342900">
+              <a:buFont typeface="Arial" panose="020B0604020202020204" pitchFamily="34" charset="0"/>
+              <a:buChar char="•"/>
+            </a:pPr>
+            <a:r>
+              <a:rPr lang="en-US" dirty="0"/>
+              <a:t>Data encryption </a:t>
+            </a:r>
+          </a:p>
+          <a:p>
+            <a:pPr marL="342900" indent="-342900">
+              <a:buFont typeface="Arial" panose="020B0604020202020204" pitchFamily="34" charset="0"/>
+              <a:buChar char="•"/>
+            </a:pPr>
+            <a:r>
+              <a:rPr lang="en-US" dirty="0"/>
+              <a:t>Unauthorized access prevention </a:t>
+            </a:r>
+          </a:p>
+          <a:p>
+            <a:pPr marL="342900" indent="-342900">
+              <a:buFont typeface="Arial" panose="020B0604020202020204" pitchFamily="34" charset="0"/>
+              <a:buChar char="•"/>
+            </a:pPr>
+            <a:r>
+              <a:rPr lang="en-US" dirty="0"/>
+              <a:t>Safe money transfer</a:t>
+            </a:r>
+          </a:p>
+          <a:p>
+            <a:endParaRPr lang="en-IN" dirty="0"/>
+          </a:p>
+        </p:txBody>
+      </p:sp>
+    </p:spTree>
+    <p:extLst>
+      <p:ext uri="{BB962C8B-B14F-4D97-AF65-F5344CB8AC3E}">
+        <p14:creationId xmlns:p14="http://schemas.microsoft.com/office/powerpoint/2010/main" val="3853316336"/>
+      </p:ext>
+    </p:extLst>
+  </p:cSld>
+  <p:clrMapOvr>
+    <a:masterClrMapping/>
+  </p:clrMapOvr>
+  <mc:AlternateContent xmlns:mc="http://schemas.openxmlformats.org/markup-compatibility/2006" xmlns:p14="http://schemas.microsoft.com/office/powerpoint/2010/main">
+    <mc:Choice Requires="p14">
+      <p:transition spd="med" p14:dur="700">
+        <p:fade/>
+      </p:transition>
+    </mc:Choice>
+    <mc:Fallback xmlns="">
+      <p:transition spd="med">
+        <p:fade/>
+      </p:transition>
+    </mc:Fallback>
+  </mc:AlternateContent>
+</p:sld>
+</file>
+
+<file path=ppt/slides/slide36.xml><?xml version="1.0" encoding="utf-8"?>
+<p:sld xmlns:a="http://schemas.openxmlformats.org/drawingml/2006/main" xmlns:r="http://schemas.openxmlformats.org/officeDocument/2006/relationships" xmlns:p="http://schemas.openxmlformats.org/presentationml/2006/main">
+  <p:cSld>
+    <p:spTree>
+      <p:nvGrpSpPr>
+        <p:cNvPr id="1" name=""/>
+        <p:cNvGrpSpPr/>
+        <p:nvPr/>
+      </p:nvGrpSpPr>
+      <p:grpSpPr>
+        <a:xfrm>
+          <a:off x="0" y="0"/>
+          <a:ext cx="0" cy="0"/>
+          <a:chOff x="0" y="0"/>
+          <a:chExt cx="0" cy="0"/>
+        </a:xfrm>
+      </p:grpSpPr>
+      <p:pic>
+        <p:nvPicPr>
+          <p:cNvPr id="5" name="Picture 4">
+            <a:extLst>
+              <a:ext uri="{FF2B5EF4-FFF2-40B4-BE49-F238E27FC236}">
+                <a16:creationId xmlns:a16="http://schemas.microsoft.com/office/drawing/2014/main" id="{0FA16A63-BD98-5CA0-ACDD-0A02A6A7B0FD}"/>
+              </a:ext>
+            </a:extLst>
+          </p:cNvPr>
+          <p:cNvPicPr>
+            <a:picLocks noChangeAspect="1"/>
+          </p:cNvPicPr>
+          <p:nvPr/>
+        </p:nvPicPr>
+        <p:blipFill>
+          <a:blip r:embed="rId2"/>
+          <a:stretch>
+            <a:fillRect/>
+          </a:stretch>
+        </p:blipFill>
+        <p:spPr>
+          <a:xfrm>
+            <a:off x="909836" y="908720"/>
+            <a:ext cx="10678856" cy="4680520"/>
+          </a:xfrm>
+          <a:prstGeom prst="rect">
+            <a:avLst/>
+          </a:prstGeom>
+        </p:spPr>
+      </p:pic>
+    </p:spTree>
+    <p:extLst>
+      <p:ext uri="{BB962C8B-B14F-4D97-AF65-F5344CB8AC3E}">
+        <p14:creationId xmlns:p14="http://schemas.microsoft.com/office/powerpoint/2010/main" val="670635515"/>
       </p:ext>
     </p:extLst>
   </p:cSld>
